--- a/examples/outputs/video/dark-minimalist/compact/deck.pptx
+++ b/examples/outputs/video/dark-minimalist/compact/deck.pptx
@@ -304,10 +304,246 @@
           <c:layoutTarget val="inner"/>
           <c:xMode val="edge"/>
           <c:yMode val="edge"/>
+          <c:x val="0.0332"/>
+          <c:y val="0.0332"/>
+          <c:w val="0.9337"/>
+          <c:h val="0.9337"/>
+        </c:manualLayout>
+      </c:layout>
+      <c:doughnutChart>
+        <c:varyColors val="1"/>
+        <c:ser>
+          <c:idx val="0"/>
+          <c:order val="0"/>
+          <c:tx>
+            <c:strRef>
+              <c:f>Sheet1!$B$1</c:f>
+              <c:strCache>
+                <c:ptCount val="1"/>
+                <c:pt idx="0">
+                  <c:v>Состав</c:v>
+                </c:pt>
+              </c:strCache>
+            </c:strRef>
+          </c:tx>
+          <c:dPt>
+            <c:idx val="0"/>
+            <c:spPr>
+              <a:solidFill>
+                <a:srgbClr val="C2D076"/>
+              </a:solidFill>
+              <a:ln w="25400">
+                <a:solidFill>
+                  <a:srgbClr val="001514"/>
+                </a:solidFill>
+              </a:ln>
+            </c:spPr>
+          </c:dPt>
+          <c:dPt>
+            <c:idx val="1"/>
+            <c:spPr>
+              <a:solidFill>
+                <a:srgbClr val="E8EDCB"/>
+              </a:solidFill>
+              <a:ln w="25400">
+                <a:solidFill>
+                  <a:srgbClr val="001514"/>
+                </a:solidFill>
+              </a:ln>
+            </c:spPr>
+          </c:dPt>
+          <c:dLbls>
+            <c:dLbl>
+              <c:idx val="0"/>
+              <c:numFmt formatCode="0&quot;%&quot;;&quot;−&quot;0&quot;%&quot;;" sourceLinked="0"/>
+              <c:spPr>
+                <a:noFill/>
+                <a:ln>
+                  <a:noFill/>
+                </a:ln>
+              </c:spPr>
+              <c:txPr>
+                <a:bodyPr wrap="none"/>
+                <a:lstStyle/>
+                <a:p>
+                  <a:pPr>
+                    <a:defRPr sz="2200" b="0">
+                      <a:solidFill>
+                        <a:srgbClr val="001514"/>
+                      </a:solidFill>
+                      <a:latin typeface="Inter Light"/>
+                      <a:ea typeface="Inter Light"/>
+                      <a:cs typeface="Inter Light"/>
+                    </a:defRPr>
+                  </a:pPr>
+                  <a:endParaRPr lang="ru-RU"/>
+                </a:p>
+              </c:txPr>
+              <c:showLegendKey val="0"/>
+              <c:showVal val="1"/>
+              <c:showCatName val="0"/>
+              <c:showSerName val="0"/>
+              <c:showPercent val="0"/>
+              <c:showBubbleSize val="0"/>
+            </c:dLbl>
+            <c:dLbl>
+              <c:idx val="1"/>
+              <c:delete val="1"/>
+            </c:dLbl>
+            <c:numFmt formatCode="0&quot;%&quot;;&quot;−&quot;0&quot;%&quot;;" sourceLinked="0"/>
+            <c:spPr>
+              <a:noFill/>
+              <a:ln>
+                <a:noFill/>
+              </a:ln>
+            </c:spPr>
+            <c:txPr>
+              <a:bodyPr wrap="none"/>
+              <a:lstStyle/>
+              <a:p>
+                <a:pPr>
+                  <a:defRPr sz="2200" b="0">
+                    <a:solidFill>
+                      <a:srgbClr val="FFFFFF"/>
+                    </a:solidFill>
+                    <a:latin typeface="Inter Light"/>
+                    <a:ea typeface="Inter Light"/>
+                    <a:cs typeface="Inter Light"/>
+                  </a:defRPr>
+                </a:pPr>
+                <a:endParaRPr lang="ru-RU"/>
+              </a:p>
+            </c:txPr>
+            <c:showLegendKey val="0"/>
+            <c:showVal val="1"/>
+            <c:showCatName val="0"/>
+            <c:showSerName val="0"/>
+            <c:showPercent val="0"/>
+            <c:showBubbleSize val="0"/>
+            <c:showLeaderLines val="0"/>
+          </c:dLbls>
+          <c:cat>
+            <c:strRef>
+              <c:f>Sheet1!$A$2:$A$3</c:f>
+              <c:strCache>
+                <c:ptCount val="2"/>
+                <c:pt idx="0">
+                  <c:v>Свободные фигуры</c:v>
+                </c:pt>
+                <c:pt idx="1">
+                  <c:v>Плейсхолдеры</c:v>
+                </c:pt>
+              </c:strCache>
+            </c:strRef>
+          </c:cat>
+          <c:val>
+            <c:numRef>
+              <c:f>Sheet1!$B$2:$B$3</c:f>
+              <c:numCache>
+                <c:formatCode>General</c:formatCode>
+                <c:ptCount val="2"/>
+                <c:pt idx="0">
+                  <c:v>95.0</c:v>
+                </c:pt>
+                <c:pt idx="1">
+                  <c:v>5.0</c:v>
+                </c:pt>
+              </c:numCache>
+            </c:numRef>
+          </c:val>
+        </c:ser>
+        <c:dLbls>
+          <c:numFmt formatCode="0&quot;%&quot;;&quot;−&quot;0&quot;%&quot;;" sourceLinked="0"/>
+          <c:spPr>
+            <a:noFill/>
+            <a:ln>
+              <a:noFill/>
+            </a:ln>
+          </c:spPr>
+          <c:txPr>
+            <a:bodyPr wrap="none"/>
+            <a:lstStyle/>
+            <a:p>
+              <a:pPr>
+                <a:defRPr sz="2200" b="0">
+                  <a:solidFill>
+                    <a:srgbClr val="FFFFFF"/>
+                  </a:solidFill>
+                  <a:latin typeface="Inter Light"/>
+                  <a:ea typeface="Inter Light"/>
+                  <a:cs typeface="Inter Light"/>
+                </a:defRPr>
+              </a:pPr>
+              <a:endParaRPr lang="ru-RU"/>
+            </a:p>
+          </c:txPr>
+          <c:showLegendKey val="0"/>
+          <c:showVal val="1"/>
+          <c:showCatName val="0"/>
+          <c:showSerName val="0"/>
+          <c:showPercent val="0"/>
+          <c:showBubbleSize val="0"/>
+          <c:showLeaderLines val="0"/>
+        </c:dLbls>
+        <c:firstSliceAng val="0"/>
+        <c:holeSize val="56"/>
+      </c:doughnutChart>
+      <c:spPr>
+        <a:noFill/>
+        <a:ln>
+          <a:noFill/>
+        </a:ln>
+      </c:spPr>
+    </c:plotArea>
+    <c:plotVisOnly val="1"/>
+    <c:dispBlanksAs val="gap"/>
+    <c:showDLblsOverMax val="0"/>
+  </c:chart>
+  <c:spPr>
+    <a:noFill/>
+    <a:ln>
+      <a:noFill/>
+    </a:ln>
+  </c:spPr>
+  <c:txPr>
+    <a:bodyPr/>
+    <a:lstStyle/>
+    <a:p>
+      <a:pPr>
+        <a:defRPr sz="1800">
+          <a:solidFill>
+            <a:srgbClr val="FFFFFF"/>
+          </a:solidFill>
+          <a:latin typeface="Inter Light"/>
+          <a:ea typeface="Inter Light"/>
+          <a:cs typeface="Inter Light"/>
+        </a:defRPr>
+      </a:pPr>
+      <a:endParaRPr/>
+    </a:p>
+  </c:txPr>
+  <c:externalData r:id="rId1">
+    <c:autoUpdate val="0"/>
+  </c:externalData>
+</c:chartSpace>
+</file>
+
+<file path=ppt/charts/chart2.xml><?xml version="1.0" encoding="utf-8"?>
+<c:chartSpace xmlns:c="http://schemas.openxmlformats.org/drawingml/2006/chart" xmlns:a="http://schemas.openxmlformats.org/drawingml/2006/main" xmlns:r="http://schemas.openxmlformats.org/officeDocument/2006/relationships">
+  <c:date1904 val="0"/>
+  <c:roundedCorners val="0"/>
+  <c:chart>
+    <c:autoTitleDeleted val="1"/>
+    <c:plotArea>
+      <c:layout>
+        <c:manualLayout>
+          <c:layoutTarget val="inner"/>
+          <c:xMode val="edge"/>
+          <c:yMode val="edge"/>
           <c:x val="0.1588"/>
-          <c:y val="0.0153"/>
+          <c:y val="0.0159"/>
           <c:w val="0.7875"/>
-          <c:h val="0.9694"/>
+          <c:h val="0.9682"/>
         </c:manualLayout>
       </c:layout>
       <c:barChart>
@@ -323,7 +559,7 @@
               <c:strCache>
                 <c:ptCount val="1"/>
                 <c:pt idx="0">
-                  <c:v>Число проверок</c:v>
+                  <c:v>Проверки</c:v>
                 </c:pt>
               </c:strCache>
             </c:strRef>
@@ -454,7 +690,7 @@
           </c:val>
         </c:ser>
         <c:dLbls>
-          <c:numFmt formatCode="#,##0&quot; проверок&quot;;&quot;−&quot;#,##0&quot; проверок&quot;;" sourceLinked="0"/>
+          <c:numFmt formatCode="#,##0;&quot;−&quot;#,##0;" sourceLinked="0"/>
           <c:spPr>
             <a:noFill/>
             <a:ln>
@@ -583,7 +819,7 @@
 </c:chartSpace>
 </file>
 
-<file path=ppt/charts/chart2.xml><?xml version="1.0" encoding="utf-8"?>
+<file path=ppt/charts/chart3.xml><?xml version="1.0" encoding="utf-8"?>
 <c:chartSpace xmlns:c="http://schemas.openxmlformats.org/drawingml/2006/chart" xmlns:a="http://schemas.openxmlformats.org/drawingml/2006/main" xmlns:r="http://schemas.openxmlformats.org/officeDocument/2006/relationships">
   <c:date1904 val="0"/>
   <c:roundedCorners val="0"/>
@@ -733,7 +969,7 @@
           </c:val>
         </c:ser>
         <c:dLbls>
-          <c:numFmt formatCode="#,##0&quot; сек&quot;;&quot;−&quot;#,##0&quot; сек&quot;;" sourceLinked="0"/>
+          <c:numFmt formatCode="#,##0&quot; секунд&quot;;&quot;−&quot;#,##0&quot; секунд&quot;;" sourceLinked="0"/>
           <c:spPr>
             <a:noFill/>
             <a:ln>
@@ -1336,7 +1572,7 @@
           <a:p>
             <a:r>
               <a:rPr lang="ru-RU"/>
-              <a:t>Три основные проблемы: ручная вёрстка, ИИ, который не воспроизводит стиль компании, и шаблоны, которые не являются инструкциями.</a:t>
+              <a:t>ИИ пока не способен воспроизводить фирменный стиль, а шаблоны не дают понятной инструкции для новых слайдов.</a:t>
             </a:r>
           </a:p>
           <a:p>
@@ -1400,7 +1636,7 @@
           <a:p>
             <a:r>
               <a:rPr lang="ru-RU"/>
-              <a:t>Verstka использует шаблон как набор дизайнерских правил и на его основе генерирует три редактируемые презентации.</a:t>
+              <a:t>В реальных шаблонах 95% фигур — свободные, поэтому правила оформления приходится выводить из самих слайдов-образцов, включая палитру, кегли, сетку, поля, логотипы и колонтитулы.</a:t>
             </a:r>
           </a:p>
           <a:p>
@@ -1463,6 +1699,12 @@
           <a:lstStyle/>
           <a:p>
             <a:r>
+              <a:rPr lang="ru-RU"/>
+              <a:t>Verstka использует шаблон как набор правил, а не макетов, чтобы автоматически создать три редактируемые презентации на основе текста.</a:t>
+            </a:r>
+          </a:p>
+          <a:p>
+            <a:r>
               <a:t>[verstka:sl4]</a:t>
             </a:r>
           </a:p>
@@ -1522,7 +1764,7 @@
           <a:p>
             <a:r>
               <a:rPr lang="ru-RU"/>
-              <a:t>Одинаковое содержание, разная подача.</a:t>
+              <a:t>Агент работает на открытых моделях до 35 миллиардов параметров с лицензией Apache 2.0. Процесс включает анализ текста, проектирование, проверку и вёрстку слайдов.</a:t>
             </a:r>
           </a:p>
           <a:p>
@@ -1586,7 +1828,7 @@
           <a:p>
             <a:r>
               <a:rPr lang="ru-RU"/>
-              <a:t>На диаграмме показано распределение 41 проверки по категориям: 12 — целостность, 11 — вёрстка, 7 — шаблон, 6 — контент, 5 — плотность.</a:t>
+              <a:t>Содержание одно, подача разная. | Вариант | Подача | Когда подходит |. |---|---|---|. | Структурный | одна мысль на слайд, строгая сетка | отчёт и защита проекта |. | Визуальный | крупные цифры и наглядные схемы | питч и выступление со сцены |. | Компактный | вывод первой строкой, данные справа | рассылка руководителю |.</a:t>
             </a:r>
           </a:p>
           <a:p>
@@ -1650,7 +1892,7 @@
           <a:p>
             <a:r>
               <a:rPr lang="ru-RU"/>
-              <a:t>Каждое число плана сверяется с текстом до вёрстки и ещё раз в готовом PPTX.</a:t>
+              <a:t>Каждый слайд проходит 41 проверку: 12 на целостность, 11 на вёрстку, 7 на шаблон, 6 на контент и 5 на плотность. Найденные проблемы помечаются на слайде и исправляются автоматически.</a:t>
             </a:r>
           </a:p>
           <a:p>
@@ -1714,7 +1956,7 @@
           <a:p>
             <a:r>
               <a:rPr lang="ru-RU"/>
-              <a:t>Регрессионный корпус включает 87 чужих шаблонов и 261 презентацию на них. Средняя оценка проверки качества по корпусу — 99 из 100. Сервис поддерживает 12 форматов: pptx, potx, ppt, odp, thmx и другие.</a:t>
+              <a:t>Каждое число в презентации сверяется дважды: до вёрстки и после. Всего было подготовлено 9 демонстрационных презентаций без выдуманных чисел.</a:t>
             </a:r>
           </a:p>
           <a:p>
@@ -1778,7 +2020,7 @@
           <a:p>
             <a:r>
               <a:rPr lang="ru-RU"/>
-              <a:t>Время генерации всех шаблонов меньше 5 минут, что подтверждает высокую скорость работы системы. VK Tech генерируется за 113 секунд, VK Education — за 145 секунд, VK WorkSpace — за 175 секунд.</a:t>
+              <a:t>Сервис поддерживает 12 форматов файлов, включая pptx, potx, ppt, odp, thmx и другие. Он проверяет качество презентаций по 87 чужим шаблонам, средняя оценка качества — 99 из 100.</a:t>
             </a:r>
           </a:p>
           <a:p>
@@ -1842,7 +2084,7 @@
           <a:p>
             <a:r>
               <a:rPr lang="ru-RU"/>
-              <a:t>Все три модели используют лицензию Apache 2.0 и предназначены для разных сценариев использования: основная модель и два запасных звена.</a:t>
+              <a:t>Время генерации трёх вариантов на шаблонах датасета: VK Tech — 113 секунд, VK Education — 145 секунд, VK WorkSpace — 175 секунд. Все значения значительно ниже установленного лимита в 5 минут.</a:t>
             </a:r>
           </a:p>
           <a:p>
@@ -1906,7 +2148,7 @@
           <a:p>
             <a:r>
               <a:rPr lang="ru-RU"/>
-              <a:t>2 028 автотестов, PPTX с редактируемыми объектами, PDF и HTML, чат с агентом для правок. Дальше — генерация изображений внутри слайдов и переход на инференс VK.</a:t>
+              <a:t>После финала компания планирует три ключевых шага: переход на более мощные технологии инференса, внедрение генерации изображений в слайдах и запуск пилота на шаблонах и сценариях VK Tech.</a:t>
             </a:r>
           </a:p>
           <a:p>
@@ -4241,7 +4483,7 @@
         <p:spPr>
           <a:xfrm>
             <a:off x="619057" y="2623820"/>
-            <a:ext cx="9424071" cy="1527657"/>
+            <a:ext cx="9651876" cy="1527657"/>
           </a:xfrm>
           <a:prstGeom prst="rect">
             <a:avLst/>
@@ -4284,7 +4526,7 @@
                 <a:cs typeface="Inter Medium"/>
                 <a:sym typeface="Inter Medium"/>
               </a:rPr>
-              <a:t>Оформление отнимает больше времени, чем содержание</a:t>
+              <a:t>Вёрстка забирает больше времени, чем написание текста</a:t>
             </a:r>
             <a:endParaRPr>
               <a:latin typeface="Inter Medium"/>
@@ -4297,18 +4539,82 @@
       </p:sp>
       <p:sp>
         <p:nvSpPr>
-          <p:cNvPr id="43" name="Card 43"/>
+          <p:cNvPr id="43" name="Conclusion bar 43"/>
           <p:cNvSpPr/>
           <p:nvPr/>
         </p:nvSpPr>
         <p:spPr>
           <a:xfrm>
-            <a:off x="1024128" y="4665827"/>
-            <a:ext cx="5120640" cy="3745870"/>
+            <a:off x="1024128" y="4708484"/>
+            <a:ext cx="61722" cy="366654"/>
+          </a:xfrm>
+          <a:prstGeom prst="rect">
+            <a:avLst/>
+          </a:prstGeom>
+          <a:solidFill>
+            <a:srgbClr val="C2D076"/>
+          </a:solidFill>
+          <a:ln>
+            <a:noFill/>
+          </a:ln>
+        </p:spPr>
+      </p:sp>
+      <p:sp>
+        <p:nvSpPr>
+          <p:cNvPr id="44" name="Conclusion 44"/>
+          <p:cNvSpPr txBox="1"/>
+          <p:nvPr/>
+        </p:nvSpPr>
+        <p:spPr>
+          <a:xfrm>
+            <a:off x="1370228" y="4665827"/>
+            <a:ext cx="14269669" cy="451968"/>
+          </a:xfrm>
+          <a:prstGeom prst="rect">
+            <a:avLst/>
+          </a:prstGeom>
+          <a:noFill/>
+        </p:spPr>
+        <p:txBody>
+          <a:bodyPr wrap="square" lIns="0" tIns="0" rIns="0" bIns="0" anchor="t" rtlCol="0">
+            <a:noAutofit/>
+          </a:bodyPr>
+          <a:lstStyle/>
+          <a:p>
+            <a:pPr algn="l" marL="0" indent="0">
+              <a:lnSpc>
+                <a:spcPct val="100000"/>
+              </a:lnSpc>
+              <a:buNone/>
+            </a:pPr>
+            <a:r>
+              <a:rPr lang="ru-RU" sz="2799" b="1" cap="none" spc="0" baseline="0" dirty="0">
+                <a:solidFill>
+                  <a:srgbClr val="C2D076"/>
+                </a:solidFill>
+                <a:latin typeface="Inter Light"/>
+                <a:cs typeface="Inter Light"/>
+              </a:rPr>
+              <a:t>Ручная вёрстка, ИИ и шаблоны — три проблемы, которые тормозят</a:t>
+            </a:r>
+            <a:endParaRPr lang="ru-RU" sz="2799"/>
+          </a:p>
+        </p:txBody>
+      </p:sp>
+      <p:sp>
+        <p:nvSpPr>
+          <p:cNvPr id="45" name="Card 45"/>
+          <p:cNvSpPr/>
+          <p:nvPr/>
+        </p:nvSpPr>
+        <p:spPr>
+          <a:xfrm>
+            <a:off x="1024128" y="5488127"/>
+            <a:ext cx="5120640" cy="3319302"/>
           </a:xfrm>
           <a:prstGeom prst="roundRect">
             <a:avLst>
-              <a:gd name="adj" fmla="val 2929"/>
+              <a:gd name="adj" fmla="val 3305"/>
             </a:avLst>
           </a:prstGeom>
           <a:solidFill>
@@ -4321,13 +4627,13 @@
       </p:sp>
       <p:sp>
         <p:nvSpPr>
-          <p:cNvPr id="44" name="Rule 44"/>
+          <p:cNvPr id="46" name="Rule 46"/>
           <p:cNvSpPr/>
           <p:nvPr/>
         </p:nvSpPr>
         <p:spPr>
           <a:xfrm>
-            <a:off x="1382572" y="5024271"/>
+            <a:off x="1382572" y="5846571"/>
             <a:ext cx="720090" cy="38100"/>
           </a:xfrm>
           <a:prstGeom prst="rect">
@@ -4343,13 +4649,13 @@
       </p:sp>
       <p:sp>
         <p:nvSpPr>
-          <p:cNvPr id="45" name="Column title 45"/>
+          <p:cNvPr id="47" name="Column title 47"/>
           <p:cNvSpPr txBox="1"/>
           <p:nvPr/>
         </p:nvSpPr>
         <p:spPr>
           <a:xfrm>
-            <a:off x="1382572" y="5247537"/>
+            <a:off x="1382572" y="6069837"/>
             <a:ext cx="4403752" cy="451968"/>
           </a:xfrm>
           <a:prstGeom prst="rect">
@@ -4385,14 +4691,14 @@
       </p:sp>
       <p:sp>
         <p:nvSpPr>
-          <p:cNvPr id="46" name="Column 46"/>
+          <p:cNvPr id="48" name="Column 48"/>
           <p:cNvSpPr txBox="1"/>
           <p:nvPr/>
         </p:nvSpPr>
         <p:spPr>
           <a:xfrm>
-            <a:off x="1382572" y="5895015"/>
-            <a:ext cx="4403752" cy="2158238"/>
+            <a:off x="1382572" y="6717315"/>
+            <a:ext cx="4403752" cy="1731670"/>
           </a:xfrm>
           <a:prstGeom prst="rect">
             <a:avLst/>
@@ -4431,18 +4737,18 @@
       </p:sp>
       <p:sp>
         <p:nvSpPr>
-          <p:cNvPr id="47" name="Card 47"/>
+          <p:cNvPr id="49" name="Card 49"/>
           <p:cNvSpPr/>
           <p:nvPr/>
         </p:nvSpPr>
         <p:spPr>
           <a:xfrm>
-            <a:off x="6583680" y="4665827"/>
-            <a:ext cx="5120640" cy="3745870"/>
+            <a:off x="6583680" y="5488127"/>
+            <a:ext cx="5120640" cy="3319302"/>
           </a:xfrm>
           <a:prstGeom prst="roundRect">
             <a:avLst>
-              <a:gd name="adj" fmla="val 2929"/>
+              <a:gd name="adj" fmla="val 3305"/>
             </a:avLst>
           </a:prstGeom>
           <a:solidFill>
@@ -4455,13 +4761,13 @@
       </p:sp>
       <p:sp>
         <p:nvSpPr>
-          <p:cNvPr id="48" name="Rule 48"/>
+          <p:cNvPr id="50" name="Rule 50"/>
           <p:cNvSpPr/>
           <p:nvPr/>
         </p:nvSpPr>
         <p:spPr>
           <a:xfrm>
-            <a:off x="6942124" y="5024271"/>
+            <a:off x="6942124" y="5846571"/>
             <a:ext cx="720090" cy="38100"/>
           </a:xfrm>
           <a:prstGeom prst="rect">
@@ -4477,13 +4783,13 @@
       </p:sp>
       <p:sp>
         <p:nvSpPr>
-          <p:cNvPr id="49" name="Column title 49"/>
+          <p:cNvPr id="51" name="Column title 51"/>
           <p:cNvSpPr txBox="1"/>
           <p:nvPr/>
         </p:nvSpPr>
         <p:spPr>
           <a:xfrm>
-            <a:off x="6942124" y="5247537"/>
+            <a:off x="6942124" y="6069837"/>
             <a:ext cx="4403752" cy="451968"/>
           </a:xfrm>
           <a:prstGeom prst="rect">
@@ -4519,14 +4825,14 @@
       </p:sp>
       <p:sp>
         <p:nvSpPr>
-          <p:cNvPr id="50" name="Column 50"/>
+          <p:cNvPr id="52" name="Column 52"/>
           <p:cNvSpPr txBox="1"/>
           <p:nvPr/>
         </p:nvSpPr>
         <p:spPr>
           <a:xfrm>
-            <a:off x="6942124" y="5895015"/>
-            <a:ext cx="4403752" cy="2158238"/>
+            <a:off x="6942124" y="6717315"/>
+            <a:ext cx="4403752" cy="1731670"/>
           </a:xfrm>
           <a:prstGeom prst="rect">
             <a:avLst/>
@@ -4557,7 +4863,7 @@
                 <a:latin typeface="Inter Light"/>
                 <a:cs typeface="Inter Light"/>
               </a:rPr>
-              <a:t>Нейросети неплохо пишут текст, но не воспроизводят дизайн-⁠систему компании</a:t>
+              <a:t>Нейросети пишут текст, но не воспроизводят дизайн-⁠систему</a:t>
             </a:r>
             <a:endParaRPr lang="ru-RU" sz="2799"/>
           </a:p>
@@ -4565,18 +4871,18 @@
       </p:sp>
       <p:sp>
         <p:nvSpPr>
-          <p:cNvPr id="51" name="Card 51"/>
+          <p:cNvPr id="53" name="Card 53"/>
           <p:cNvSpPr/>
           <p:nvPr/>
         </p:nvSpPr>
         <p:spPr>
           <a:xfrm>
-            <a:off x="12143232" y="4665827"/>
-            <a:ext cx="5120640" cy="3745870"/>
+            <a:off x="12143232" y="5488127"/>
+            <a:ext cx="5120640" cy="3319302"/>
           </a:xfrm>
           <a:prstGeom prst="roundRect">
             <a:avLst>
-              <a:gd name="adj" fmla="val 2929"/>
+              <a:gd name="adj" fmla="val 3305"/>
             </a:avLst>
           </a:prstGeom>
           <a:solidFill>
@@ -4589,13 +4895,13 @@
       </p:sp>
       <p:sp>
         <p:nvSpPr>
-          <p:cNvPr id="52" name="Rule 52"/>
+          <p:cNvPr id="54" name="Rule 54"/>
           <p:cNvSpPr/>
           <p:nvPr/>
         </p:nvSpPr>
         <p:spPr>
           <a:xfrm>
-            <a:off x="12501676" y="5024271"/>
+            <a:off x="12501676" y="5846571"/>
             <a:ext cx="720090" cy="38100"/>
           </a:xfrm>
           <a:prstGeom prst="rect">
@@ -4611,13 +4917,13 @@
       </p:sp>
       <p:sp>
         <p:nvSpPr>
-          <p:cNvPr id="53" name="Column title 53"/>
+          <p:cNvPr id="55" name="Column title 55"/>
           <p:cNvSpPr txBox="1"/>
           <p:nvPr/>
         </p:nvSpPr>
         <p:spPr>
           <a:xfrm>
-            <a:off x="12501676" y="5247537"/>
+            <a:off x="12501676" y="6069837"/>
             <a:ext cx="4403752" cy="451968"/>
           </a:xfrm>
           <a:prstGeom prst="rect">
@@ -4653,14 +4959,14 @@
       </p:sp>
       <p:sp>
         <p:nvSpPr>
-          <p:cNvPr id="54" name="Column 54"/>
+          <p:cNvPr id="56" name="Column 56"/>
           <p:cNvSpPr txBox="1"/>
           <p:nvPr/>
         </p:nvSpPr>
         <p:spPr>
           <a:xfrm>
-            <a:off x="12501676" y="5895015"/>
-            <a:ext cx="4403752" cy="2158238"/>
+            <a:off x="12501676" y="6717315"/>
+            <a:ext cx="4403752" cy="1731670"/>
           </a:xfrm>
           <a:prstGeom prst="rect">
             <a:avLst/>
@@ -4691,7 +4997,7 @@
                 <a:latin typeface="Inter Light"/>
                 <a:cs typeface="Inter Light"/>
               </a:rPr>
-              <a:t>Плейсхолдеры не объясняют, как построить новый слайд</a:t>
+              <a:t>по слайдам-⁠образцам не понять, как собрать новый слайд</a:t>
             </a:r>
             <a:endParaRPr lang="ru-RU" sz="2799"/>
           </a:p>
@@ -4731,7 +5037,7 @@
         <p:spPr>
           <a:xfrm>
             <a:off x="619057" y="2623820"/>
-            <a:ext cx="11696789" cy="1527657"/>
+            <a:ext cx="15727680" cy="944880"/>
           </a:xfrm>
           <a:prstGeom prst="rect">
             <a:avLst/>
@@ -4765,7 +5071,7 @@
               <a:buNone/>
             </a:pPr>
             <a:r>
-              <a:rPr i="0" lang="ru-RU" sz="2799" u="none" cap="none" strike="noStrike">
+              <a:rPr i="0" lang="ru-RU" sz="4712" u="none" cap="none" strike="noStrike">
                 <a:solidFill>
                   <a:srgbClr val="C2D076"/>
                 </a:solidFill>
@@ -4774,7 +5080,7 @@
                 <a:cs typeface="Inter Medium"/>
                 <a:sym typeface="Inter Medium"/>
               </a:rPr>
-              <a:t>2 028 автотестов и редактируемые объекты в форматах PPTX, PDF и HTML</a:t>
+              <a:t>Три шага развития после финала</a:t>
             </a:r>
             <a:endParaRPr>
               <a:latin typeface="Inter Medium"/>
@@ -4793,7 +5099,7 @@
         </p:nvSpPr>
         <p:spPr>
           <a:xfrm>
-            <a:off x="1024128" y="4911181"/>
+            <a:off x="1024128" y="4383014"/>
             <a:ext cx="227401" cy="227401"/>
           </a:xfrm>
           <a:prstGeom prst="ellipse">
@@ -4815,7 +5121,92 @@
         </p:nvSpPr>
         <p:spPr>
           <a:xfrm>
-            <a:off x="1981606" y="4665827"/>
+            <a:off x="1981606" y="4137660"/>
+            <a:ext cx="12034317" cy="1461618"/>
+          </a:xfrm>
+          <a:prstGeom prst="rect">
+            <a:avLst/>
+          </a:prstGeom>
+          <a:noFill/>
+        </p:spPr>
+        <p:txBody>
+          <a:bodyPr wrap="square" lIns="0" tIns="0" rIns="0" bIns="0" anchor="t" rtlCol="0">
+            <a:noAutofit/>
+          </a:bodyPr>
+          <a:lstStyle/>
+          <a:p>
+            <a:pPr algn="l" marL="0" indent="0">
+              <a:lnSpc>
+                <a:spcPct val="100000"/>
+              </a:lnSpc>
+              <a:buNone/>
+            </a:pPr>
+            <a:r>
+              <a:rPr lang="ru-RU" sz="4712" b="0" cap="none" spc="0" baseline="0" dirty="0">
+                <a:solidFill>
+                  <a:srgbClr val="FFFFFF"/>
+                </a:solidFill>
+                <a:latin typeface="Inter Light"/>
+                <a:cs typeface="Inter Light"/>
+              </a:rPr>
+              <a:t>Переход на инференс VK и модель Qwen3.8-⁠27B</a:t>
+            </a:r>
+            <a:endParaRPr lang="ru-RU" sz="4712"/>
+          </a:p>
+        </p:txBody>
+      </p:sp>
+      <p:cxnSp>
+        <p:nvCxnSpPr>
+          <p:cNvPr id="45" name="Line 45"/>
+          <p:cNvCxnSpPr/>
+          <p:nvPr/>
+        </p:nvCxnSpPr>
+        <p:spPr>
+          <a:xfrm>
+            <a:off x="1981606" y="6048095"/>
+            <a:ext cx="12034317" cy="0"/>
+          </a:xfrm>
+          <a:prstGeom prst="line">
+            <a:avLst/>
+          </a:prstGeom>
+          <a:ln w="9525">
+            <a:solidFill>
+              <a:srgbClr val="384848"/>
+            </a:solidFill>
+          </a:ln>
+        </p:spPr>
+      </p:cxnSp>
+      <p:sp>
+        <p:nvSpPr>
+          <p:cNvPr id="46" name="Marker 46"/>
+          <p:cNvSpPr/>
+          <p:nvPr/>
+        </p:nvSpPr>
+        <p:spPr>
+          <a:xfrm>
+            <a:off x="1024128" y="6742266"/>
+            <a:ext cx="227401" cy="227401"/>
+          </a:xfrm>
+          <a:prstGeom prst="ellipse">
+            <a:avLst/>
+          </a:prstGeom>
+          <a:solidFill>
+            <a:srgbClr val="C2D076"/>
+          </a:solidFill>
+          <a:ln>
+            <a:noFill/>
+          </a:ln>
+        </p:spPr>
+      </p:sp>
+      <p:sp>
+        <p:nvSpPr>
+          <p:cNvPr id="47" name="Item 47"/>
+          <p:cNvSpPr txBox="1"/>
+          <p:nvPr/>
+        </p:nvSpPr>
+        <p:spPr>
+          <a:xfrm>
+            <a:off x="1981606" y="6496912"/>
             <a:ext cx="12034317" cy="743509"/>
           </a:xfrm>
           <a:prstGeom prst="rect">
@@ -4843,7 +5234,7 @@
                 <a:latin typeface="Inter Light"/>
                 <a:cs typeface="Inter Light"/>
               </a:rPr>
-              <a:t>Чат с агентом для правок</a:t>
+              <a:t>Генерация изображений внутри слайдов</a:t>
             </a:r>
             <a:endParaRPr lang="ru-RU" sz="4712"/>
           </a:p>
@@ -4851,13 +5242,13 @@
       </p:sp>
       <p:cxnSp>
         <p:nvCxnSpPr>
-          <p:cNvPr id="45" name="Line 45"/>
+          <p:cNvPr id="48" name="Line 48"/>
           <p:cNvCxnSpPr/>
           <p:nvPr/>
         </p:nvCxnSpPr>
         <p:spPr>
           <a:xfrm>
-            <a:off x="1981606" y="5768390"/>
+            <a:off x="1981606" y="7689238"/>
             <a:ext cx="12034317" cy="0"/>
           </a:xfrm>
           <a:prstGeom prst="line">
@@ -4872,13 +5263,13 @@
       </p:cxnSp>
       <p:sp>
         <p:nvSpPr>
-          <p:cNvPr id="46" name="Marker 46"/>
+          <p:cNvPr id="49" name="Marker 49"/>
           <p:cNvSpPr/>
           <p:nvPr/>
         </p:nvSpPr>
         <p:spPr>
           <a:xfrm>
-            <a:off x="1024128" y="6372798"/>
+            <a:off x="1024128" y="8383409"/>
             <a:ext cx="227401" cy="227401"/>
           </a:xfrm>
           <a:prstGeom prst="ellipse">
@@ -4894,98 +5285,13 @@
       </p:sp>
       <p:sp>
         <p:nvSpPr>
-          <p:cNvPr id="47" name="Item 47"/>
-          <p:cNvSpPr txBox="1"/>
-          <p:nvPr/>
-        </p:nvSpPr>
-        <p:spPr>
-          <a:xfrm>
-            <a:off x="1981606" y="6127444"/>
-            <a:ext cx="12034317" cy="1461618"/>
-          </a:xfrm>
-          <a:prstGeom prst="rect">
-            <a:avLst/>
-          </a:prstGeom>
-          <a:noFill/>
-        </p:spPr>
-        <p:txBody>
-          <a:bodyPr wrap="square" lIns="0" tIns="0" rIns="0" bIns="0" anchor="t" rtlCol="0">
-            <a:noAutofit/>
-          </a:bodyPr>
-          <a:lstStyle/>
-          <a:p>
-            <a:pPr algn="l" marL="0" indent="0">
-              <a:lnSpc>
-                <a:spcPct val="100000"/>
-              </a:lnSpc>
-              <a:buNone/>
-            </a:pPr>
-            <a:r>
-              <a:rPr lang="ru-RU" sz="4712" b="0" cap="none" spc="0" baseline="0" dirty="0">
-                <a:solidFill>
-                  <a:srgbClr val="FFFFFF"/>
-                </a:solidFill>
-                <a:latin typeface="Inter Light"/>
-                <a:cs typeface="Inter Light"/>
-              </a:rPr>
-              <a:t>Генерация изображений внутри слайдов — в планах</a:t>
-            </a:r>
-            <a:endParaRPr lang="ru-RU" sz="4712"/>
-          </a:p>
-        </p:txBody>
-      </p:sp>
-      <p:cxnSp>
-        <p:nvCxnSpPr>
-          <p:cNvPr id="48" name="Line 48"/>
-          <p:cNvCxnSpPr/>
-          <p:nvPr/>
-        </p:nvCxnSpPr>
-        <p:spPr>
-          <a:xfrm>
-            <a:off x="1981606" y="7948116"/>
-            <a:ext cx="12034317" cy="0"/>
-          </a:xfrm>
-          <a:prstGeom prst="line">
-            <a:avLst/>
-          </a:prstGeom>
-          <a:ln w="9525">
-            <a:solidFill>
-              <a:srgbClr val="384848"/>
-            </a:solidFill>
-          </a:ln>
-        </p:spPr>
-      </p:cxnSp>
-      <p:sp>
-        <p:nvSpPr>
-          <p:cNvPr id="49" name="Marker 49"/>
-          <p:cNvSpPr/>
-          <p:nvPr/>
-        </p:nvSpPr>
-        <p:spPr>
-          <a:xfrm>
-            <a:off x="1024128" y="8552524"/>
-            <a:ext cx="227401" cy="227401"/>
-          </a:xfrm>
-          <a:prstGeom prst="ellipse">
-            <a:avLst/>
-          </a:prstGeom>
-          <a:solidFill>
-            <a:srgbClr val="C2D076"/>
-          </a:solidFill>
-          <a:ln>
-            <a:noFill/>
-          </a:ln>
-        </p:spPr>
-      </p:sp>
-      <p:sp>
-        <p:nvSpPr>
           <p:cNvPr id="50" name="Item 50"/>
           <p:cNvSpPr txBox="1"/>
           <p:nvPr/>
         </p:nvSpPr>
         <p:spPr>
           <a:xfrm>
-            <a:off x="1981606" y="8307170"/>
+            <a:off x="1981606" y="8138055"/>
             <a:ext cx="12034317" cy="743509"/>
           </a:xfrm>
           <a:prstGeom prst="rect">
@@ -5013,7 +5319,7 @@
                 <a:latin typeface="Inter Light"/>
                 <a:cs typeface="Inter Light"/>
               </a:rPr>
-              <a:t>Переход на инференс VK — в планах</a:t>
+              <a:t>Пилот на шаблонах и сценариях VK Tech</a:t>
             </a:r>
             <a:endParaRPr lang="ru-RU" sz="4712"/>
           </a:p>
@@ -5096,7 +5402,7 @@
                 <a:cs typeface="Inter Medium"/>
                 <a:sym typeface="Inter Medium"/>
               </a:rPr>
-              <a:t>Verstka создаёт три презентации за 2⁠–⁠3 минуты</a:t>
+              <a:t>95% фигур — свободные, 5% — плейсхолдеры</a:t>
             </a:r>
             <a:endParaRPr>
               <a:latin typeface="Inter Medium"/>
@@ -5109,60 +5415,14 @@
       </p:sp>
       <p:sp>
         <p:nvSpPr>
-          <p:cNvPr id="67" name="Card 67"/>
-          <p:cNvSpPr/>
+          <p:cNvPr id="43" name="Chart note 43"/>
+          <p:cNvSpPr txBox="1"/>
           <p:nvPr/>
         </p:nvSpPr>
         <p:spPr>
           <a:xfrm>
             <a:off x="1024128" y="3947718"/>
-            <a:ext cx="5120640" cy="4558253"/>
-          </a:xfrm>
-          <a:prstGeom prst="roundRect">
-            <a:avLst>
-              <a:gd name="adj" fmla="val 2407"/>
-            </a:avLst>
-          </a:prstGeom>
-          <a:solidFill>
-            <a:srgbClr val="000000"/>
-          </a:solidFill>
-          <a:ln>
-            <a:noFill/>
-          </a:ln>
-        </p:spPr>
-      </p:sp>
-      <p:sp>
-        <p:nvSpPr>
-          <p:cNvPr id="68" name="Rule 68"/>
-          <p:cNvSpPr/>
-          <p:nvPr/>
-        </p:nvSpPr>
-        <p:spPr>
-          <a:xfrm>
-            <a:off x="1382572" y="4306162"/>
-            <a:ext cx="720090" cy="38100"/>
-          </a:xfrm>
-          <a:prstGeom prst="rect">
-            <a:avLst/>
-          </a:prstGeom>
-          <a:solidFill>
-            <a:srgbClr val="C2D076"/>
-          </a:solidFill>
-          <a:ln>
-            <a:noFill/>
-          </a:ln>
-        </p:spPr>
-      </p:sp>
-      <p:sp>
-        <p:nvSpPr>
-          <p:cNvPr id="69" name="Column title 69"/>
-          <p:cNvSpPr txBox="1"/>
-          <p:nvPr/>
-        </p:nvSpPr>
-        <p:spPr>
-          <a:xfrm>
-            <a:off x="1382572" y="4529428"/>
-            <a:ext cx="4403752" cy="1305103"/>
+            <a:ext cx="5521512" cy="2726995"/>
           </a:xfrm>
           <a:prstGeom prst="rect">
             <a:avLst/>
@@ -5175,47 +5435,31 @@
           </a:bodyPr>
           <a:lstStyle/>
           <a:p>
-            <a:pPr algn="l" marL="0" indent="0">
+            <a:pPr algn="l" marL="391020" indent="-391020">
               <a:lnSpc>
                 <a:spcPct val="100000"/>
               </a:lnSpc>
-              <a:buNone/>
+              <a:spcAft>
+                <a:spcPts val="1120"/>
+              </a:spcAft>
+              <a:buClr>
+                <a:srgbClr val="C2D076"/>
+              </a:buClr>
+              <a:buFont typeface="Arial"/>
+              <a:buChar char="•"/>
             </a:pPr>
             <a:r>
               <a:rPr lang="ru-RU" sz="2799" b="0" cap="none" spc="0" baseline="0" dirty="0">
                 <a:solidFill>
-                  <a:srgbClr val="C2D076"/>
+                  <a:srgbClr val="FFFFFF"/>
                 </a:solidFill>
                 <a:latin typeface="Inter Light"/>
                 <a:cs typeface="Inter Light"/>
               </a:rPr>
-              <a:t>На входе — шаблон и текст</a:t>
+              <a:t>Правила оформления приходится выводить из образцов</a:t>
             </a:r>
             <a:endParaRPr lang="ru-RU" sz="2799"/>
           </a:p>
-        </p:txBody>
-      </p:sp>
-      <p:sp>
-        <p:nvSpPr>
-          <p:cNvPr id="70" name="Column 70"/>
-          <p:cNvSpPr txBox="1"/>
-          <p:nvPr/>
-        </p:nvSpPr>
-        <p:spPr>
-          <a:xfrm>
-            <a:off x="1382572" y="6030041"/>
-            <a:ext cx="4403752" cy="2117486"/>
-          </a:xfrm>
-          <a:prstGeom prst="rect">
-            <a:avLst/>
-          </a:prstGeom>
-          <a:noFill/>
-        </p:spPr>
-        <p:txBody>
-          <a:bodyPr wrap="square" lIns="0" tIns="0" rIns="0" bIns="0" anchor="t" rtlCol="0">
-            <a:noAutofit/>
-          </a:bodyPr>
-          <a:lstStyle/>
           <a:p>
             <a:pPr algn="l" marL="391020" indent="-391020">
               <a:lnSpc>
@@ -5235,68 +5479,61 @@
                 <a:latin typeface="Inter Light"/>
                 <a:cs typeface="Inter Light"/>
               </a:rPr>
-              <a:t>Шаблон и текст для генерации презентаций</a:t>
+              <a:t>Палитра, кегли, сетка, поля, логотипы и колонтитулы не автоматизированы</a:t>
             </a:r>
             <a:endParaRPr lang="ru-RU" sz="2799"/>
           </a:p>
         </p:txBody>
       </p:sp>
-      <p:sp>
-        <p:nvSpPr>
-          <p:cNvPr id="71" name="Card 71"/>
-          <p:cNvSpPr/>
+      <p:cxnSp>
+        <p:nvCxnSpPr>
+          <p:cNvPr id="44" name="Line 44"/>
+          <p:cNvCxnSpPr/>
           <p:nvPr/>
-        </p:nvSpPr>
+        </p:nvCxnSpPr>
         <p:spPr>
           <a:xfrm>
-            <a:off x="6583680" y="3947718"/>
-            <a:ext cx="5120640" cy="4558253"/>
+            <a:off x="6984552" y="3947718"/>
+            <a:ext cx="0" cy="2726995"/>
           </a:xfrm>
-          <a:prstGeom prst="roundRect">
-            <a:avLst>
-              <a:gd name="adj" fmla="val 2407"/>
-            </a:avLst>
+          <a:prstGeom prst="line">
+            <a:avLst/>
           </a:prstGeom>
-          <a:solidFill>
-            <a:srgbClr val="000000"/>
-          </a:solidFill>
-          <a:ln>
-            <a:noFill/>
+          <a:ln w="12700">
+            <a:solidFill>
+              <a:srgbClr val="384848"/>
+            </a:solidFill>
           </a:ln>
         </p:spPr>
-      </p:sp>
-      <p:sp>
-        <p:nvSpPr>
-          <p:cNvPr id="72" name="Rule 72"/>
-          <p:cNvSpPr/>
+      </p:cxnSp>
+      <p:graphicFrame>
+        <p:nvGraphicFramePr>
+          <p:cNvPr id="45" name="Chart 44"/>
+          <p:cNvGraphicFramePr>
+            <a:graphicFrameLocks noGrp="1"/>
+          </p:cNvGraphicFramePr>
+          <p:nvPr/>
+        </p:nvGraphicFramePr>
+        <p:xfrm>
+          <a:off x="7423464" y="3947718"/>
+          <a:ext cx="4134849" cy="4134849"/>
+        </p:xfrm>
+        <a:graphic>
+          <a:graphicData uri="http://schemas.openxmlformats.org/drawingml/2006/chart">
+            <c:chart xmlns:c="http://schemas.openxmlformats.org/drawingml/2006/chart" r:id="rId2"/>
+          </a:graphicData>
+        </a:graphic>
+      </p:graphicFrame>
+      <p:sp>
+        <p:nvSpPr>
+          <p:cNvPr id="46" name="Legend title 46"/>
+          <p:cNvSpPr txBox="1"/>
           <p:nvPr/>
         </p:nvSpPr>
         <p:spPr>
           <a:xfrm>
-            <a:off x="6942124" y="4306162"/>
-            <a:ext cx="720090" cy="38100"/>
-          </a:xfrm>
-          <a:prstGeom prst="rect">
-            <a:avLst/>
-          </a:prstGeom>
-          <a:solidFill>
-            <a:srgbClr val="C2D076"/>
-          </a:solidFill>
-          <a:ln>
-            <a:noFill/>
-          </a:ln>
-        </p:spPr>
-      </p:sp>
-      <p:sp>
-        <p:nvSpPr>
-          <p:cNvPr id="73" name="Column title 73"/>
-          <p:cNvSpPr txBox="1"/>
-          <p:nvPr/>
-        </p:nvSpPr>
-        <p:spPr>
-          <a:xfrm>
-            <a:off x="6942124" y="4529428"/>
-            <a:ext cx="4403752" cy="1305103"/>
+            <a:off x="12436137" y="5123907"/>
+            <a:ext cx="4827735" cy="700799"/>
           </a:xfrm>
           <a:prstGeom prst="rect">
             <a:avLst/>
@@ -5318,58 +5555,12 @@
             <a:r>
               <a:rPr lang="ru-RU" sz="2799" b="0" cap="none" spc="0" baseline="0" dirty="0">
                 <a:solidFill>
-                  <a:srgbClr val="C2D076"/>
-                </a:solidFill>
-                <a:latin typeface="Inter Light"/>
-                <a:cs typeface="Inter Light"/>
-              </a:rPr>
-              <a:t>Шаблон — набор правил</a:t>
-            </a:r>
-            <a:endParaRPr lang="ru-RU" sz="2799"/>
-          </a:p>
-        </p:txBody>
-      </p:sp>
-      <p:sp>
-        <p:nvSpPr>
-          <p:cNvPr id="74" name="Column 74"/>
-          <p:cNvSpPr txBox="1"/>
-          <p:nvPr/>
-        </p:nvSpPr>
-        <p:spPr>
-          <a:xfrm>
-            <a:off x="6942124" y="6030041"/>
-            <a:ext cx="4403752" cy="2117486"/>
-          </a:xfrm>
-          <a:prstGeom prst="rect">
-            <a:avLst/>
-          </a:prstGeom>
-          <a:noFill/>
-        </p:spPr>
-        <p:txBody>
-          <a:bodyPr wrap="square" lIns="0" tIns="0" rIns="0" bIns="0" anchor="t" rtlCol="0">
-            <a:noAutofit/>
-          </a:bodyPr>
-          <a:lstStyle/>
-          <a:p>
-            <a:pPr algn="l" marL="391020" indent="-391020">
-              <a:lnSpc>
-                <a:spcPct val="100000"/>
-              </a:lnSpc>
-              <a:buClr>
-                <a:srgbClr val="C2D076"/>
-              </a:buClr>
-              <a:buFont typeface="Arial"/>
-              <a:buChar char="•"/>
-            </a:pPr>
-            <a:r>
-              <a:rPr lang="ru-RU" sz="2799" b="0" cap="none" spc="0" baseline="0" dirty="0">
-                <a:solidFill>
                   <a:srgbClr val="FFFFFF"/>
                 </a:solidFill>
                 <a:latin typeface="Inter Light"/>
                 <a:cs typeface="Inter Light"/>
               </a:rPr>
-              <a:t>Палитра, кегли, сетка, поля, логотипы и колонтитулы</a:t>
+              <a:t>Состав фигур в шаблоне</a:t>
             </a:r>
             <a:endParaRPr lang="ru-RU" sz="2799"/>
           </a:p>
@@ -5377,41 +5568,19 @@
       </p:sp>
       <p:sp>
         <p:nvSpPr>
-          <p:cNvPr id="75" name="Card 75"/>
+          <p:cNvPr id="47" name="Swatch 47"/>
           <p:cNvSpPr/>
           <p:nvPr/>
         </p:nvSpPr>
         <p:spPr>
           <a:xfrm>
-            <a:off x="12143232" y="3947718"/>
-            <a:ext cx="5120640" cy="4558253"/>
+            <a:off x="12436137" y="5910019"/>
+            <a:ext cx="255941" cy="255941"/>
           </a:xfrm>
           <a:prstGeom prst="roundRect">
             <a:avLst>
-              <a:gd name="adj" fmla="val 2407"/>
+              <a:gd name="adj" fmla="val 24999"/>
             </a:avLst>
-          </a:prstGeom>
-          <a:solidFill>
-            <a:srgbClr val="000000"/>
-          </a:solidFill>
-          <a:ln>
-            <a:noFill/>
-          </a:ln>
-        </p:spPr>
-      </p:sp>
-      <p:sp>
-        <p:nvSpPr>
-          <p:cNvPr id="76" name="Rule 76"/>
-          <p:cNvSpPr/>
-          <p:nvPr/>
-        </p:nvSpPr>
-        <p:spPr>
-          <a:xfrm>
-            <a:off x="12501676" y="4306162"/>
-            <a:ext cx="720090" cy="38100"/>
-          </a:xfrm>
-          <a:prstGeom prst="rect">
-            <a:avLst/>
           </a:prstGeom>
           <a:solidFill>
             <a:srgbClr val="C2D076"/>
@@ -5423,14 +5592,14 @@
       </p:sp>
       <p:sp>
         <p:nvSpPr>
-          <p:cNvPr id="77" name="Column title 77"/>
+          <p:cNvPr id="48" name="Legend 48"/>
           <p:cNvSpPr txBox="1"/>
           <p:nvPr/>
         </p:nvSpPr>
         <p:spPr>
           <a:xfrm>
-            <a:off x="12501676" y="4529428"/>
-            <a:ext cx="4403752" cy="1305103"/>
+            <a:off x="12896830" y="5824706"/>
+            <a:ext cx="3451310" cy="451968"/>
           </a:xfrm>
           <a:prstGeom prst="rect">
             <a:avLst/>
@@ -5452,12 +5621,12 @@
             <a:r>
               <a:rPr lang="ru-RU" sz="2799" b="0" cap="none" spc="0" baseline="0" dirty="0">
                 <a:solidFill>
-                  <a:srgbClr val="C2D076"/>
+                  <a:srgbClr val="FFFFFF"/>
                 </a:solidFill>
                 <a:latin typeface="Inter Light"/>
                 <a:cs typeface="Inter Light"/>
               </a:rPr>
-              <a:t>На выходе — три редактируемые презентации</a:t>
+              <a:t>Свободные фигуры</a:t>
             </a:r>
             <a:endParaRPr lang="ru-RU" sz="2799"/>
           </a:p>
@@ -5465,14 +5634,14 @@
       </p:sp>
       <p:sp>
         <p:nvSpPr>
-          <p:cNvPr id="78" name="Column 78"/>
+          <p:cNvPr id="49" name="Share 49"/>
           <p:cNvSpPr txBox="1"/>
           <p:nvPr/>
         </p:nvSpPr>
         <p:spPr>
           <a:xfrm>
-            <a:off x="12501676" y="6030041"/>
-            <a:ext cx="4403752" cy="2117486"/>
+            <a:off x="16348140" y="5824706"/>
+            <a:ext cx="915732" cy="451968"/>
           </a:xfrm>
           <a:prstGeom prst="rect">
             <a:avLst/>
@@ -5485,15 +5654,77 @@
           </a:bodyPr>
           <a:lstStyle/>
           <a:p>
-            <a:pPr algn="l" marL="391020" indent="-391020">
+            <a:pPr algn="r" marL="0" indent="0">
               <a:lnSpc>
                 <a:spcPct val="100000"/>
               </a:lnSpc>
-              <a:buClr>
-                <a:srgbClr val="C2D076"/>
-              </a:buClr>
-              <a:buFont typeface="Arial"/>
-              <a:buChar char="•"/>
+              <a:buNone/>
+            </a:pPr>
+            <a:r>
+              <a:rPr lang="ru-RU" sz="2799" b="1" cap="none" spc="0" baseline="0" dirty="0">
+                <a:solidFill>
+                  <a:srgbClr val="C2D076"/>
+                </a:solidFill>
+                <a:latin typeface="Inter Light"/>
+                <a:cs typeface="Inter Light"/>
+              </a:rPr>
+              <a:t>95%</a:t>
+            </a:r>
+            <a:endParaRPr lang="ru-RU" sz="2799"/>
+          </a:p>
+        </p:txBody>
+      </p:sp>
+      <p:sp>
+        <p:nvSpPr>
+          <p:cNvPr id="50" name="Swatch 50"/>
+          <p:cNvSpPr/>
+          <p:nvPr/>
+        </p:nvSpPr>
+        <p:spPr>
+          <a:xfrm>
+            <a:off x="12436137" y="6539723"/>
+            <a:ext cx="255941" cy="255941"/>
+          </a:xfrm>
+          <a:prstGeom prst="roundRect">
+            <a:avLst>
+              <a:gd name="adj" fmla="val 24999"/>
+            </a:avLst>
+          </a:prstGeom>
+          <a:solidFill>
+            <a:srgbClr val="E8EDCB"/>
+          </a:solidFill>
+          <a:ln>
+            <a:noFill/>
+          </a:ln>
+        </p:spPr>
+      </p:sp>
+      <p:sp>
+        <p:nvSpPr>
+          <p:cNvPr id="51" name="Legend 51"/>
+          <p:cNvSpPr txBox="1"/>
+          <p:nvPr/>
+        </p:nvSpPr>
+        <p:spPr>
+          <a:xfrm>
+            <a:off x="12896830" y="6454410"/>
+            <a:ext cx="3451310" cy="451968"/>
+          </a:xfrm>
+          <a:prstGeom prst="rect">
+            <a:avLst/>
+          </a:prstGeom>
+          <a:noFill/>
+        </p:spPr>
+        <p:txBody>
+          <a:bodyPr wrap="square" lIns="0" tIns="0" rIns="0" bIns="0" anchor="t" rtlCol="0">
+            <a:noAutofit/>
+          </a:bodyPr>
+          <a:lstStyle/>
+          <a:p>
+            <a:pPr algn="l" marL="0" indent="0">
+              <a:lnSpc>
+                <a:spcPct val="100000"/>
+              </a:lnSpc>
+              <a:buNone/>
             </a:pPr>
             <a:r>
               <a:rPr lang="ru-RU" sz="2799" b="0" cap="none" spc="0" baseline="0" dirty="0">
@@ -5503,7 +5734,49 @@
                 <a:latin typeface="Inter Light"/>
                 <a:cs typeface="Inter Light"/>
               </a:rPr>
-              <a:t>Готовые файлы в стиле шаблона</a:t>
+              <a:t>Плейсхолдеры</a:t>
+            </a:r>
+            <a:endParaRPr lang="ru-RU" sz="2799"/>
+          </a:p>
+        </p:txBody>
+      </p:sp>
+      <p:sp>
+        <p:nvSpPr>
+          <p:cNvPr id="52" name="Share 52"/>
+          <p:cNvSpPr txBox="1"/>
+          <p:nvPr/>
+        </p:nvSpPr>
+        <p:spPr>
+          <a:xfrm>
+            <a:off x="16348140" y="6454410"/>
+            <a:ext cx="915732" cy="451968"/>
+          </a:xfrm>
+          <a:prstGeom prst="rect">
+            <a:avLst/>
+          </a:prstGeom>
+          <a:noFill/>
+        </p:spPr>
+        <p:txBody>
+          <a:bodyPr wrap="square" lIns="0" tIns="0" rIns="0" bIns="0" anchor="t" rtlCol="0">
+            <a:noAutofit/>
+          </a:bodyPr>
+          <a:lstStyle/>
+          <a:p>
+            <a:pPr algn="r" marL="0" indent="0">
+              <a:lnSpc>
+                <a:spcPct val="100000"/>
+              </a:lnSpc>
+              <a:buNone/>
+            </a:pPr>
+            <a:r>
+              <a:rPr lang="ru-RU" sz="2799" b="1" cap="none" spc="0" baseline="0" dirty="0">
+                <a:solidFill>
+                  <a:srgbClr val="FFFFFF"/>
+                </a:solidFill>
+                <a:latin typeface="Inter Light"/>
+                <a:cs typeface="Inter Light"/>
+              </a:rPr>
+              <a:t>5%</a:t>
             </a:r>
             <a:endParaRPr lang="ru-RU" sz="2799"/>
           </a:p>
@@ -5543,7 +5816,7 @@
         <p:spPr>
           <a:xfrm>
             <a:off x="619057" y="2623820"/>
-            <a:ext cx="15727680" cy="809548"/>
+            <a:ext cx="15727680" cy="944880"/>
           </a:xfrm>
           <a:prstGeom prst="rect">
             <a:avLst/>
@@ -5586,7 +5859,7 @@
                 <a:cs typeface="Inter Medium"/>
                 <a:sym typeface="Inter Medium"/>
               </a:rPr>
-              <a:t>Команда из пяти специалистов создаёт презентацию</a:t>
+              <a:t>Шаблон читается как набор правил</a:t>
             </a:r>
             <a:endParaRPr>
               <a:latin typeface="Inter Medium"/>
@@ -5599,16 +5872,16 @@
       </p:sp>
       <p:sp>
         <p:nvSpPr>
-          <p:cNvPr id="43" name="Marker 43"/>
+          <p:cNvPr id="43" name="Conclusion bar 43"/>
           <p:cNvSpPr/>
           <p:nvPr/>
         </p:nvSpPr>
         <p:spPr>
           <a:xfrm>
-            <a:off x="1024128" y="4093462"/>
-            <a:ext cx="135080" cy="135080"/>
+            <a:off x="1024128" y="4180317"/>
+            <a:ext cx="61722" cy="366654"/>
           </a:xfrm>
-          <a:prstGeom prst="ellipse">
+          <a:prstGeom prst="rect">
             <a:avLst/>
           </a:prstGeom>
           <a:solidFill>
@@ -5621,14 +5894,14 @@
       </p:sp>
       <p:sp>
         <p:nvSpPr>
-          <p:cNvPr id="44" name="Item 44"/>
+          <p:cNvPr id="44" name="Conclusion 44"/>
           <p:cNvSpPr txBox="1"/>
           <p:nvPr/>
         </p:nvSpPr>
         <p:spPr>
           <a:xfrm>
-            <a:off x="1592885" y="3947718"/>
-            <a:ext cx="12423038" cy="451968"/>
+            <a:off x="1370228" y="4137660"/>
+            <a:ext cx="14269669" cy="451968"/>
           </a:xfrm>
           <a:prstGeom prst="rect">
             <a:avLst/>
@@ -5648,52 +5921,55 @@
               <a:buNone/>
             </a:pPr>
             <a:r>
-              <a:rPr lang="ru-RU" sz="2799" b="0" cap="none" spc="0" baseline="0" dirty="0">
+              <a:rPr lang="ru-RU" sz="2799" b="1" cap="none" spc="0" baseline="0" dirty="0">
                 <a:solidFill>
-                  <a:srgbClr val="FFFFFF"/>
+                  <a:srgbClr val="C2D076"/>
                 </a:solidFill>
                 <a:latin typeface="Inter Light"/>
                 <a:cs typeface="Inter Light"/>
               </a:rPr>
-              <a:t>Аналитик — находит слайды, ряды данных и просьбы</a:t>
+              <a:t>Презентация в фирменном стиле без ручной вёрстки</a:t>
             </a:r>
             <a:endParaRPr lang="ru-RU" sz="2799"/>
           </a:p>
         </p:txBody>
       </p:sp>
-      <p:cxnSp>
-        <p:nvCxnSpPr>
-          <p:cNvPr id="45" name="Line 45"/>
-          <p:cNvCxnSpPr/>
+      <p:sp>
+        <p:nvSpPr>
+          <p:cNvPr id="45" name="Card 45"/>
+          <p:cNvSpPr/>
           <p:nvPr/>
-        </p:nvCxnSpPr>
+        </p:nvSpPr>
         <p:spPr>
           <a:xfrm>
-            <a:off x="1592885" y="4666290"/>
-            <a:ext cx="12423038" cy="0"/>
+            <a:off x="1024128" y="4959960"/>
+            <a:ext cx="5120640" cy="3968602"/>
           </a:xfrm>
-          <a:prstGeom prst="line">
-            <a:avLst/>
+          <a:prstGeom prst="roundRect">
+            <a:avLst>
+              <a:gd name="adj" fmla="val 2764"/>
+            </a:avLst>
           </a:prstGeom>
-          <a:ln w="9525">
-            <a:solidFill>
-              <a:srgbClr val="384848"/>
-            </a:solidFill>
+          <a:solidFill>
+            <a:srgbClr val="000000"/>
+          </a:solidFill>
+          <a:ln>
+            <a:noFill/>
           </a:ln>
         </p:spPr>
-      </p:cxnSp>
-      <p:sp>
-        <p:nvSpPr>
-          <p:cNvPr id="46" name="Marker 46"/>
+      </p:sp>
+      <p:sp>
+        <p:nvSpPr>
+          <p:cNvPr id="46" name="Rule 46"/>
           <p:cNvSpPr/>
           <p:nvPr/>
         </p:nvSpPr>
         <p:spPr>
           <a:xfrm>
-            <a:off x="1024128" y="5078638"/>
-            <a:ext cx="135080" cy="135080"/>
+            <a:off x="1382572" y="5318404"/>
+            <a:ext cx="720090" cy="38100"/>
           </a:xfrm>
-          <a:prstGeom prst="ellipse">
+          <a:prstGeom prst="rect">
             <a:avLst/>
           </a:prstGeom>
           <a:solidFill>
@@ -5706,14 +5982,14 @@
       </p:sp>
       <p:sp>
         <p:nvSpPr>
-          <p:cNvPr id="47" name="Item 47"/>
+          <p:cNvPr id="47" name="Column title 47"/>
           <p:cNvSpPr txBox="1"/>
           <p:nvPr/>
         </p:nvSpPr>
         <p:spPr>
           <a:xfrm>
-            <a:off x="1592885" y="4932894"/>
-            <a:ext cx="12423038" cy="451968"/>
+            <a:off x="1382572" y="5541670"/>
+            <a:ext cx="4403752" cy="1305103"/>
           </a:xfrm>
           <a:prstGeom prst="rect">
             <a:avLst/>
@@ -5735,50 +6011,99 @@
             <a:r>
               <a:rPr lang="ru-RU" sz="2799" b="0" cap="none" spc="0" baseline="0" dirty="0">
                 <a:solidFill>
+                  <a:srgbClr val="C2D076"/>
+                </a:solidFill>
+                <a:latin typeface="Inter Light"/>
+                <a:cs typeface="Inter Light"/>
+              </a:rPr>
+              <a:t>На входе — шаблон и текст</a:t>
+            </a:r>
+            <a:endParaRPr lang="ru-RU" sz="2799"/>
+          </a:p>
+        </p:txBody>
+      </p:sp>
+      <p:sp>
+        <p:nvSpPr>
+          <p:cNvPr id="48" name="Column 48"/>
+          <p:cNvSpPr txBox="1"/>
+          <p:nvPr/>
+        </p:nvSpPr>
+        <p:spPr>
+          <a:xfrm>
+            <a:off x="1382572" y="7021328"/>
+            <a:ext cx="4403752" cy="1548790"/>
+          </a:xfrm>
+          <a:prstGeom prst="rect">
+            <a:avLst/>
+          </a:prstGeom>
+          <a:noFill/>
+        </p:spPr>
+        <p:txBody>
+          <a:bodyPr wrap="square" lIns="0" tIns="0" rIns="0" bIns="0" anchor="t" rtlCol="0">
+            <a:noAutofit/>
+          </a:bodyPr>
+          <a:lstStyle/>
+          <a:p>
+            <a:pPr algn="l" marL="349110" indent="-349110">
+              <a:lnSpc>
+                <a:spcPct val="100000"/>
+              </a:lnSpc>
+              <a:buClr>
+                <a:srgbClr val="C2D076"/>
+              </a:buClr>
+              <a:buFont typeface="Arial"/>
+              <a:buChar char="•"/>
+            </a:pPr>
+            <a:r>
+              <a:rPr lang="ru-RU" sz="2499" b="0" cap="none" spc="0" baseline="0" dirty="0">
+                <a:solidFill>
                   <a:srgbClr val="FFFFFF"/>
                 </a:solidFill>
                 <a:latin typeface="Inter Light"/>
                 <a:cs typeface="Inter Light"/>
               </a:rPr>
-              <a:t>Дизайнер — продумывает каждый слайд отдельно</a:t>
+              <a:t>Verstka берёт шаблон и текст</a:t>
             </a:r>
-            <a:endParaRPr lang="ru-RU" sz="2799"/>
+            <a:endParaRPr lang="ru-RU" sz="2499"/>
           </a:p>
         </p:txBody>
       </p:sp>
-      <p:cxnSp>
-        <p:nvCxnSpPr>
-          <p:cNvPr id="48" name="Line 48"/>
-          <p:cNvCxnSpPr/>
+      <p:sp>
+        <p:nvSpPr>
+          <p:cNvPr id="49" name="Card 49"/>
+          <p:cNvSpPr/>
           <p:nvPr/>
-        </p:nvCxnSpPr>
+        </p:nvSpPr>
         <p:spPr>
           <a:xfrm>
-            <a:off x="1592885" y="5651466"/>
-            <a:ext cx="12423038" cy="0"/>
+            <a:off x="6583680" y="4959960"/>
+            <a:ext cx="5120640" cy="3968602"/>
           </a:xfrm>
-          <a:prstGeom prst="line">
-            <a:avLst/>
+          <a:prstGeom prst="roundRect">
+            <a:avLst>
+              <a:gd name="adj" fmla="val 2764"/>
+            </a:avLst>
           </a:prstGeom>
-          <a:ln w="9525">
-            <a:solidFill>
-              <a:srgbClr val="384848"/>
-            </a:solidFill>
+          <a:solidFill>
+            <a:srgbClr val="000000"/>
+          </a:solidFill>
+          <a:ln>
+            <a:noFill/>
           </a:ln>
         </p:spPr>
-      </p:cxnSp>
-      <p:sp>
-        <p:nvSpPr>
-          <p:cNvPr id="49" name="Marker 49"/>
+      </p:sp>
+      <p:sp>
+        <p:nvSpPr>
+          <p:cNvPr id="50" name="Rule 50"/>
           <p:cNvSpPr/>
           <p:nvPr/>
         </p:nvSpPr>
         <p:spPr>
           <a:xfrm>
-            <a:off x="1024128" y="6063814"/>
-            <a:ext cx="135080" cy="135080"/>
+            <a:off x="6942124" y="5318404"/>
+            <a:ext cx="720090" cy="38100"/>
           </a:xfrm>
-          <a:prstGeom prst="ellipse">
+          <a:prstGeom prst="rect">
             <a:avLst/>
           </a:prstGeom>
           <a:solidFill>
@@ -5791,14 +6116,14 @@
       </p:sp>
       <p:sp>
         <p:nvSpPr>
-          <p:cNvPr id="50" name="Item 50"/>
+          <p:cNvPr id="51" name="Column title 51"/>
           <p:cNvSpPr txBox="1"/>
           <p:nvPr/>
         </p:nvSpPr>
         <p:spPr>
           <a:xfrm>
-            <a:off x="1592885" y="5918070"/>
-            <a:ext cx="12423038" cy="451968"/>
+            <a:off x="6942124" y="5541670"/>
+            <a:ext cx="4403752" cy="1305103"/>
           </a:xfrm>
           <a:prstGeom prst="rect">
             <a:avLst/>
@@ -5820,50 +6145,99 @@
             <a:r>
               <a:rPr lang="ru-RU" sz="2799" b="0" cap="none" spc="0" baseline="0" dirty="0">
                 <a:solidFill>
+                  <a:srgbClr val="C2D076"/>
+                </a:solidFill>
+                <a:latin typeface="Inter Light"/>
+                <a:cs typeface="Inter Light"/>
+              </a:rPr>
+              <a:t>Шаблон — набор правил</a:t>
+            </a:r>
+            <a:endParaRPr lang="ru-RU" sz="2799"/>
+          </a:p>
+        </p:txBody>
+      </p:sp>
+      <p:sp>
+        <p:nvSpPr>
+          <p:cNvPr id="52" name="Column 52"/>
+          <p:cNvSpPr txBox="1"/>
+          <p:nvPr/>
+        </p:nvSpPr>
+        <p:spPr>
+          <a:xfrm>
+            <a:off x="6942124" y="7021328"/>
+            <a:ext cx="4403752" cy="1548790"/>
+          </a:xfrm>
+          <a:prstGeom prst="rect">
+            <a:avLst/>
+          </a:prstGeom>
+          <a:noFill/>
+        </p:spPr>
+        <p:txBody>
+          <a:bodyPr wrap="square" lIns="0" tIns="0" rIns="0" bIns="0" anchor="t" rtlCol="0">
+            <a:noAutofit/>
+          </a:bodyPr>
+          <a:lstStyle/>
+          <a:p>
+            <a:pPr algn="l" marL="349110" indent="-349110">
+              <a:lnSpc>
+                <a:spcPct val="100000"/>
+              </a:lnSpc>
+              <a:buClr>
+                <a:srgbClr val="C2D076"/>
+              </a:buClr>
+              <a:buFont typeface="Arial"/>
+              <a:buChar char="•"/>
+            </a:pPr>
+            <a:r>
+              <a:rPr lang="ru-RU" sz="2499" b="0" cap="none" spc="0" baseline="0" dirty="0">
+                <a:solidFill>
                   <a:srgbClr val="FFFFFF"/>
                 </a:solidFill>
                 <a:latin typeface="Inter Light"/>
                 <a:cs typeface="Inter Light"/>
               </a:rPr>
-              <a:t>Критик — сверяет план с текстом и правилами</a:t>
+              <a:t>Шаблон читается как набор правил, а не как набор макетов</a:t>
             </a:r>
-            <a:endParaRPr lang="ru-RU" sz="2799"/>
+            <a:endParaRPr lang="ru-RU" sz="2499"/>
           </a:p>
         </p:txBody>
       </p:sp>
-      <p:cxnSp>
-        <p:nvCxnSpPr>
-          <p:cNvPr id="51" name="Line 51"/>
-          <p:cNvCxnSpPr/>
+      <p:sp>
+        <p:nvSpPr>
+          <p:cNvPr id="53" name="Card 53"/>
+          <p:cNvSpPr/>
           <p:nvPr/>
-        </p:nvCxnSpPr>
+        </p:nvSpPr>
         <p:spPr>
           <a:xfrm>
-            <a:off x="1592885" y="6636642"/>
-            <a:ext cx="12423038" cy="0"/>
+            <a:off x="12143232" y="4959960"/>
+            <a:ext cx="5120640" cy="3968602"/>
           </a:xfrm>
-          <a:prstGeom prst="line">
-            <a:avLst/>
+          <a:prstGeom prst="roundRect">
+            <a:avLst>
+              <a:gd name="adj" fmla="val 2764"/>
+            </a:avLst>
           </a:prstGeom>
-          <a:ln w="9525">
-            <a:solidFill>
-              <a:srgbClr val="384848"/>
-            </a:solidFill>
+          <a:solidFill>
+            <a:srgbClr val="000000"/>
+          </a:solidFill>
+          <a:ln>
+            <a:noFill/>
           </a:ln>
         </p:spPr>
-      </p:cxnSp>
-      <p:sp>
-        <p:nvSpPr>
-          <p:cNvPr id="52" name="Marker 52"/>
+      </p:sp>
+      <p:sp>
+        <p:nvSpPr>
+          <p:cNvPr id="54" name="Rule 54"/>
           <p:cNvSpPr/>
           <p:nvPr/>
         </p:nvSpPr>
         <p:spPr>
           <a:xfrm>
-            <a:off x="1024128" y="7048990"/>
-            <a:ext cx="135080" cy="135080"/>
+            <a:off x="12501676" y="5318404"/>
+            <a:ext cx="720090" cy="38100"/>
           </a:xfrm>
-          <a:prstGeom prst="ellipse">
+          <a:prstGeom prst="rect">
             <a:avLst/>
           </a:prstGeom>
           <a:solidFill>
@@ -5876,14 +6250,14 @@
       </p:sp>
       <p:sp>
         <p:nvSpPr>
-          <p:cNvPr id="53" name="Item 53"/>
+          <p:cNvPr id="55" name="Column title 55"/>
           <p:cNvSpPr txBox="1"/>
           <p:nvPr/>
         </p:nvSpPr>
         <p:spPr>
           <a:xfrm>
-            <a:off x="1592885" y="6903246"/>
-            <a:ext cx="12423038" cy="451968"/>
+            <a:off x="12501676" y="5541670"/>
+            <a:ext cx="4403752" cy="1305103"/>
           </a:xfrm>
           <a:prstGeom prst="rect">
             <a:avLst/>
@@ -5905,70 +6279,27 @@
             <a:r>
               <a:rPr lang="ru-RU" sz="2799" b="0" cap="none" spc="0" baseline="0" dirty="0">
                 <a:solidFill>
-                  <a:srgbClr val="FFFFFF"/>
+                  <a:srgbClr val="C2D076"/>
                 </a:solidFill>
                 <a:latin typeface="Inter Light"/>
                 <a:cs typeface="Inter Light"/>
               </a:rPr>
-              <a:t>Компилятор — проверяет каждое число</a:t>
+              <a:t>На выходе — три редактируемые презентации</a:t>
             </a:r>
             <a:endParaRPr lang="ru-RU" sz="2799"/>
           </a:p>
         </p:txBody>
       </p:sp>
-      <p:cxnSp>
-        <p:nvCxnSpPr>
-          <p:cNvPr id="54" name="Line 54"/>
-          <p:cNvCxnSpPr/>
+      <p:sp>
+        <p:nvSpPr>
+          <p:cNvPr id="56" name="Column 56"/>
+          <p:cNvSpPr txBox="1"/>
           <p:nvPr/>
-        </p:nvCxnSpPr>
+        </p:nvSpPr>
         <p:spPr>
           <a:xfrm>
-            <a:off x="1592885" y="7621818"/>
-            <a:ext cx="12423038" cy="0"/>
-          </a:xfrm>
-          <a:prstGeom prst="line">
-            <a:avLst/>
-          </a:prstGeom>
-          <a:ln w="9525">
-            <a:solidFill>
-              <a:srgbClr val="384848"/>
-            </a:solidFill>
-          </a:ln>
-        </p:spPr>
-      </p:cxnSp>
-      <p:sp>
-        <p:nvSpPr>
-          <p:cNvPr id="55" name="Marker 55"/>
-          <p:cNvSpPr/>
-          <p:nvPr/>
-        </p:nvSpPr>
-        <p:spPr>
-          <a:xfrm>
-            <a:off x="1024128" y="8034166"/>
-            <a:ext cx="135080" cy="135080"/>
-          </a:xfrm>
-          <a:prstGeom prst="ellipse">
-            <a:avLst/>
-          </a:prstGeom>
-          <a:solidFill>
-            <a:srgbClr val="C2D076"/>
-          </a:solidFill>
-          <a:ln>
-            <a:noFill/>
-          </a:ln>
-        </p:spPr>
-      </p:sp>
-      <p:sp>
-        <p:nvSpPr>
-          <p:cNvPr id="56" name="Item 56"/>
-          <p:cNvSpPr txBox="1"/>
-          <p:nvPr/>
-        </p:nvSpPr>
-        <p:spPr>
-          <a:xfrm>
-            <a:off x="1592885" y="7888422"/>
-            <a:ext cx="12423038" cy="451968"/>
+            <a:off x="12501676" y="7021328"/>
+            <a:ext cx="4403752" cy="1548790"/>
           </a:xfrm>
           <a:prstGeom prst="rect">
             <a:avLst/>
@@ -5981,23 +6312,27 @@
           </a:bodyPr>
           <a:lstStyle/>
           <a:p>
-            <a:pPr algn="l" marL="0" indent="0">
+            <a:pPr algn="l" marL="349110" indent="-349110">
               <a:lnSpc>
                 <a:spcPct val="100000"/>
               </a:lnSpc>
-              <a:buNone/>
+              <a:buClr>
+                <a:srgbClr val="C2D076"/>
+              </a:buClr>
+              <a:buFont typeface="Arial"/>
+              <a:buChar char="•"/>
             </a:pPr>
             <a:r>
-              <a:rPr lang="ru-RU" sz="2799" b="0" cap="none" spc="0" baseline="0" dirty="0">
+              <a:rPr lang="ru-RU" sz="2499" b="0" cap="none" spc="0" baseline="0" dirty="0">
                 <a:solidFill>
                   <a:srgbClr val="FFFFFF"/>
                 </a:solidFill>
                 <a:latin typeface="Inter Light"/>
                 <a:cs typeface="Inter Light"/>
               </a:rPr>
-              <a:t>Вёрстка — собирает слайды по дизайн-⁠системе</a:t>
+              <a:t>Создаются три редактируемые презентации в стиле шаблона</a:t>
             </a:r>
-            <a:endParaRPr lang="ru-RU" sz="2799"/>
+            <a:endParaRPr lang="ru-RU" sz="2499"/>
           </a:p>
         </p:txBody>
       </p:sp>
@@ -6035,7 +6370,7 @@
         <p:spPr>
           <a:xfrm>
             <a:off x="619057" y="2623820"/>
-            <a:ext cx="15727680" cy="944880"/>
+            <a:ext cx="10417162" cy="1527657"/>
           </a:xfrm>
           <a:prstGeom prst="rect">
             <a:avLst/>
@@ -6069,7 +6404,7 @@
               <a:buNone/>
             </a:pPr>
             <a:r>
-              <a:rPr i="0" lang="ru-RU" sz="4712" u="none" cap="none" strike="noStrike">
+              <a:rPr i="0" lang="ru-RU" sz="2799" u="none" cap="none" strike="noStrike">
                 <a:solidFill>
                   <a:srgbClr val="C2D076"/>
                 </a:solidFill>
@@ -6078,7 +6413,7 @@
                 <a:cs typeface="Inter Medium"/>
                 <a:sym typeface="Inter Medium"/>
               </a:rPr>
-              <a:t>Одинаковое содержание, разная подача</a:t>
+              <a:t>Открытые модели до 35 млрд параметров создают презентации</a:t>
             </a:r>
             <a:endParaRPr>
               <a:latin typeface="Inter Medium"/>
@@ -6091,40 +6426,16 @@
       </p:sp>
       <p:sp>
         <p:nvSpPr>
-          <p:cNvPr id="67" name="Card 67"/>
+          <p:cNvPr id="43" name="Marker 43"/>
           <p:cNvSpPr/>
           <p:nvPr/>
         </p:nvSpPr>
         <p:spPr>
           <a:xfrm>
-            <a:off x="1024128" y="4137660"/>
-            <a:ext cx="5120640" cy="4394903"/>
+            <a:off x="1024128" y="4811571"/>
+            <a:ext cx="135080" cy="135080"/>
           </a:xfrm>
-          <a:prstGeom prst="roundRect">
-            <a:avLst>
-              <a:gd name="adj" fmla="val 2496"/>
-            </a:avLst>
-          </a:prstGeom>
-          <a:solidFill>
-            <a:srgbClr val="000000"/>
-          </a:solidFill>
-          <a:ln>
-            <a:noFill/>
-          </a:ln>
-        </p:spPr>
-      </p:sp>
-      <p:sp>
-        <p:nvSpPr>
-          <p:cNvPr id="68" name="Rule 68"/>
-          <p:cNvSpPr/>
-          <p:nvPr/>
-        </p:nvSpPr>
-        <p:spPr>
-          <a:xfrm>
-            <a:off x="1382572" y="4496104"/>
-            <a:ext cx="720090" cy="38100"/>
-          </a:xfrm>
-          <a:prstGeom prst="rect">
+          <a:prstGeom prst="ellipse">
             <a:avLst/>
           </a:prstGeom>
           <a:solidFill>
@@ -6137,14 +6448,14 @@
       </p:sp>
       <p:sp>
         <p:nvSpPr>
-          <p:cNvPr id="69" name="Column title 69"/>
+          <p:cNvPr id="44" name="Item 44"/>
           <p:cNvSpPr txBox="1"/>
           <p:nvPr/>
         </p:nvSpPr>
         <p:spPr>
           <a:xfrm>
-            <a:off x="1382572" y="4719370"/>
-            <a:ext cx="4403752" cy="878840"/>
+            <a:off x="1592885" y="4665827"/>
+            <a:ext cx="12423038" cy="451968"/>
           </a:xfrm>
           <a:prstGeom prst="rect">
             <a:avLst/>
@@ -6164,52 +6475,6 @@
               <a:buNone/>
             </a:pPr>
             <a:r>
-              <a:rPr lang="ru-RU" sz="4712" b="0" cap="none" spc="0" baseline="0" dirty="0">
-                <a:solidFill>
-                  <a:srgbClr val="C2D076"/>
-                </a:solidFill>
-                <a:latin typeface="Inter Light"/>
-                <a:cs typeface="Inter Light"/>
-              </a:rPr>
-              <a:t>Структурный</a:t>
-            </a:r>
-            <a:endParaRPr lang="ru-RU" sz="5600"/>
-          </a:p>
-        </p:txBody>
-      </p:sp>
-      <p:sp>
-        <p:nvSpPr>
-          <p:cNvPr id="70" name="Column 70"/>
-          <p:cNvSpPr txBox="1"/>
-          <p:nvPr/>
-        </p:nvSpPr>
-        <p:spPr>
-          <a:xfrm>
-            <a:off x="1382572" y="5793720"/>
-            <a:ext cx="4403752" cy="2380399"/>
-          </a:xfrm>
-          <a:prstGeom prst="rect">
-            <a:avLst/>
-          </a:prstGeom>
-          <a:noFill/>
-        </p:spPr>
-        <p:txBody>
-          <a:bodyPr wrap="square" lIns="0" tIns="0" rIns="0" bIns="0" anchor="t" rtlCol="0">
-            <a:noAutofit/>
-          </a:bodyPr>
-          <a:lstStyle/>
-          <a:p>
-            <a:pPr algn="l" marL="391020" indent="-391020">
-              <a:lnSpc>
-                <a:spcPct val="100000"/>
-              </a:lnSpc>
-              <a:buClr>
-                <a:srgbClr val="C2D076"/>
-              </a:buClr>
-              <a:buFont typeface="Arial"/>
-              <a:buChar char="•"/>
-            </a:pPr>
-            <a:r>
               <a:rPr lang="ru-RU" sz="2799" b="0" cap="none" spc="0" baseline="0" dirty="0">
                 <a:solidFill>
                   <a:srgbClr val="FFFFFF"/>
@@ -6217,48 +6482,45 @@
                 <a:latin typeface="Inter Light"/>
                 <a:cs typeface="Inter Light"/>
               </a:rPr>
-              <a:t>Одна мысль на слайде, строгая сетка</a:t>
+              <a:t>Аналитик — находит слайды, ряды данных и просьбы</a:t>
             </a:r>
             <a:endParaRPr lang="ru-RU" sz="2799"/>
           </a:p>
         </p:txBody>
       </p:sp>
-      <p:sp>
-        <p:nvSpPr>
-          <p:cNvPr id="71" name="Card 71"/>
+      <p:cxnSp>
+        <p:nvCxnSpPr>
+          <p:cNvPr id="45" name="Line 45"/>
+          <p:cNvCxnSpPr/>
+          <p:nvPr/>
+        </p:nvCxnSpPr>
+        <p:spPr>
+          <a:xfrm>
+            <a:off x="1592885" y="5384399"/>
+            <a:ext cx="12423038" cy="0"/>
+          </a:xfrm>
+          <a:prstGeom prst="line">
+            <a:avLst/>
+          </a:prstGeom>
+          <a:ln w="9525">
+            <a:solidFill>
+              <a:srgbClr val="384848"/>
+            </a:solidFill>
+          </a:ln>
+        </p:spPr>
+      </p:cxnSp>
+      <p:sp>
+        <p:nvSpPr>
+          <p:cNvPr id="46" name="Marker 46"/>
           <p:cNvSpPr/>
           <p:nvPr/>
         </p:nvSpPr>
         <p:spPr>
           <a:xfrm>
-            <a:off x="6583680" y="4137660"/>
-            <a:ext cx="5120640" cy="4394903"/>
+            <a:off x="1024128" y="5796747"/>
+            <a:ext cx="135080" cy="135080"/>
           </a:xfrm>
-          <a:prstGeom prst="roundRect">
-            <a:avLst>
-              <a:gd name="adj" fmla="val 2496"/>
-            </a:avLst>
-          </a:prstGeom>
-          <a:solidFill>
-            <a:srgbClr val="000000"/>
-          </a:solidFill>
-          <a:ln>
-            <a:noFill/>
-          </a:ln>
-        </p:spPr>
-      </p:sp>
-      <p:sp>
-        <p:nvSpPr>
-          <p:cNvPr id="72" name="Rule 72"/>
-          <p:cNvSpPr/>
-          <p:nvPr/>
-        </p:nvSpPr>
-        <p:spPr>
-          <a:xfrm>
-            <a:off x="6942124" y="4496104"/>
-            <a:ext cx="720090" cy="38100"/>
-          </a:xfrm>
-          <a:prstGeom prst="rect">
+          <a:prstGeom prst="ellipse">
             <a:avLst/>
           </a:prstGeom>
           <a:solidFill>
@@ -6271,14 +6533,14 @@
       </p:sp>
       <p:sp>
         <p:nvSpPr>
-          <p:cNvPr id="73" name="Column title 73"/>
+          <p:cNvPr id="47" name="Item 47"/>
           <p:cNvSpPr txBox="1"/>
           <p:nvPr/>
         </p:nvSpPr>
         <p:spPr>
           <a:xfrm>
-            <a:off x="6942124" y="4719370"/>
-            <a:ext cx="4403752" cy="878840"/>
+            <a:off x="1592885" y="5651003"/>
+            <a:ext cx="12423038" cy="451968"/>
           </a:xfrm>
           <a:prstGeom prst="rect">
             <a:avLst/>
@@ -6298,52 +6560,6 @@
               <a:buNone/>
             </a:pPr>
             <a:r>
-              <a:rPr lang="ru-RU" sz="5600" b="0" cap="none" spc="0" baseline="0" dirty="0">
-                <a:solidFill>
-                  <a:srgbClr val="C2D076"/>
-                </a:solidFill>
-                <a:latin typeface="Inter Light"/>
-                <a:cs typeface="Inter Light"/>
-              </a:rPr>
-              <a:t>Визуальный</a:t>
-            </a:r>
-            <a:endParaRPr lang="ru-RU" sz="5600"/>
-          </a:p>
-        </p:txBody>
-      </p:sp>
-      <p:sp>
-        <p:nvSpPr>
-          <p:cNvPr id="74" name="Column 74"/>
-          <p:cNvSpPr txBox="1"/>
-          <p:nvPr/>
-        </p:nvSpPr>
-        <p:spPr>
-          <a:xfrm>
-            <a:off x="6942124" y="5793720"/>
-            <a:ext cx="4403752" cy="2380399"/>
-          </a:xfrm>
-          <a:prstGeom prst="rect">
-            <a:avLst/>
-          </a:prstGeom>
-          <a:noFill/>
-        </p:spPr>
-        <p:txBody>
-          <a:bodyPr wrap="square" lIns="0" tIns="0" rIns="0" bIns="0" anchor="t" rtlCol="0">
-            <a:noAutofit/>
-          </a:bodyPr>
-          <a:lstStyle/>
-          <a:p>
-            <a:pPr algn="l" marL="391020" indent="-391020">
-              <a:lnSpc>
-                <a:spcPct val="100000"/>
-              </a:lnSpc>
-              <a:buClr>
-                <a:srgbClr val="C2D076"/>
-              </a:buClr>
-              <a:buFont typeface="Arial"/>
-              <a:buChar char="•"/>
-            </a:pPr>
-            <a:r>
               <a:rPr lang="ru-RU" sz="2799" b="0" cap="none" spc="0" baseline="0" dirty="0">
                 <a:solidFill>
                   <a:srgbClr val="FFFFFF"/>
@@ -6351,48 +6567,45 @@
                 <a:latin typeface="Inter Light"/>
                 <a:cs typeface="Inter Light"/>
               </a:rPr>
-              <a:t>Крупные цифры и наглядные схемы</a:t>
+              <a:t>Дизайнер — продумывает каждый слайд отдельно</a:t>
             </a:r>
             <a:endParaRPr lang="ru-RU" sz="2799"/>
           </a:p>
         </p:txBody>
       </p:sp>
-      <p:sp>
-        <p:nvSpPr>
-          <p:cNvPr id="75" name="Card 75"/>
+      <p:cxnSp>
+        <p:nvCxnSpPr>
+          <p:cNvPr id="48" name="Line 48"/>
+          <p:cNvCxnSpPr/>
+          <p:nvPr/>
+        </p:nvCxnSpPr>
+        <p:spPr>
+          <a:xfrm>
+            <a:off x="1592885" y="6369575"/>
+            <a:ext cx="12423038" cy="0"/>
+          </a:xfrm>
+          <a:prstGeom prst="line">
+            <a:avLst/>
+          </a:prstGeom>
+          <a:ln w="9525">
+            <a:solidFill>
+              <a:srgbClr val="384848"/>
+            </a:solidFill>
+          </a:ln>
+        </p:spPr>
+      </p:cxnSp>
+      <p:sp>
+        <p:nvSpPr>
+          <p:cNvPr id="49" name="Marker 49"/>
           <p:cNvSpPr/>
           <p:nvPr/>
         </p:nvSpPr>
         <p:spPr>
           <a:xfrm>
-            <a:off x="12143232" y="4137660"/>
-            <a:ext cx="5120640" cy="4394903"/>
+            <a:off x="1024128" y="6781923"/>
+            <a:ext cx="135080" cy="135080"/>
           </a:xfrm>
-          <a:prstGeom prst="roundRect">
-            <a:avLst>
-              <a:gd name="adj" fmla="val 2496"/>
-            </a:avLst>
-          </a:prstGeom>
-          <a:solidFill>
-            <a:srgbClr val="000000"/>
-          </a:solidFill>
-          <a:ln>
-            <a:noFill/>
-          </a:ln>
-        </p:spPr>
-      </p:sp>
-      <p:sp>
-        <p:nvSpPr>
-          <p:cNvPr id="76" name="Rule 76"/>
-          <p:cNvSpPr/>
-          <p:nvPr/>
-        </p:nvSpPr>
-        <p:spPr>
-          <a:xfrm>
-            <a:off x="12501676" y="4496104"/>
-            <a:ext cx="720090" cy="38100"/>
-          </a:xfrm>
-          <a:prstGeom prst="rect">
+          <a:prstGeom prst="ellipse">
             <a:avLst/>
           </a:prstGeom>
           <a:solidFill>
@@ -6405,14 +6618,14 @@
       </p:sp>
       <p:sp>
         <p:nvSpPr>
-          <p:cNvPr id="77" name="Column title 77"/>
+          <p:cNvPr id="50" name="Item 50"/>
           <p:cNvSpPr txBox="1"/>
           <p:nvPr/>
         </p:nvSpPr>
         <p:spPr>
           <a:xfrm>
-            <a:off x="12501676" y="4719370"/>
-            <a:ext cx="4403752" cy="878840"/>
+            <a:off x="1592885" y="6636179"/>
+            <a:ext cx="12423038" cy="451968"/>
           </a:xfrm>
           <a:prstGeom prst="rect">
             <a:avLst/>
@@ -6432,29 +6645,72 @@
               <a:buNone/>
             </a:pPr>
             <a:r>
-              <a:rPr lang="ru-RU" sz="4712" b="0" cap="none" spc="0" baseline="0" dirty="0">
+              <a:rPr lang="ru-RU" sz="2799" b="0" cap="none" spc="0" baseline="0" dirty="0">
                 <a:solidFill>
-                  <a:srgbClr val="C2D076"/>
+                  <a:srgbClr val="FFFFFF"/>
                 </a:solidFill>
                 <a:latin typeface="Inter Light"/>
                 <a:cs typeface="Inter Light"/>
               </a:rPr>
-              <a:t>Компактный</a:t>
+              <a:t>Критик — сверяет план с текстом и правилами шаблона</a:t>
             </a:r>
-            <a:endParaRPr lang="ru-RU" sz="5600"/>
+            <a:endParaRPr lang="ru-RU" sz="2799"/>
           </a:p>
         </p:txBody>
       </p:sp>
-      <p:sp>
-        <p:nvSpPr>
-          <p:cNvPr id="78" name="Column 78"/>
+      <p:cxnSp>
+        <p:nvCxnSpPr>
+          <p:cNvPr id="51" name="Line 51"/>
+          <p:cNvCxnSpPr/>
+          <p:nvPr/>
+        </p:nvCxnSpPr>
+        <p:spPr>
+          <a:xfrm>
+            <a:off x="1592885" y="7354751"/>
+            <a:ext cx="12423038" cy="0"/>
+          </a:xfrm>
+          <a:prstGeom prst="line">
+            <a:avLst/>
+          </a:prstGeom>
+          <a:ln w="9525">
+            <a:solidFill>
+              <a:srgbClr val="384848"/>
+            </a:solidFill>
+          </a:ln>
+        </p:spPr>
+      </p:cxnSp>
+      <p:sp>
+        <p:nvSpPr>
+          <p:cNvPr id="52" name="Marker 52"/>
+          <p:cNvSpPr/>
+          <p:nvPr/>
+        </p:nvSpPr>
+        <p:spPr>
+          <a:xfrm>
+            <a:off x="1024128" y="7767099"/>
+            <a:ext cx="135080" cy="135080"/>
+          </a:xfrm>
+          <a:prstGeom prst="ellipse">
+            <a:avLst/>
+          </a:prstGeom>
+          <a:solidFill>
+            <a:srgbClr val="C2D076"/>
+          </a:solidFill>
+          <a:ln>
+            <a:noFill/>
+          </a:ln>
+        </p:spPr>
+      </p:sp>
+      <p:sp>
+        <p:nvSpPr>
+          <p:cNvPr id="53" name="Item 53"/>
           <p:cNvSpPr txBox="1"/>
           <p:nvPr/>
         </p:nvSpPr>
         <p:spPr>
           <a:xfrm>
-            <a:off x="12501676" y="5793720"/>
-            <a:ext cx="4403752" cy="2380399"/>
+            <a:off x="1592885" y="7621355"/>
+            <a:ext cx="12423038" cy="451968"/>
           </a:xfrm>
           <a:prstGeom prst="rect">
             <a:avLst/>
@@ -6467,15 +6723,11 @@
           </a:bodyPr>
           <a:lstStyle/>
           <a:p>
-            <a:pPr algn="l" marL="391020" indent="-391020">
+            <a:pPr algn="l" marL="0" indent="0">
               <a:lnSpc>
                 <a:spcPct val="100000"/>
               </a:lnSpc>
-              <a:buClr>
-                <a:srgbClr val="C2D076"/>
-              </a:buClr>
-              <a:buFont typeface="Arial"/>
-              <a:buChar char="•"/>
+              <a:buNone/>
             </a:pPr>
             <a:r>
               <a:rPr lang="ru-RU" sz="2799" b="0" cap="none" spc="0" baseline="0" dirty="0">
@@ -6485,7 +6737,92 @@
                 <a:latin typeface="Inter Light"/>
                 <a:cs typeface="Inter Light"/>
               </a:rPr>
-              <a:t>Вывод первой строкой, текст слева, данные справа</a:t>
+              <a:t>Компилятор — проверяет каждое число</a:t>
+            </a:r>
+            <a:endParaRPr lang="ru-RU" sz="2799"/>
+          </a:p>
+        </p:txBody>
+      </p:sp>
+      <p:cxnSp>
+        <p:nvCxnSpPr>
+          <p:cNvPr id="54" name="Line 54"/>
+          <p:cNvCxnSpPr/>
+          <p:nvPr/>
+        </p:nvCxnSpPr>
+        <p:spPr>
+          <a:xfrm>
+            <a:off x="1592885" y="8339927"/>
+            <a:ext cx="12423038" cy="0"/>
+          </a:xfrm>
+          <a:prstGeom prst="line">
+            <a:avLst/>
+          </a:prstGeom>
+          <a:ln w="9525">
+            <a:solidFill>
+              <a:srgbClr val="384848"/>
+            </a:solidFill>
+          </a:ln>
+        </p:spPr>
+      </p:cxnSp>
+      <p:sp>
+        <p:nvSpPr>
+          <p:cNvPr id="55" name="Marker 55"/>
+          <p:cNvSpPr/>
+          <p:nvPr/>
+        </p:nvSpPr>
+        <p:spPr>
+          <a:xfrm>
+            <a:off x="1024128" y="8752275"/>
+            <a:ext cx="135080" cy="135080"/>
+          </a:xfrm>
+          <a:prstGeom prst="ellipse">
+            <a:avLst/>
+          </a:prstGeom>
+          <a:solidFill>
+            <a:srgbClr val="C2D076"/>
+          </a:solidFill>
+          <a:ln>
+            <a:noFill/>
+          </a:ln>
+        </p:spPr>
+      </p:sp>
+      <p:sp>
+        <p:nvSpPr>
+          <p:cNvPr id="56" name="Item 56"/>
+          <p:cNvSpPr txBox="1"/>
+          <p:nvPr/>
+        </p:nvSpPr>
+        <p:spPr>
+          <a:xfrm>
+            <a:off x="1592885" y="8606531"/>
+            <a:ext cx="12423038" cy="451968"/>
+          </a:xfrm>
+          <a:prstGeom prst="rect">
+            <a:avLst/>
+          </a:prstGeom>
+          <a:noFill/>
+        </p:spPr>
+        <p:txBody>
+          <a:bodyPr wrap="square" lIns="0" tIns="0" rIns="0" bIns="0" anchor="t" rtlCol="0">
+            <a:noAutofit/>
+          </a:bodyPr>
+          <a:lstStyle/>
+          <a:p>
+            <a:pPr algn="l" marL="0" indent="0">
+              <a:lnSpc>
+                <a:spcPct val="100000"/>
+              </a:lnSpc>
+              <a:buNone/>
+            </a:pPr>
+            <a:r>
+              <a:rPr lang="ru-RU" sz="2799" b="0" cap="none" spc="0" baseline="0" dirty="0">
+                <a:solidFill>
+                  <a:srgbClr val="FFFFFF"/>
+                </a:solidFill>
+                <a:latin typeface="Inter Light"/>
+                <a:cs typeface="Inter Light"/>
+              </a:rPr>
+              <a:t>Вёрстка — собирает слайды по дизайн-⁠системе шаблона</a:t>
             </a:r>
             <a:endParaRPr lang="ru-RU" sz="2799"/>
           </a:p>
@@ -6525,7 +6862,7 @@
         <p:spPr>
           <a:xfrm>
             <a:off x="619057" y="2623820"/>
-            <a:ext cx="15727680" cy="809548"/>
+            <a:ext cx="15727680" cy="944880"/>
           </a:xfrm>
           <a:prstGeom prst="rect">
             <a:avLst/>
@@ -6568,7 +6905,7 @@
                 <a:cs typeface="Inter Medium"/>
                 <a:sym typeface="Inter Medium"/>
               </a:rPr>
-              <a:t>Целостность — основная категория проверок</a:t>
+              <a:t>Одно содержание, три подхода к подаче</a:t>
             </a:r>
             <a:endParaRPr>
               <a:latin typeface="Inter Medium"/>
@@ -6579,186 +6916,575 @@
           </a:p>
         </p:txBody>
       </p:sp>
-      <p:sp>
-        <p:nvSpPr>
-          <p:cNvPr id="43" name="Chart note 43"/>
-          <p:cNvSpPr txBox="1"/>
-          <p:nvPr/>
-        </p:nvSpPr>
-        <p:spPr>
-          <a:xfrm>
-            <a:off x="1024128" y="3947718"/>
-            <a:ext cx="5521512" cy="878535"/>
-          </a:xfrm>
-          <a:prstGeom prst="rect">
-            <a:avLst/>
-          </a:prstGeom>
-          <a:noFill/>
-        </p:spPr>
-        <p:txBody>
-          <a:bodyPr wrap="square" lIns="0" tIns="0" rIns="0" bIns="0" anchor="t" rtlCol="0">
-            <a:noAutofit/>
-          </a:bodyPr>
-          <a:lstStyle/>
-          <a:p>
-            <a:pPr algn="l" marL="0" indent="0">
-              <a:lnSpc>
-                <a:spcPct val="100000"/>
-              </a:lnSpc>
-              <a:buNone/>
-            </a:pPr>
-            <a:r>
-              <a:rPr lang="ru-RU" sz="2799" b="1" cap="none" spc="0" baseline="0" dirty="0">
-                <a:solidFill>
-                  <a:srgbClr val="C2D076"/>
-                </a:solidFill>
-                <a:latin typeface="Inter Light"/>
-                <a:cs typeface="Inter Light"/>
-              </a:rPr>
-              <a:t>Всего </a:t>
-            </a:r>
-            <a:r>
-              <a:rPr lang="ru-RU" sz="2799" b="1" cap="none" spc="0" baseline="0" dirty="0">
-                <a:solidFill>
-                  <a:srgbClr val="C2D076"/>
-                </a:solidFill>
-                <a:latin typeface="Inter Light"/>
-                <a:cs typeface="Inter Light"/>
-              </a:rPr>
-              <a:t>41 </a:t>
-            </a:r>
-            <a:r>
-              <a:rPr lang="ru-RU" sz="2799" b="1" cap="none" spc="0" baseline="0" dirty="0">
-                <a:solidFill>
-                  <a:srgbClr val="C2D076"/>
-                </a:solidFill>
-                <a:latin typeface="Inter Light"/>
-                <a:cs typeface="Inter Light"/>
-              </a:rPr>
-              <a:t>проверка: </a:t>
-            </a:r>
-            <a:r>
-              <a:rPr lang="ru-RU" sz="2799" b="1" cap="none" spc="0" baseline="0" dirty="0">
-                <a:solidFill>
-                  <a:srgbClr val="C2D076"/>
-                </a:solidFill>
-                <a:latin typeface="Inter Light"/>
-                <a:cs typeface="Inter Light"/>
-              </a:rPr>
-              <a:t>12 </a:t>
-            </a:r>
-            <a:r>
-              <a:rPr lang="ru-RU" sz="2799" b="1" cap="none" spc="0" baseline="0" dirty="0">
-                <a:solidFill>
-                  <a:srgbClr val="C2D076"/>
-                </a:solidFill>
-                <a:latin typeface="Inter Light"/>
-                <a:cs typeface="Inter Light"/>
-              </a:rPr>
-              <a:t>на целостность, </a:t>
-            </a:r>
-            <a:r>
-              <a:rPr lang="ru-RU" sz="2799" b="1" cap="none" spc="0" baseline="0" dirty="0">
-                <a:solidFill>
-                  <a:srgbClr val="C2D076"/>
-                </a:solidFill>
-                <a:latin typeface="Inter Light"/>
-                <a:cs typeface="Inter Light"/>
-              </a:rPr>
-              <a:t>11 </a:t>
-            </a:r>
-            <a:r>
-              <a:rPr lang="ru-RU" sz="2799" b="1" cap="none" spc="0" baseline="0" dirty="0">
-                <a:solidFill>
-                  <a:srgbClr val="C2D076"/>
-                </a:solidFill>
-                <a:latin typeface="Inter Light"/>
-                <a:cs typeface="Inter Light"/>
-              </a:rPr>
-              <a:t>на вёрстку</a:t>
-            </a:r>
-            <a:endParaRPr lang="ru-RU" sz="2799"/>
-          </a:p>
-        </p:txBody>
-      </p:sp>
-      <p:cxnSp>
-        <p:nvCxnSpPr>
-          <p:cNvPr id="44" name="Line 44"/>
-          <p:cNvCxnSpPr/>
-          <p:nvPr/>
-        </p:nvCxnSpPr>
-        <p:spPr>
-          <a:xfrm>
-            <a:off x="6984552" y="3947718"/>
-            <a:ext cx="0" cy="878535"/>
-          </a:xfrm>
-          <a:prstGeom prst="line">
-            <a:avLst/>
-          </a:prstGeom>
-          <a:ln w="12700">
-            <a:solidFill>
-              <a:srgbClr val="384848"/>
-            </a:solidFill>
-          </a:ln>
-        </p:spPr>
-      </p:cxnSp>
-      <p:sp>
-        <p:nvSpPr>
-          <p:cNvPr id="45" name="Unit 45"/>
-          <p:cNvSpPr txBox="1"/>
-          <p:nvPr/>
-        </p:nvSpPr>
-        <p:spPr>
-          <a:xfrm>
-            <a:off x="7423464" y="3947718"/>
-            <a:ext cx="9840408" cy="299720"/>
-          </a:xfrm>
-          <a:prstGeom prst="rect">
-            <a:avLst/>
-          </a:prstGeom>
-          <a:noFill/>
-        </p:spPr>
-        <p:txBody>
-          <a:bodyPr wrap="square" lIns="0" tIns="0" rIns="0" bIns="0" anchor="t" rtlCol="0">
-            <a:noAutofit/>
-          </a:bodyPr>
-          <a:lstStyle/>
-          <a:p>
-            <a:pPr algn="l" marL="0" indent="0">
-              <a:lnSpc>
-                <a:spcPct val="100000"/>
-              </a:lnSpc>
-              <a:buNone/>
-            </a:pPr>
-            <a:r>
-              <a:rPr lang="ru-RU" sz="1800" b="0" cap="none" spc="0" baseline="0" dirty="0">
-                <a:solidFill>
-                  <a:srgbClr val="FFFFFF"/>
-                </a:solidFill>
-                <a:latin typeface="Inter Light"/>
-                <a:cs typeface="Inter Light"/>
-              </a:rPr>
-              <a:t>Число проверок по категориям</a:t>
-            </a:r>
-            <a:endParaRPr lang="ru-RU" sz="1800"/>
-          </a:p>
-        </p:txBody>
-      </p:sp>
       <p:graphicFrame>
         <p:nvGraphicFramePr>
-          <p:cNvPr id="46" name="Chart 45"/>
+          <p:cNvPr id="43" name="Table"/>
           <p:cNvGraphicFramePr>
             <a:graphicFrameLocks noGrp="1"/>
           </p:cNvGraphicFramePr>
           <p:nvPr/>
         </p:nvGraphicFramePr>
         <p:xfrm>
-          <a:off x="7423464" y="4340021"/>
-          <a:ext cx="9840408" cy="4483968"/>
+          <a:off x="1024128" y="4137660"/>
+          <a:ext cx="16239744" cy="4599318"/>
         </p:xfrm>
         <a:graphic>
-          <a:graphicData uri="http://schemas.openxmlformats.org/drawingml/2006/chart">
-            <c:chart xmlns:c="http://schemas.openxmlformats.org/drawingml/2006/chart" r:id="rId2"/>
+          <a:graphicData uri="http://schemas.openxmlformats.org/drawingml/2006/table">
+            <a:tbl>
+              <a:tblPr firstRow="1" bandRow="0">
+                <a:tableStyleId>{2D5ABB26-0587-4C30-8999-92F81FD0307C}</a:tableStyleId>
+              </a:tblPr>
+              <a:tblGrid>
+                <a:gridCol w="2992235"/>
+                <a:gridCol w="7485664"/>
+                <a:gridCol w="5761845"/>
+              </a:tblGrid>
+              <a:tr h="919863">
+                <a:tc>
+                  <a:txBody>
+                    <a:bodyPr wrap="square"/>
+                    <a:lstStyle/>
+                    <a:p>
+                      <a:pPr algn="l">
+                        <a:spcBef>
+                          <a:spcPts val="0"/>
+                        </a:spcBef>
+                        <a:spcAft>
+                          <a:spcPts val="0"/>
+                        </a:spcAft>
+                      </a:pPr>
+                      <a:r>
+                        <a:rPr sz="2799" b="0" i="0" cap="none" spc="0" baseline="0" lang="ru-RU">
+                          <a:solidFill>
+                            <a:srgbClr val="000000"/>
+                          </a:solidFill>
+                          <a:latin typeface="Inter Light"/>
+                          <a:ea typeface="Inter Light"/>
+                          <a:cs typeface="Inter Light"/>
+                        </a:rPr>
+                        <a:t>Вариант</a:t>
+                      </a:r>
+                    </a:p>
+                  </a:txBody>
+                  <a:tcPr marL="177800" marR="177800" marT="76200" marB="76200" anchor="ctr">
+                    <a:lnL w="0">
+                      <a:noFill/>
+                    </a:lnL>
+                    <a:lnR w="0">
+                      <a:noFill/>
+                    </a:lnR>
+                    <a:lnT w="0">
+                      <a:noFill/>
+                    </a:lnT>
+                    <a:lnB w="0">
+                      <a:noFill/>
+                    </a:lnB>
+                    <a:solidFill>
+                      <a:srgbClr val="C2D076"/>
+                    </a:solidFill>
+                  </a:tcPr>
+                </a:tc>
+                <a:tc>
+                  <a:txBody>
+                    <a:bodyPr wrap="square"/>
+                    <a:lstStyle/>
+                    <a:p>
+                      <a:pPr algn="l">
+                        <a:spcBef>
+                          <a:spcPts val="0"/>
+                        </a:spcBef>
+                        <a:spcAft>
+                          <a:spcPts val="0"/>
+                        </a:spcAft>
+                      </a:pPr>
+                      <a:r>
+                        <a:rPr sz="2799" b="0" i="0" cap="none" spc="0" baseline="0" lang="ru-RU">
+                          <a:solidFill>
+                            <a:srgbClr val="000000"/>
+                          </a:solidFill>
+                          <a:latin typeface="Inter Light"/>
+                          <a:ea typeface="Inter Light"/>
+                          <a:cs typeface="Inter Light"/>
+                        </a:rPr>
+                        <a:t>Подача</a:t>
+                      </a:r>
+                    </a:p>
+                  </a:txBody>
+                  <a:tcPr marL="177800" marR="177800" marT="76200" marB="76200" anchor="ctr">
+                    <a:lnL w="0">
+                      <a:noFill/>
+                    </a:lnL>
+                    <a:lnR w="0">
+                      <a:noFill/>
+                    </a:lnR>
+                    <a:lnT w="0">
+                      <a:noFill/>
+                    </a:lnT>
+                    <a:lnB w="0">
+                      <a:noFill/>
+                    </a:lnB>
+                    <a:solidFill>
+                      <a:srgbClr val="C2D076"/>
+                    </a:solidFill>
+                  </a:tcPr>
+                </a:tc>
+                <a:tc>
+                  <a:txBody>
+                    <a:bodyPr wrap="square"/>
+                    <a:lstStyle/>
+                    <a:p>
+                      <a:pPr algn="l">
+                        <a:spcBef>
+                          <a:spcPts val="0"/>
+                        </a:spcBef>
+                        <a:spcAft>
+                          <a:spcPts val="0"/>
+                        </a:spcAft>
+                      </a:pPr>
+                      <a:r>
+                        <a:rPr sz="2799" b="0" i="0" cap="none" spc="0" baseline="0" lang="ru-RU">
+                          <a:solidFill>
+                            <a:srgbClr val="000000"/>
+                          </a:solidFill>
+                          <a:latin typeface="Inter Light"/>
+                          <a:ea typeface="Inter Light"/>
+                          <a:cs typeface="Inter Light"/>
+                        </a:rPr>
+                        <a:t>Когда подходит</a:t>
+                      </a:r>
+                    </a:p>
+                  </a:txBody>
+                  <a:tcPr marL="177800" marR="177800" marT="76200" marB="76200" anchor="ctr">
+                    <a:lnL w="0">
+                      <a:noFill/>
+                    </a:lnL>
+                    <a:lnR w="0">
+                      <a:noFill/>
+                    </a:lnR>
+                    <a:lnT w="0">
+                      <a:noFill/>
+                    </a:lnT>
+                    <a:lnB w="0">
+                      <a:noFill/>
+                    </a:lnB>
+                    <a:solidFill>
+                      <a:srgbClr val="C2D076"/>
+                    </a:solidFill>
+                  </a:tcPr>
+                </a:tc>
+              </a:tr>
+              <a:tr h="1226485">
+                <a:tc>
+                  <a:txBody>
+                    <a:bodyPr wrap="square"/>
+                    <a:lstStyle/>
+                    <a:p>
+                      <a:pPr algn="l">
+                        <a:spcBef>
+                          <a:spcPts val="0"/>
+                        </a:spcBef>
+                        <a:spcAft>
+                          <a:spcPts val="0"/>
+                        </a:spcAft>
+                      </a:pPr>
+                      <a:r>
+                        <a:rPr sz="2799" b="0" i="0" cap="none" spc="0" baseline="0" lang="ru-RU">
+                          <a:solidFill>
+                            <a:srgbClr val="FFFFFF"/>
+                          </a:solidFill>
+                          <a:latin typeface="Inter Light"/>
+                          <a:ea typeface="Inter Light"/>
+                          <a:cs typeface="Inter Light"/>
+                        </a:rPr>
+                        <a:t>Структурный</a:t>
+                      </a:r>
+                    </a:p>
+                  </a:txBody>
+                  <a:tcPr marL="177800" marR="177800" marT="76200" marB="76200" anchor="ctr">
+                    <a:lnL w="0">
+                      <a:noFill/>
+                    </a:lnL>
+                    <a:lnR w="0">
+                      <a:noFill/>
+                    </a:lnR>
+                    <a:lnT w="0">
+                      <a:noFill/>
+                    </a:lnT>
+                    <a:lnB w="9525" cap="flat" cmpd="sng" algn="ctr">
+                      <a:solidFill>
+                        <a:srgbClr val="384848"/>
+                      </a:solidFill>
+                      <a:prstDash val="solid"/>
+                    </a:lnB>
+                    <a:noFill/>
+                  </a:tcPr>
+                </a:tc>
+                <a:tc>
+                  <a:txBody>
+                    <a:bodyPr wrap="square"/>
+                    <a:lstStyle/>
+                    <a:p>
+                      <a:pPr algn="l">
+                        <a:spcBef>
+                          <a:spcPts val="0"/>
+                        </a:spcBef>
+                        <a:spcAft>
+                          <a:spcPts val="0"/>
+                        </a:spcAft>
+                      </a:pPr>
+                      <a:r>
+                        <a:rPr sz="2799" b="0" i="0" cap="none" spc="0" baseline="0" lang="ru-RU">
+                          <a:solidFill>
+                            <a:srgbClr val="FFFFFF"/>
+                          </a:solidFill>
+                          <a:latin typeface="Inter Light"/>
+                          <a:ea typeface="Inter Light"/>
+                          <a:cs typeface="Inter Light"/>
+                        </a:rPr>
+                        <a:t>одна мысль на слайд, строгая сетка</a:t>
+                      </a:r>
+                    </a:p>
+                  </a:txBody>
+                  <a:tcPr marL="177800" marR="177800" marT="76200" marB="76200" anchor="ctr">
+                    <a:lnL w="0">
+                      <a:noFill/>
+                    </a:lnL>
+                    <a:lnR w="0">
+                      <a:noFill/>
+                    </a:lnR>
+                    <a:lnT w="0">
+                      <a:noFill/>
+                    </a:lnT>
+                    <a:lnB w="9525" cap="flat" cmpd="sng" algn="ctr">
+                      <a:solidFill>
+                        <a:srgbClr val="384848"/>
+                      </a:solidFill>
+                      <a:prstDash val="solid"/>
+                    </a:lnB>
+                    <a:noFill/>
+                  </a:tcPr>
+                </a:tc>
+                <a:tc>
+                  <a:txBody>
+                    <a:bodyPr wrap="square"/>
+                    <a:lstStyle/>
+                    <a:p>
+                      <a:pPr algn="l">
+                        <a:spcBef>
+                          <a:spcPts val="0"/>
+                        </a:spcBef>
+                        <a:spcAft>
+                          <a:spcPts val="0"/>
+                        </a:spcAft>
+                      </a:pPr>
+                      <a:r>
+                        <a:rPr sz="2799" b="0" i="0" cap="none" spc="0" baseline="0" lang="ru-RU">
+                          <a:solidFill>
+                            <a:srgbClr val="FFFFFF"/>
+                          </a:solidFill>
+                          <a:latin typeface="Inter Light"/>
+                          <a:ea typeface="Inter Light"/>
+                          <a:cs typeface="Inter Light"/>
+                        </a:rPr>
+                        <a:t>отчёт и защита проекта</a:t>
+                      </a:r>
+                    </a:p>
+                  </a:txBody>
+                  <a:tcPr marL="177800" marR="177800" marT="76200" marB="76200" anchor="ctr">
+                    <a:lnL w="0">
+                      <a:noFill/>
+                    </a:lnL>
+                    <a:lnR w="0">
+                      <a:noFill/>
+                    </a:lnR>
+                    <a:lnT w="0">
+                      <a:noFill/>
+                    </a:lnT>
+                    <a:lnB w="9525" cap="flat" cmpd="sng" algn="ctr">
+                      <a:solidFill>
+                        <a:srgbClr val="384848"/>
+                      </a:solidFill>
+                      <a:prstDash val="solid"/>
+                    </a:lnB>
+                    <a:noFill/>
+                  </a:tcPr>
+                </a:tc>
+              </a:tr>
+              <a:tr h="1226485">
+                <a:tc>
+                  <a:txBody>
+                    <a:bodyPr wrap="square"/>
+                    <a:lstStyle/>
+                    <a:p>
+                      <a:pPr algn="l">
+                        <a:spcBef>
+                          <a:spcPts val="0"/>
+                        </a:spcBef>
+                        <a:spcAft>
+                          <a:spcPts val="0"/>
+                        </a:spcAft>
+                      </a:pPr>
+                      <a:r>
+                        <a:rPr sz="2799" b="0" i="0" cap="none" spc="0" baseline="0" lang="ru-RU">
+                          <a:solidFill>
+                            <a:srgbClr val="FFFFFF"/>
+                          </a:solidFill>
+                          <a:latin typeface="Inter Light"/>
+                          <a:ea typeface="Inter Light"/>
+                          <a:cs typeface="Inter Light"/>
+                        </a:rPr>
+                        <a:t>Визуальный</a:t>
+                      </a:r>
+                    </a:p>
+                  </a:txBody>
+                  <a:tcPr marL="177800" marR="177800" marT="76200" marB="76200" anchor="ctr">
+                    <a:lnL w="0">
+                      <a:noFill/>
+                    </a:lnL>
+                    <a:lnR w="0">
+                      <a:noFill/>
+                    </a:lnR>
+                    <a:lnT w="0">
+                      <a:noFill/>
+                    </a:lnT>
+                    <a:lnB w="9525" cap="flat" cmpd="sng" algn="ctr">
+                      <a:solidFill>
+                        <a:srgbClr val="384848"/>
+                      </a:solidFill>
+                      <a:prstDash val="solid"/>
+                    </a:lnB>
+                    <a:noFill/>
+                  </a:tcPr>
+                </a:tc>
+                <a:tc>
+                  <a:txBody>
+                    <a:bodyPr wrap="square"/>
+                    <a:lstStyle/>
+                    <a:p>
+                      <a:pPr algn="l">
+                        <a:spcBef>
+                          <a:spcPts val="0"/>
+                        </a:spcBef>
+                        <a:spcAft>
+                          <a:spcPts val="0"/>
+                        </a:spcAft>
+                      </a:pPr>
+                      <a:r>
+                        <a:rPr sz="2799" b="0" i="0" cap="none" spc="0" baseline="0" lang="ru-RU">
+                          <a:solidFill>
+                            <a:srgbClr val="FFFFFF"/>
+                          </a:solidFill>
+                          <a:latin typeface="Inter Light"/>
+                          <a:ea typeface="Inter Light"/>
+                          <a:cs typeface="Inter Light"/>
+                        </a:rPr>
+                        <a:t>крупные цифры и наглядные схемы</a:t>
+                      </a:r>
+                    </a:p>
+                  </a:txBody>
+                  <a:tcPr marL="177800" marR="177800" marT="76200" marB="76200" anchor="ctr">
+                    <a:lnL w="0">
+                      <a:noFill/>
+                    </a:lnL>
+                    <a:lnR w="0">
+                      <a:noFill/>
+                    </a:lnR>
+                    <a:lnT w="0">
+                      <a:noFill/>
+                    </a:lnT>
+                    <a:lnB w="9525" cap="flat" cmpd="sng" algn="ctr">
+                      <a:solidFill>
+                        <a:srgbClr val="384848"/>
+                      </a:solidFill>
+                      <a:prstDash val="solid"/>
+                    </a:lnB>
+                    <a:noFill/>
+                  </a:tcPr>
+                </a:tc>
+                <a:tc>
+                  <a:txBody>
+                    <a:bodyPr wrap="square"/>
+                    <a:lstStyle/>
+                    <a:p>
+                      <a:pPr algn="l">
+                        <a:spcBef>
+                          <a:spcPts val="0"/>
+                        </a:spcBef>
+                        <a:spcAft>
+                          <a:spcPts val="0"/>
+                        </a:spcAft>
+                      </a:pPr>
+                      <a:r>
+                        <a:rPr sz="2799" b="0" i="0" cap="none" spc="0" baseline="0" lang="ru-RU">
+                          <a:solidFill>
+                            <a:srgbClr val="FFFFFF"/>
+                          </a:solidFill>
+                          <a:latin typeface="Inter Light"/>
+                          <a:ea typeface="Inter Light"/>
+                          <a:cs typeface="Inter Light"/>
+                        </a:rPr>
+                        <a:t>питч и выступление со сцены</a:t>
+                      </a:r>
+                    </a:p>
+                  </a:txBody>
+                  <a:tcPr marL="177800" marR="177800" marT="76200" marB="76200" anchor="ctr">
+                    <a:lnL w="0">
+                      <a:noFill/>
+                    </a:lnL>
+                    <a:lnR w="0">
+                      <a:noFill/>
+                    </a:lnR>
+                    <a:lnT w="0">
+                      <a:noFill/>
+                    </a:lnT>
+                    <a:lnB w="9525" cap="flat" cmpd="sng" algn="ctr">
+                      <a:solidFill>
+                        <a:srgbClr val="384848"/>
+                      </a:solidFill>
+                      <a:prstDash val="solid"/>
+                    </a:lnB>
+                    <a:noFill/>
+                  </a:tcPr>
+                </a:tc>
+              </a:tr>
+              <a:tr h="1226485">
+                <a:tc>
+                  <a:txBody>
+                    <a:bodyPr wrap="square"/>
+                    <a:lstStyle/>
+                    <a:p>
+                      <a:pPr algn="l">
+                        <a:spcBef>
+                          <a:spcPts val="0"/>
+                        </a:spcBef>
+                        <a:spcAft>
+                          <a:spcPts val="0"/>
+                        </a:spcAft>
+                      </a:pPr>
+                      <a:r>
+                        <a:rPr sz="2799" b="0" i="0" cap="none" spc="0" baseline="0" lang="ru-RU">
+                          <a:solidFill>
+                            <a:srgbClr val="FFFFFF"/>
+                          </a:solidFill>
+                          <a:latin typeface="Inter Light"/>
+                          <a:ea typeface="Inter Light"/>
+                          <a:cs typeface="Inter Light"/>
+                        </a:rPr>
+                        <a:t>Компактный</a:t>
+                      </a:r>
+                    </a:p>
+                  </a:txBody>
+                  <a:tcPr marL="177800" marR="177800" marT="76200" marB="76200" anchor="ctr">
+                    <a:lnL w="0">
+                      <a:noFill/>
+                    </a:lnL>
+                    <a:lnR w="0">
+                      <a:noFill/>
+                    </a:lnR>
+                    <a:lnT w="0">
+                      <a:noFill/>
+                    </a:lnT>
+                    <a:lnB w="9525" cap="flat" cmpd="sng" algn="ctr">
+                      <a:solidFill>
+                        <a:srgbClr val="384848"/>
+                      </a:solidFill>
+                      <a:prstDash val="solid"/>
+                    </a:lnB>
+                    <a:noFill/>
+                  </a:tcPr>
+                </a:tc>
+                <a:tc>
+                  <a:txBody>
+                    <a:bodyPr wrap="square"/>
+                    <a:lstStyle/>
+                    <a:p>
+                      <a:pPr algn="l">
+                        <a:spcBef>
+                          <a:spcPts val="0"/>
+                        </a:spcBef>
+                        <a:spcAft>
+                          <a:spcPts val="0"/>
+                        </a:spcAft>
+                      </a:pPr>
+                      <a:r>
+                        <a:rPr sz="2799" b="0" i="0" cap="none" spc="0" baseline="0" lang="ru-RU">
+                          <a:solidFill>
+                            <a:srgbClr val="FFFFFF"/>
+                          </a:solidFill>
+                          <a:latin typeface="Inter Light"/>
+                          <a:ea typeface="Inter Light"/>
+                          <a:cs typeface="Inter Light"/>
+                        </a:rPr>
+                        <a:t>вывод первой строкой, данные справа</a:t>
+                      </a:r>
+                    </a:p>
+                  </a:txBody>
+                  <a:tcPr marL="177800" marR="177800" marT="76200" marB="76200" anchor="ctr">
+                    <a:lnL w="0">
+                      <a:noFill/>
+                    </a:lnL>
+                    <a:lnR w="0">
+                      <a:noFill/>
+                    </a:lnR>
+                    <a:lnT w="0">
+                      <a:noFill/>
+                    </a:lnT>
+                    <a:lnB w="9525" cap="flat" cmpd="sng" algn="ctr">
+                      <a:solidFill>
+                        <a:srgbClr val="384848"/>
+                      </a:solidFill>
+                      <a:prstDash val="solid"/>
+                    </a:lnB>
+                    <a:noFill/>
+                  </a:tcPr>
+                </a:tc>
+                <a:tc>
+                  <a:txBody>
+                    <a:bodyPr wrap="square"/>
+                    <a:lstStyle/>
+                    <a:p>
+                      <a:pPr algn="l">
+                        <a:spcBef>
+                          <a:spcPts val="0"/>
+                        </a:spcBef>
+                        <a:spcAft>
+                          <a:spcPts val="0"/>
+                        </a:spcAft>
+                      </a:pPr>
+                      <a:r>
+                        <a:rPr sz="2799" b="0" i="0" cap="none" spc="0" baseline="0" lang="ru-RU">
+                          <a:solidFill>
+                            <a:srgbClr val="FFFFFF"/>
+                          </a:solidFill>
+                          <a:latin typeface="Inter Light"/>
+                          <a:ea typeface="Inter Light"/>
+                          <a:cs typeface="Inter Light"/>
+                        </a:rPr>
+                        <a:t>рассылка руководителю</a:t>
+                      </a:r>
+                    </a:p>
+                  </a:txBody>
+                  <a:tcPr marL="177800" marR="177800" marT="76200" marB="76200" anchor="ctr">
+                    <a:lnL w="0">
+                      <a:noFill/>
+                    </a:lnL>
+                    <a:lnR w="0">
+                      <a:noFill/>
+                    </a:lnR>
+                    <a:lnT w="0">
+                      <a:noFill/>
+                    </a:lnT>
+                    <a:lnB w="9525" cap="flat" cmpd="sng" algn="ctr">
+                      <a:solidFill>
+                        <a:srgbClr val="384848"/>
+                      </a:solidFill>
+                      <a:prstDash val="solid"/>
+                    </a:lnB>
+                    <a:noFill/>
+                  </a:tcPr>
+                </a:tc>
+              </a:tr>
+            </a:tbl>
           </a:graphicData>
         </a:graphic>
       </p:graphicFrame>
@@ -6796,7 +7522,7 @@
         <p:spPr>
           <a:xfrm>
             <a:off x="619057" y="2623820"/>
-            <a:ext cx="15727680" cy="809548"/>
+            <a:ext cx="15727680" cy="944880"/>
           </a:xfrm>
           <a:prstGeom prst="rect">
             <a:avLst/>
@@ -6839,7 +7565,7 @@
                 <a:cs typeface="Inter Medium"/>
                 <a:sym typeface="Inter Medium"/>
               </a:rPr>
-              <a:t>9 демонстрационных презентаций без лишних чисел</a:t>
+              <a:t>41 проверка качества на слайд</a:t>
             </a:r>
             <a:endParaRPr>
               <a:latin typeface="Inter Medium"/>
@@ -6850,6 +7576,249 @@
           </a:p>
         </p:txBody>
       </p:sp>
+      <p:sp>
+        <p:nvSpPr>
+          <p:cNvPr id="43" name="Chart note 43"/>
+          <p:cNvSpPr txBox="1"/>
+          <p:nvPr/>
+        </p:nvSpPr>
+        <p:spPr>
+          <a:xfrm>
+            <a:off x="1024128" y="4137660"/>
+            <a:ext cx="5521512" cy="2051596"/>
+          </a:xfrm>
+          <a:prstGeom prst="rect">
+            <a:avLst/>
+          </a:prstGeom>
+          <a:noFill/>
+        </p:spPr>
+        <p:txBody>
+          <a:bodyPr wrap="square" lIns="0" tIns="0" rIns="0" bIns="0" anchor="t" rtlCol="0">
+            <a:noAutofit/>
+          </a:bodyPr>
+          <a:lstStyle/>
+          <a:p>
+            <a:pPr algn="l" marL="0" indent="0">
+              <a:lnSpc>
+                <a:spcPct val="100000"/>
+              </a:lnSpc>
+              <a:spcAft>
+                <a:spcPts val="2519"/>
+              </a:spcAft>
+              <a:buNone/>
+            </a:pPr>
+            <a:r>
+              <a:rPr lang="ru-RU" sz="2799" b="1" cap="none" spc="0" baseline="0" dirty="0">
+                <a:solidFill>
+                  <a:srgbClr val="C2D076"/>
+                </a:solidFill>
+                <a:latin typeface="Inter Light"/>
+                <a:cs typeface="Inter Light"/>
+              </a:rPr>
+              <a:t>12 </a:t>
+            </a:r>
+            <a:r>
+              <a:rPr lang="ru-RU" sz="2799" b="1" cap="none" spc="0" baseline="0" dirty="0">
+                <a:solidFill>
+                  <a:srgbClr val="C2D076"/>
+                </a:solidFill>
+                <a:latin typeface="Inter Light"/>
+                <a:cs typeface="Inter Light"/>
+              </a:rPr>
+              <a:t>проверок на целостность — самая большая группа</a:t>
+            </a:r>
+            <a:endParaRPr lang="ru-RU" sz="2799"/>
+          </a:p>
+          <a:p>
+            <a:pPr algn="l" marL="0" indent="0">
+              <a:lnSpc>
+                <a:spcPct val="100000"/>
+              </a:lnSpc>
+              <a:buNone/>
+            </a:pPr>
+            <a:r>
+              <a:rPr lang="ru-RU" sz="2799" b="0" cap="none" spc="0" baseline="0" dirty="0">
+                <a:solidFill>
+                  <a:srgbClr val="FFFFFF"/>
+                </a:solidFill>
+                <a:latin typeface="Inter Light"/>
+                <a:cs typeface="Inter Light"/>
+              </a:rPr>
+              <a:t>Найденные проблемы помечаются на слайде</a:t>
+            </a:r>
+            <a:endParaRPr lang="ru-RU" sz="2799"/>
+          </a:p>
+        </p:txBody>
+      </p:sp>
+      <p:cxnSp>
+        <p:nvCxnSpPr>
+          <p:cNvPr id="44" name="Line 44"/>
+          <p:cNvCxnSpPr/>
+          <p:nvPr/>
+        </p:nvCxnSpPr>
+        <p:spPr>
+          <a:xfrm>
+            <a:off x="6984552" y="4137660"/>
+            <a:ext cx="0" cy="2051596"/>
+          </a:xfrm>
+          <a:prstGeom prst="line">
+            <a:avLst/>
+          </a:prstGeom>
+          <a:ln w="12700">
+            <a:solidFill>
+              <a:srgbClr val="384848"/>
+            </a:solidFill>
+          </a:ln>
+        </p:spPr>
+      </p:cxnSp>
+      <p:sp>
+        <p:nvSpPr>
+          <p:cNvPr id="45" name="Unit 45"/>
+          <p:cNvSpPr txBox="1"/>
+          <p:nvPr/>
+        </p:nvSpPr>
+        <p:spPr>
+          <a:xfrm>
+            <a:off x="7423464" y="4137660"/>
+            <a:ext cx="9840408" cy="299720"/>
+          </a:xfrm>
+          <a:prstGeom prst="rect">
+            <a:avLst/>
+          </a:prstGeom>
+          <a:noFill/>
+        </p:spPr>
+        <p:txBody>
+          <a:bodyPr wrap="square" lIns="0" tIns="0" rIns="0" bIns="0" anchor="t" rtlCol="0">
+            <a:noAutofit/>
+          </a:bodyPr>
+          <a:lstStyle/>
+          <a:p>
+            <a:pPr algn="l" marL="0" indent="0">
+              <a:lnSpc>
+                <a:spcPct val="100000"/>
+              </a:lnSpc>
+              <a:buNone/>
+            </a:pPr>
+            <a:r>
+              <a:rPr lang="ru-RU" sz="1800" b="0" cap="none" spc="0" baseline="0" dirty="0">
+                <a:solidFill>
+                  <a:srgbClr val="FFFFFF"/>
+                </a:solidFill>
+                <a:latin typeface="Inter Light"/>
+                <a:cs typeface="Inter Light"/>
+              </a:rPr>
+              <a:t>Число проверок по категориям</a:t>
+            </a:r>
+            <a:endParaRPr lang="ru-RU" sz="1800"/>
+          </a:p>
+        </p:txBody>
+      </p:sp>
+      <p:graphicFrame>
+        <p:nvGraphicFramePr>
+          <p:cNvPr id="46" name="Chart 45"/>
+          <p:cNvGraphicFramePr>
+            <a:graphicFrameLocks noGrp="1"/>
+          </p:cNvGraphicFramePr>
+          <p:nvPr/>
+        </p:nvGraphicFramePr>
+        <p:xfrm>
+          <a:off x="7423464" y="4529963"/>
+          <a:ext cx="9840408" cy="4309221"/>
+        </p:xfrm>
+        <a:graphic>
+          <a:graphicData uri="http://schemas.openxmlformats.org/drawingml/2006/chart">
+            <c:chart xmlns:c="http://schemas.openxmlformats.org/drawingml/2006/chart" r:id="rId2"/>
+          </a:graphicData>
+        </a:graphic>
+      </p:graphicFrame>
+    </p:spTree>
+  </p:cSld>
+  <p:clrMapOvr>
+    <a:masterClrMapping/>
+  </p:clrMapOvr>
+</p:sld>
+</file>
+
+<file path=ppt/slides/slide7.xml><?xml version="1.0" encoding="utf-8"?>
+<p:sld xmlns:a="http://schemas.openxmlformats.org/drawingml/2006/main" xmlns:p="http://schemas.openxmlformats.org/presentationml/2006/main" xmlns:r="http://schemas.openxmlformats.org/officeDocument/2006/relationships">
+  <p:cSld>
+    <p:bg>
+      <p:bgPr>
+        <a:solidFill>
+          <a:srgbClr val="001514"/>
+        </a:solidFill>
+      </p:bgPr>
+    </p:bg>
+    <p:spTree>
+      <p:nvGrpSpPr>
+        <p:cNvPr id="1" name=""/>
+        <p:cNvGrpSpPr/>
+        <p:nvPr/>
+      </p:nvGrpSpPr>
+      <p:grpSpPr/>
+      <p:sp>
+        <p:nvSpPr>
+          <p:cNvPr id="42" name="Google Shape;42;p8"/>
+          <p:cNvSpPr txBox="1"/>
+          <p:nvPr/>
+        </p:nvSpPr>
+        <p:spPr>
+          <a:xfrm>
+            <a:off x="619057" y="2623820"/>
+            <a:ext cx="10495470" cy="1527657"/>
+          </a:xfrm>
+          <a:prstGeom prst="rect">
+            <a:avLst/>
+          </a:prstGeom>
+          <a:noFill/>
+          <a:ln>
+            <a:noFill/>
+          </a:ln>
+        </p:spPr>
+        <p:txBody>
+          <a:bodyPr anchorCtr="0" anchor="t" bIns="0" lIns="0" spcFirstLastPara="1" rIns="0" wrap="square" tIns="0">
+            <a:spAutoFit/>
+          </a:bodyPr>
+          <a:lstStyle/>
+          <a:p>
+            <a:pPr indent="0" lvl="1" marL="0" marR="0" rtl="0" algn="l">
+              <a:lnSpc>
+                <a:spcPct val="120000"/>
+              </a:lnSpc>
+              <a:spcBef>
+                <a:spcPts val="0"/>
+              </a:spcBef>
+              <a:spcAft>
+                <a:spcPts val="0"/>
+              </a:spcAft>
+              <a:buClr>
+                <a:srgbClr val="C2D076"/>
+              </a:buClr>
+              <a:buSzPts val="5600"/>
+              <a:buFont typeface="Inter Medium"/>
+              <a:buNone/>
+            </a:pPr>
+            <a:r>
+              <a:rPr i="0" lang="ru-RU" sz="2799" u="none" cap="none" strike="noStrike">
+                <a:solidFill>
+                  <a:srgbClr val="C2D076"/>
+                </a:solidFill>
+                <a:latin typeface="Inter Medium"/>
+                <a:ea typeface="Inter Medium"/>
+                <a:cs typeface="Inter Medium"/>
+                <a:sym typeface="Inter Medium"/>
+              </a:rPr>
+              <a:t>9 демонстрационных презентаций без выдуманных чисел</a:t>
+            </a:r>
+            <a:endParaRPr>
+              <a:latin typeface="Inter Medium"/>
+              <a:ea typeface="Inter Medium"/>
+              <a:cs typeface="Inter Medium"/>
+              <a:sym typeface="Inter Medium"/>
+            </a:endParaRPr>
+          </a:p>
+        </p:txBody>
+      </p:sp>
       <p:graphicFrame>
         <p:nvGraphicFramePr>
           <p:cNvPr id="43" name="Table"/>
@@ -6859,8 +7828,8 @@
           <p:nvPr/>
         </p:nvGraphicFramePr>
         <p:xfrm>
-          <a:off x="1024128" y="3947718"/>
-          <a:ext cx="11692615" cy="4770266"/>
+          <a:off x="1024128" y="4665827"/>
+          <a:ext cx="11692615" cy="4123968"/>
         </p:xfrm>
         <a:graphic>
           <a:graphicData uri="http://schemas.openxmlformats.org/drawingml/2006/table">
@@ -6869,10 +7838,10 @@
                 <a:tableStyleId>{2D5ABB26-0587-4C30-8999-92F81FD0307C}</a:tableStyleId>
               </a:tblPr>
               <a:tblGrid>
-                <a:gridCol w="5846308"/>
-                <a:gridCol w="5846307"/>
+                <a:gridCol w="8490075"/>
+                <a:gridCol w="3202540"/>
               </a:tblGrid>
-              <a:tr h="954053">
+              <a:tr h="824793">
                 <a:tc>
                   <a:txBody>
                     <a:bodyPr wrap="square"/>
@@ -6922,7 +7891,7 @@
                     <a:bodyPr wrap="square"/>
                     <a:lstStyle/>
                     <a:p>
-                      <a:pPr algn="l">
+                      <a:pPr algn="r">
                         <a:spcBef>
                           <a:spcPts val="0"/>
                         </a:spcBef>
@@ -6962,7 +7931,7 @@
                   </a:tcPr>
                 </a:tc>
               </a:tr>
-              <a:tr h="1272071">
+              <a:tr h="1099725">
                 <a:tc>
                   <a:txBody>
                     <a:bodyPr wrap="square"/>
@@ -7013,7 +7982,7 @@
                     <a:bodyPr wrap="square"/>
                     <a:lstStyle/>
                     <a:p>
-                      <a:pPr algn="l">
+                      <a:pPr algn="r">
                         <a:spcBef>
                           <a:spcPts val="0"/>
                         </a:spcBef>
@@ -7054,7 +8023,7 @@
                   </a:tcPr>
                 </a:tc>
               </a:tr>
-              <a:tr h="1272071">
+              <a:tr h="1099725">
                 <a:tc>
                   <a:txBody>
                     <a:bodyPr wrap="square"/>
@@ -7077,7 +8046,7 @@
                           <a:ea typeface="Inter Light"/>
                           <a:cs typeface="Inter Light"/>
                         </a:rPr>
-                        <a:t>Сверенных чисел</a:t>
+                        <a:t>Проверенных чисел</a:t>
                       </a:r>
                     </a:p>
                   </a:txBody>
@@ -7105,7 +8074,7 @@
                     <a:bodyPr wrap="square"/>
                     <a:lstStyle/>
                     <a:p>
-                      <a:pPr algn="l">
+                      <a:pPr algn="r">
                         <a:spcBef>
                           <a:spcPts val="0"/>
                         </a:spcBef>
@@ -7122,7 +8091,7 @@
                           <a:ea typeface="Inter Light"/>
                           <a:cs typeface="Inter Light"/>
                         </a:rPr>
-                        <a:t>116 → 123</a:t>
+                        <a:t>116–123</a:t>
                       </a:r>
                     </a:p>
                   </a:txBody>
@@ -7146,7 +8115,7 @@
                   </a:tcPr>
                 </a:tc>
               </a:tr>
-              <a:tr h="1272071">
+              <a:tr h="1099725">
                 <a:tc>
                   <a:txBody>
                     <a:bodyPr wrap="square"/>
@@ -7169,7 +8138,7 @@
                           <a:ea typeface="Inter Light"/>
                           <a:cs typeface="Inter Light"/>
                         </a:rPr>
-                        <a:t>Лишних чисел</a:t>
+                        <a:t>Выдуманных чисел</a:t>
                       </a:r>
                     </a:p>
                   </a:txBody>
@@ -7197,7 +8166,7 @@
                     <a:bodyPr wrap="square"/>
                     <a:lstStyle/>
                     <a:p>
-                      <a:pPr algn="l">
+                      <a:pPr algn="r">
                         <a:spcBef>
                           <a:spcPts val="0"/>
                         </a:spcBef>
@@ -7250,7 +8219,7 @@
 </p:sld>
 </file>
 
-<file path=ppt/slides/slide7.xml><?xml version="1.0" encoding="utf-8"?>
+<file path=ppt/slides/slide8.xml><?xml version="1.0" encoding="utf-8"?>
 <p:sld xmlns:a="http://schemas.openxmlformats.org/drawingml/2006/main" xmlns:p="http://schemas.openxmlformats.org/presentationml/2006/main" xmlns:r="http://schemas.openxmlformats.org/officeDocument/2006/relationships">
   <p:cSld>
     <p:bg>
@@ -7319,7 +8288,7 @@
                 <a:cs typeface="Inter Medium"/>
                 <a:sym typeface="Inter Medium"/>
               </a:rPr>
-              <a:t>87 шаблонов и 99/100 качества</a:t>
+              <a:t>87 шаблонов, 99 из 100 и 12 форматов</a:t>
             </a:r>
             <a:endParaRPr>
               <a:latin typeface="Inter Medium"/>
@@ -7330,17 +8299,81 @@
           </a:p>
         </p:txBody>
       </p:sp>
+      <p:sp>
+        <p:nvSpPr>
+          <p:cNvPr id="47" name="Conclusion bar 47"/>
+          <p:cNvSpPr/>
+          <p:nvPr/>
+        </p:nvSpPr>
+        <p:spPr>
+          <a:xfrm>
+            <a:off x="1024128" y="4180317"/>
+            <a:ext cx="61722" cy="366654"/>
+          </a:xfrm>
+          <a:prstGeom prst="rect">
+            <a:avLst/>
+          </a:prstGeom>
+          <a:solidFill>
+            <a:srgbClr val="C2D076"/>
+          </a:solidFill>
+          <a:ln>
+            <a:noFill/>
+          </a:ln>
+        </p:spPr>
+      </p:sp>
+      <p:sp>
+        <p:nvSpPr>
+          <p:cNvPr id="48" name="Conclusion 48"/>
+          <p:cNvSpPr txBox="1"/>
+          <p:nvPr/>
+        </p:nvSpPr>
+        <p:spPr>
+          <a:xfrm>
+            <a:off x="1370228" y="4137660"/>
+            <a:ext cx="14269669" cy="451968"/>
+          </a:xfrm>
+          <a:prstGeom prst="rect">
+            <a:avLst/>
+          </a:prstGeom>
+          <a:noFill/>
+        </p:spPr>
+        <p:txBody>
+          <a:bodyPr wrap="square" lIns="0" tIns="0" rIns="0" bIns="0" anchor="t" rtlCol="0">
+            <a:noAutofit/>
+          </a:bodyPr>
+          <a:lstStyle/>
+          <a:p>
+            <a:pPr algn="l" marL="0" indent="0">
+              <a:lnSpc>
+                <a:spcPct val="100000"/>
+              </a:lnSpc>
+              <a:buNone/>
+            </a:pPr>
+            <a:r>
+              <a:rPr lang="ru-RU" sz="2799" b="1" cap="none" spc="0" baseline="0" dirty="0">
+                <a:solidFill>
+                  <a:srgbClr val="C2D076"/>
+                </a:solidFill>
+                <a:latin typeface="Inter Light"/>
+                <a:cs typeface="Inter Light"/>
+              </a:rPr>
+              <a:t>Сервис работает с любыми шаблонами и форматами</a:t>
+            </a:r>
+            <a:endParaRPr lang="ru-RU" sz="2799"/>
+          </a:p>
+        </p:txBody>
+      </p:sp>
       <p:graphicFrame>
         <p:nvGraphicFramePr>
-          <p:cNvPr id="43" name="Table"/>
+          <p:cNvPr id="49" name="Table"/>
           <p:cNvGraphicFramePr>
             <a:graphicFrameLocks noGrp="1"/>
           </p:cNvGraphicFramePr>
           <p:nvPr/>
         </p:nvGraphicFramePr>
         <p:xfrm>
-          <a:off x="1024128" y="4137660"/>
-          <a:ext cx="11692615" cy="4599318"/>
+          <a:off x="1024128" y="4959960"/>
+          <a:ext cx="11692615" cy="3859248"/>
         </p:xfrm>
         <a:graphic>
           <a:graphicData uri="http://schemas.openxmlformats.org/drawingml/2006/table">
@@ -7349,10 +8382,10 @@
                 <a:tableStyleId>{2D5ABB26-0587-4C30-8999-92F81FD0307C}</a:tableStyleId>
               </a:tblPr>
               <a:tblGrid>
-                <a:gridCol w="5846308"/>
-                <a:gridCol w="5846307"/>
+                <a:gridCol w="8490075"/>
+                <a:gridCol w="3202540"/>
               </a:tblGrid>
-              <a:tr h="919863">
+              <a:tr h="771849">
                 <a:tc>
                   <a:txBody>
                     <a:bodyPr wrap="square"/>
@@ -7402,7 +8435,7 @@
                     <a:bodyPr wrap="square"/>
                     <a:lstStyle/>
                     <a:p>
-                      <a:pPr algn="l">
+                      <a:pPr algn="r">
                         <a:spcBef>
                           <a:spcPts val="0"/>
                         </a:spcBef>
@@ -7442,7 +8475,7 @@
                   </a:tcPr>
                 </a:tc>
               </a:tr>
-              <a:tr h="1226485">
+              <a:tr h="1029133">
                 <a:tc>
                   <a:txBody>
                     <a:bodyPr wrap="square"/>
@@ -7493,7 +8526,7 @@
                     <a:bodyPr wrap="square"/>
                     <a:lstStyle/>
                     <a:p>
-                      <a:pPr algn="l">
+                      <a:pPr algn="r">
                         <a:spcBef>
                           <a:spcPts val="0"/>
                         </a:spcBef>
@@ -7534,7 +8567,7 @@
                   </a:tcPr>
                 </a:tc>
               </a:tr>
-              <a:tr h="1226485">
+              <a:tr h="1029133">
                 <a:tc>
                   <a:txBody>
                     <a:bodyPr wrap="square"/>
@@ -7585,7 +8618,7 @@
                     <a:bodyPr wrap="square"/>
                     <a:lstStyle/>
                     <a:p>
-                      <a:pPr algn="l">
+                      <a:pPr algn="r">
                         <a:spcBef>
                           <a:spcPts val="0"/>
                         </a:spcBef>
@@ -7594,7 +8627,7 @@
                         </a:spcAft>
                       </a:pPr>
                       <a:r>
-                        <a:rPr sz="2799" b="0" i="0" cap="none" spc="0" baseline="0">
+                        <a:rPr sz="2799" b="0" i="0" cap="none" spc="0" baseline="0" lang="ru-RU">
                           <a:solidFill>
                             <a:srgbClr val="FFFFFF"/>
                           </a:solidFill>
@@ -7602,7 +8635,7 @@
                           <a:ea typeface="Inter Light"/>
                           <a:cs typeface="Inter Light"/>
                         </a:rPr>
-                        <a:t>99/100</a:t>
+                        <a:t>99 из 100</a:t>
                       </a:r>
                     </a:p>
                   </a:txBody>
@@ -7626,7 +8659,7 @@
                   </a:tcPr>
                 </a:tc>
               </a:tr>
-              <a:tr h="1226485">
+              <a:tr h="1029133">
                 <a:tc>
                   <a:txBody>
                     <a:bodyPr wrap="square"/>
@@ -7677,7 +8710,7 @@
                     <a:bodyPr wrap="square"/>
                     <a:lstStyle/>
                     <a:p>
-                      <a:pPr algn="l">
+                      <a:pPr algn="r">
                         <a:spcBef>
                           <a:spcPts val="0"/>
                         </a:spcBef>
@@ -7730,7 +8763,7 @@
 </p:sld>
 </file>
 
-<file path=ppt/slides/slide8.xml><?xml version="1.0" encoding="utf-8"?>
+<file path=ppt/slides/slide9.xml><?xml version="1.0" encoding="utf-8"?>
 <p:sld xmlns:a="http://schemas.openxmlformats.org/drawingml/2006/main" xmlns:p="http://schemas.openxmlformats.org/presentationml/2006/main" xmlns:r="http://schemas.openxmlformats.org/officeDocument/2006/relationships">
   <p:cSld>
     <p:bg>
@@ -7799,7 +8832,7 @@
                 <a:cs typeface="Inter Medium"/>
                 <a:sym typeface="Inter Medium"/>
               </a:rPr>
-              <a:t>Генерация шаблонов укладывается в 5 минут</a:t>
+              <a:t>VK WorkSpace — самый долгий, но всё в лимите</a:t>
             </a:r>
             <a:endParaRPr>
               <a:latin typeface="Inter Medium"/>
@@ -7929,7 +8962,7 @@
                 <a:latin typeface="Inter Light"/>
                 <a:cs typeface="Inter Light"/>
               </a:rPr>
-              <a:t>Время генерации шаблонов (секунды)</a:t>
+              <a:t>Время генерации трёх вариантов на шаблонах датасета, секунд</a:t>
             </a:r>
             <a:endParaRPr lang="ru-RU" sz="1800"/>
           </a:p>
@@ -7953,580 +8986,6 @@
           </a:graphicData>
         </a:graphic>
       </p:graphicFrame>
-    </p:spTree>
-  </p:cSld>
-  <p:clrMapOvr>
-    <a:masterClrMapping/>
-  </p:clrMapOvr>
-</p:sld>
-</file>
-
-<file path=ppt/slides/slide9.xml><?xml version="1.0" encoding="utf-8"?>
-<p:sld xmlns:a="http://schemas.openxmlformats.org/drawingml/2006/main" xmlns:p="http://schemas.openxmlformats.org/presentationml/2006/main" xmlns:r="http://schemas.openxmlformats.org/officeDocument/2006/relationships">
-  <p:cSld>
-    <p:bg>
-      <p:bgPr>
-        <a:solidFill>
-          <a:srgbClr val="001514"/>
-        </a:solidFill>
-      </p:bgPr>
-    </p:bg>
-    <p:spTree>
-      <p:nvGrpSpPr>
-        <p:cNvPr id="1" name=""/>
-        <p:cNvGrpSpPr/>
-        <p:nvPr/>
-      </p:nvGrpSpPr>
-      <p:grpSpPr/>
-      <p:sp>
-        <p:nvSpPr>
-          <p:cNvPr id="42" name="Google Shape;42;p8"/>
-          <p:cNvSpPr txBox="1"/>
-          <p:nvPr/>
-        </p:nvSpPr>
-        <p:spPr>
-          <a:xfrm>
-            <a:off x="619057" y="2623820"/>
-            <a:ext cx="15727680" cy="809548"/>
-          </a:xfrm>
-          <a:prstGeom prst="rect">
-            <a:avLst/>
-          </a:prstGeom>
-          <a:noFill/>
-          <a:ln>
-            <a:noFill/>
-          </a:ln>
-        </p:spPr>
-        <p:txBody>
-          <a:bodyPr anchorCtr="0" anchor="t" bIns="0" lIns="0" spcFirstLastPara="1" rIns="0" wrap="square" tIns="0">
-            <a:spAutoFit/>
-          </a:bodyPr>
-          <a:lstStyle/>
-          <a:p>
-            <a:pPr indent="0" lvl="1" marL="0" marR="0" rtl="0" algn="l">
-              <a:lnSpc>
-                <a:spcPct val="120000"/>
-              </a:lnSpc>
-              <a:spcBef>
-                <a:spcPts val="0"/>
-              </a:spcBef>
-              <a:spcAft>
-                <a:spcPts val="0"/>
-              </a:spcAft>
-              <a:buClr>
-                <a:srgbClr val="C2D076"/>
-              </a:buClr>
-              <a:buSzPts val="5600"/>
-              <a:buFont typeface="Inter Medium"/>
-              <a:buNone/>
-            </a:pPr>
-            <a:r>
-              <a:rPr i="0" lang="ru-RU" sz="4712" u="none" cap="none" strike="noStrike">
-                <a:solidFill>
-                  <a:srgbClr val="C2D076"/>
-                </a:solidFill>
-                <a:latin typeface="Inter Medium"/>
-                <a:ea typeface="Inter Medium"/>
-                <a:cs typeface="Inter Medium"/>
-                <a:sym typeface="Inter Medium"/>
-              </a:rPr>
-              <a:t>Три открытые модели с лицензией Apache 2.0</a:t>
-            </a:r>
-            <a:endParaRPr>
-              <a:latin typeface="Inter Medium"/>
-              <a:ea typeface="Inter Medium"/>
-              <a:cs typeface="Inter Medium"/>
-              <a:sym typeface="Inter Medium"/>
-            </a:endParaRPr>
-          </a:p>
-        </p:txBody>
-      </p:sp>
-      <p:sp>
-        <p:nvSpPr>
-          <p:cNvPr id="43" name="Conclusion bar 43"/>
-          <p:cNvSpPr/>
-          <p:nvPr/>
-        </p:nvSpPr>
-        <p:spPr>
-          <a:xfrm>
-            <a:off x="1024128" y="3990375"/>
-            <a:ext cx="61722" cy="366654"/>
-          </a:xfrm>
-          <a:prstGeom prst="rect">
-            <a:avLst/>
-          </a:prstGeom>
-          <a:solidFill>
-            <a:srgbClr val="C2D076"/>
-          </a:solidFill>
-          <a:ln>
-            <a:noFill/>
-          </a:ln>
-        </p:spPr>
-      </p:sp>
-      <p:sp>
-        <p:nvSpPr>
-          <p:cNvPr id="44" name="Conclusion 44"/>
-          <p:cNvSpPr txBox="1"/>
-          <p:nvPr/>
-        </p:nvSpPr>
-        <p:spPr>
-          <a:xfrm>
-            <a:off x="1370228" y="3947718"/>
-            <a:ext cx="14269669" cy="451968"/>
-          </a:xfrm>
-          <a:prstGeom prst="rect">
-            <a:avLst/>
-          </a:prstGeom>
-          <a:noFill/>
-        </p:spPr>
-        <p:txBody>
-          <a:bodyPr wrap="square" lIns="0" tIns="0" rIns="0" bIns="0" anchor="t" rtlCol="0">
-            <a:noAutofit/>
-          </a:bodyPr>
-          <a:lstStyle/>
-          <a:p>
-            <a:pPr algn="l" marL="0" indent="0">
-              <a:lnSpc>
-                <a:spcPct val="100000"/>
-              </a:lnSpc>
-              <a:buNone/>
-            </a:pPr>
-            <a:r>
-              <a:rPr lang="ru-RU" sz="2799" b="1" cap="none" spc="0" baseline="0" dirty="0">
-                <a:solidFill>
-                  <a:srgbClr val="C2D076"/>
-                </a:solidFill>
-                <a:latin typeface="Inter Light"/>
-                <a:cs typeface="Inter Light"/>
-              </a:rPr>
-              <a:t>Все модели поддерживают масштаб до </a:t>
-            </a:r>
-            <a:r>
-              <a:rPr lang="ru-RU" sz="2799" b="1" cap="none" spc="0" baseline="0" dirty="0">
-                <a:solidFill>
-                  <a:srgbClr val="C2D076"/>
-                </a:solidFill>
-                <a:latin typeface="Inter Light"/>
-                <a:cs typeface="Inter Light"/>
-              </a:rPr>
-              <a:t>35 </a:t>
-            </a:r>
-            <a:r>
-              <a:rPr lang="ru-RU" sz="2799" b="1" cap="none" spc="0" baseline="0" dirty="0">
-                <a:solidFill>
-                  <a:srgbClr val="C2D076"/>
-                </a:solidFill>
-                <a:latin typeface="Inter Light"/>
-                <a:cs typeface="Inter Light"/>
-              </a:rPr>
-              <a:t>миллиардов параметров</a:t>
-            </a:r>
-            <a:endParaRPr lang="ru-RU" sz="2799"/>
-          </a:p>
-        </p:txBody>
-      </p:sp>
-      <p:sp>
-        <p:nvSpPr>
-          <p:cNvPr id="45" name="Card 45"/>
-          <p:cNvSpPr/>
-          <p:nvPr/>
-        </p:nvSpPr>
-        <p:spPr>
-          <a:xfrm>
-            <a:off x="1024128" y="4770018"/>
-            <a:ext cx="5120640" cy="3902385"/>
-          </a:xfrm>
-          <a:prstGeom prst="roundRect">
-            <a:avLst>
-              <a:gd name="adj" fmla="val 2811"/>
-            </a:avLst>
-          </a:prstGeom>
-          <a:solidFill>
-            <a:srgbClr val="000000"/>
-          </a:solidFill>
-          <a:ln>
-            <a:noFill/>
-          </a:ln>
-        </p:spPr>
-      </p:sp>
-      <p:sp>
-        <p:nvSpPr>
-          <p:cNvPr id="46" name="Rule 46"/>
-          <p:cNvSpPr/>
-          <p:nvPr/>
-        </p:nvSpPr>
-        <p:spPr>
-          <a:xfrm>
-            <a:off x="1382572" y="5128462"/>
-            <a:ext cx="720090" cy="38100"/>
-          </a:xfrm>
-          <a:prstGeom prst="rect">
-            <a:avLst/>
-          </a:prstGeom>
-          <a:solidFill>
-            <a:srgbClr val="C2D076"/>
-          </a:solidFill>
-          <a:ln>
-            <a:noFill/>
-          </a:ln>
-        </p:spPr>
-      </p:sp>
-      <p:sp>
-        <p:nvSpPr>
-          <p:cNvPr id="47" name="Column title 47"/>
-          <p:cNvSpPr txBox="1"/>
-          <p:nvPr/>
-        </p:nvSpPr>
-        <p:spPr>
-          <a:xfrm>
-            <a:off x="1382572" y="5351728"/>
-            <a:ext cx="4403752" cy="1461618"/>
-          </a:xfrm>
-          <a:prstGeom prst="rect">
-            <a:avLst/>
-          </a:prstGeom>
-          <a:noFill/>
-        </p:spPr>
-        <p:txBody>
-          <a:bodyPr wrap="square" lIns="0" tIns="0" rIns="0" bIns="0" anchor="t" rtlCol="0">
-            <a:noAutofit/>
-          </a:bodyPr>
-          <a:lstStyle/>
-          <a:p>
-            <a:pPr algn="l" marL="0" indent="0">
-              <a:lnSpc>
-                <a:spcPct val="100000"/>
-              </a:lnSpc>
-              <a:buNone/>
-            </a:pPr>
-            <a:r>
-              <a:rPr lang="ru-RU" sz="4712" b="0" cap="none" spc="0" baseline="0" dirty="0">
-                <a:solidFill>
-                  <a:srgbClr val="C2D076"/>
-                </a:solidFill>
-                <a:latin typeface="Inter Light"/>
-                <a:cs typeface="Inter Light"/>
-              </a:rPr>
-              <a:t>Qwen3.8-⁠27B</a:t>
-            </a:r>
-            <a:endParaRPr lang="ru-RU" sz="4712"/>
-          </a:p>
-        </p:txBody>
-      </p:sp>
-      <p:sp>
-        <p:nvSpPr>
-          <p:cNvPr id="48" name="Column 48"/>
-          <p:cNvSpPr txBox="1"/>
-          <p:nvPr/>
-        </p:nvSpPr>
-        <p:spPr>
-          <a:xfrm>
-            <a:off x="1382572" y="7008856"/>
-            <a:ext cx="4403752" cy="1305103"/>
-          </a:xfrm>
-          <a:prstGeom prst="rect">
-            <a:avLst/>
-          </a:prstGeom>
-          <a:noFill/>
-        </p:spPr>
-        <p:txBody>
-          <a:bodyPr wrap="square" lIns="0" tIns="0" rIns="0" bIns="0" anchor="t" rtlCol="0">
-            <a:noAutofit/>
-          </a:bodyPr>
-          <a:lstStyle/>
-          <a:p>
-            <a:pPr algn="l" marL="391020" indent="-391020">
-              <a:lnSpc>
-                <a:spcPct val="100000"/>
-              </a:lnSpc>
-              <a:buClr>
-                <a:srgbClr val="C2D076"/>
-              </a:buClr>
-              <a:buFont typeface="Arial"/>
-              <a:buChar char="•"/>
-            </a:pPr>
-            <a:r>
-              <a:rPr lang="ru-RU" sz="2799" b="0" cap="none" spc="0" baseline="0" dirty="0">
-                <a:solidFill>
-                  <a:srgbClr val="FFFFFF"/>
-                </a:solidFill>
-                <a:latin typeface="Inter Light"/>
-                <a:cs typeface="Inter Light"/>
-              </a:rPr>
-              <a:t>Основная модель, инференс VK, конфиг готов</a:t>
-            </a:r>
-            <a:endParaRPr lang="ru-RU" sz="2799"/>
-          </a:p>
-        </p:txBody>
-      </p:sp>
-      <p:sp>
-        <p:nvSpPr>
-          <p:cNvPr id="49" name="Card 49"/>
-          <p:cNvSpPr/>
-          <p:nvPr/>
-        </p:nvSpPr>
-        <p:spPr>
-          <a:xfrm>
-            <a:off x="6583680" y="4770018"/>
-            <a:ext cx="5120640" cy="3902385"/>
-          </a:xfrm>
-          <a:prstGeom prst="roundRect">
-            <a:avLst>
-              <a:gd name="adj" fmla="val 2811"/>
-            </a:avLst>
-          </a:prstGeom>
-          <a:solidFill>
-            <a:srgbClr val="000000"/>
-          </a:solidFill>
-          <a:ln>
-            <a:noFill/>
-          </a:ln>
-        </p:spPr>
-      </p:sp>
-      <p:sp>
-        <p:nvSpPr>
-          <p:cNvPr id="50" name="Rule 50"/>
-          <p:cNvSpPr/>
-          <p:nvPr/>
-        </p:nvSpPr>
-        <p:spPr>
-          <a:xfrm>
-            <a:off x="6942124" y="5128462"/>
-            <a:ext cx="720090" cy="38100"/>
-          </a:xfrm>
-          <a:prstGeom prst="rect">
-            <a:avLst/>
-          </a:prstGeom>
-          <a:solidFill>
-            <a:srgbClr val="C2D076"/>
-          </a:solidFill>
-          <a:ln>
-            <a:noFill/>
-          </a:ln>
-        </p:spPr>
-      </p:sp>
-      <p:sp>
-        <p:nvSpPr>
-          <p:cNvPr id="51" name="Column title 51"/>
-          <p:cNvSpPr txBox="1"/>
-          <p:nvPr/>
-        </p:nvSpPr>
-        <p:spPr>
-          <a:xfrm>
-            <a:off x="6942124" y="5351728"/>
-            <a:ext cx="4403752" cy="1461618"/>
-          </a:xfrm>
-          <a:prstGeom prst="rect">
-            <a:avLst/>
-          </a:prstGeom>
-          <a:noFill/>
-        </p:spPr>
-        <p:txBody>
-          <a:bodyPr wrap="square" lIns="0" tIns="0" rIns="0" bIns="0" anchor="t" rtlCol="0">
-            <a:noAutofit/>
-          </a:bodyPr>
-          <a:lstStyle/>
-          <a:p>
-            <a:pPr algn="l" marL="0" indent="0">
-              <a:lnSpc>
-                <a:spcPct val="100000"/>
-              </a:lnSpc>
-              <a:buNone/>
-            </a:pPr>
-            <a:r>
-              <a:rPr lang="ru-RU" sz="4712" b="0" cap="none" spc="0" baseline="0" dirty="0">
-                <a:solidFill>
-                  <a:srgbClr val="C2D076"/>
-                </a:solidFill>
-                <a:latin typeface="Inter Light"/>
-                <a:cs typeface="Inter Light"/>
-              </a:rPr>
-              <a:t>Qwen3-⁠32B</a:t>
-            </a:r>
-            <a:endParaRPr lang="ru-RU" sz="4712"/>
-          </a:p>
-        </p:txBody>
-      </p:sp>
-      <p:sp>
-        <p:nvSpPr>
-          <p:cNvPr id="52" name="Column 52"/>
-          <p:cNvSpPr txBox="1"/>
-          <p:nvPr/>
-        </p:nvSpPr>
-        <p:spPr>
-          <a:xfrm>
-            <a:off x="6942124" y="7008856"/>
-            <a:ext cx="4403752" cy="1305103"/>
-          </a:xfrm>
-          <a:prstGeom prst="rect">
-            <a:avLst/>
-          </a:prstGeom>
-          <a:noFill/>
-        </p:spPr>
-        <p:txBody>
-          <a:bodyPr wrap="square" lIns="0" tIns="0" rIns="0" bIns="0" anchor="t" rtlCol="0">
-            <a:noAutofit/>
-          </a:bodyPr>
-          <a:lstStyle/>
-          <a:p>
-            <a:pPr algn="l" marL="391020" indent="-391020">
-              <a:lnSpc>
-                <a:spcPct val="100000"/>
-              </a:lnSpc>
-              <a:buClr>
-                <a:srgbClr val="C2D076"/>
-              </a:buClr>
-              <a:buFont typeface="Arial"/>
-              <a:buChar char="•"/>
-            </a:pPr>
-            <a:r>
-              <a:rPr lang="ru-RU" sz="2799" b="0" cap="none" spc="0" baseline="0" dirty="0">
-                <a:solidFill>
-                  <a:srgbClr val="FFFFFF"/>
-                </a:solidFill>
-                <a:latin typeface="Inter Light"/>
-                <a:cs typeface="Inter Light"/>
-              </a:rPr>
-              <a:t>Запасное звено на Cloud.ru</a:t>
-            </a:r>
-            <a:endParaRPr lang="ru-RU" sz="2799"/>
-          </a:p>
-        </p:txBody>
-      </p:sp>
-      <p:sp>
-        <p:nvSpPr>
-          <p:cNvPr id="53" name="Card 53"/>
-          <p:cNvSpPr/>
-          <p:nvPr/>
-        </p:nvSpPr>
-        <p:spPr>
-          <a:xfrm>
-            <a:off x="12143232" y="4770018"/>
-            <a:ext cx="5120640" cy="3902385"/>
-          </a:xfrm>
-          <a:prstGeom prst="roundRect">
-            <a:avLst>
-              <a:gd name="adj" fmla="val 2811"/>
-            </a:avLst>
-          </a:prstGeom>
-          <a:solidFill>
-            <a:srgbClr val="000000"/>
-          </a:solidFill>
-          <a:ln>
-            <a:noFill/>
-          </a:ln>
-        </p:spPr>
-      </p:sp>
-      <p:sp>
-        <p:nvSpPr>
-          <p:cNvPr id="54" name="Rule 54"/>
-          <p:cNvSpPr/>
-          <p:nvPr/>
-        </p:nvSpPr>
-        <p:spPr>
-          <a:xfrm>
-            <a:off x="12501676" y="5128462"/>
-            <a:ext cx="720090" cy="38100"/>
-          </a:xfrm>
-          <a:prstGeom prst="rect">
-            <a:avLst/>
-          </a:prstGeom>
-          <a:solidFill>
-            <a:srgbClr val="C2D076"/>
-          </a:solidFill>
-          <a:ln>
-            <a:noFill/>
-          </a:ln>
-        </p:spPr>
-      </p:sp>
-      <p:sp>
-        <p:nvSpPr>
-          <p:cNvPr id="55" name="Column title 55"/>
-          <p:cNvSpPr txBox="1"/>
-          <p:nvPr/>
-        </p:nvSpPr>
-        <p:spPr>
-          <a:xfrm>
-            <a:off x="12501676" y="5351728"/>
-            <a:ext cx="4403752" cy="1461618"/>
-          </a:xfrm>
-          <a:prstGeom prst="rect">
-            <a:avLst/>
-          </a:prstGeom>
-          <a:noFill/>
-        </p:spPr>
-        <p:txBody>
-          <a:bodyPr wrap="square" lIns="0" tIns="0" rIns="0" bIns="0" anchor="t" rtlCol="0">
-            <a:noAutofit/>
-          </a:bodyPr>
-          <a:lstStyle/>
-          <a:p>
-            <a:pPr algn="l" marL="0" indent="0">
-              <a:lnSpc>
-                <a:spcPct val="100000"/>
-              </a:lnSpc>
-              <a:buNone/>
-            </a:pPr>
-            <a:r>
-              <a:rPr lang="ru-RU" sz="4712" b="0" cap="none" spc="0" baseline="0" dirty="0">
-                <a:solidFill>
-                  <a:srgbClr val="C2D076"/>
-                </a:solidFill>
-                <a:latin typeface="Inter Light"/>
-                <a:cs typeface="Inter Light"/>
-              </a:rPr>
-              <a:t>Gemma 4 и Qwen3-⁠VL</a:t>
-            </a:r>
-            <a:endParaRPr lang="ru-RU" sz="4712"/>
-          </a:p>
-        </p:txBody>
-      </p:sp>
-      <p:sp>
-        <p:nvSpPr>
-          <p:cNvPr id="56" name="Column 56"/>
-          <p:cNvSpPr txBox="1"/>
-          <p:nvPr/>
-        </p:nvSpPr>
-        <p:spPr>
-          <a:xfrm>
-            <a:off x="12501676" y="7008856"/>
-            <a:ext cx="4403752" cy="1305103"/>
-          </a:xfrm>
-          <a:prstGeom prst="rect">
-            <a:avLst/>
-          </a:prstGeom>
-          <a:noFill/>
-        </p:spPr>
-        <p:txBody>
-          <a:bodyPr wrap="square" lIns="0" tIns="0" rIns="0" bIns="0" anchor="t" rtlCol="0">
-            <a:noAutofit/>
-          </a:bodyPr>
-          <a:lstStyle/>
-          <a:p>
-            <a:pPr algn="l" marL="391020" indent="-391020">
-              <a:lnSpc>
-                <a:spcPct val="100000"/>
-              </a:lnSpc>
-              <a:buClr>
-                <a:srgbClr val="C2D076"/>
-              </a:buClr>
-              <a:buFont typeface="Arial"/>
-              <a:buChar char="•"/>
-            </a:pPr>
-            <a:r>
-              <a:rPr lang="ru-RU" sz="2799" b="0" cap="none" spc="0" baseline="0" dirty="0">
-                <a:solidFill>
-                  <a:srgbClr val="FFFFFF"/>
-                </a:solidFill>
-                <a:latin typeface="Inter Light"/>
-                <a:cs typeface="Inter Light"/>
-              </a:rPr>
-              <a:t>Два запасных звена цепочки</a:t>
-            </a:r>
-            <a:endParaRPr lang="ru-RU" sz="2799"/>
-          </a:p>
-        </p:txBody>
-      </p:sp>
     </p:spTree>
   </p:cSld>
   <p:clrMapOvr>

--- a/examples/outputs/video/dark-minimalist/compact/deck.pptx
+++ b/examples/outputs/video/dark-minimalist/compact/deck.pptx
@@ -18,6 +18,7 @@
     <p:sldId id="284" r:id="rId46"/>
     <p:sldId id="285" r:id="rId47"/>
     <p:sldId id="286" r:id="rId48"/>
+    <p:sldId id="287" r:id="rId49"/>
   </p:sldIdLst>
   <p:sldSz cy="10287000" cx="18288000"/>
   <p:notesSz cx="6858000" cy="9144000"/>
@@ -321,7 +322,7 @@
               <c:strCache>
                 <c:ptCount val="1"/>
                 <c:pt idx="0">
-                  <c:v>Состав</c:v>
+                  <c:v>Доля фигур</c:v>
                 </c:pt>
               </c:strCache>
             </c:strRef>
@@ -541,9 +542,9 @@
           <c:xMode val="edge"/>
           <c:yMode val="edge"/>
           <c:x val="0.1588"/>
-          <c:y val="0.0159"/>
+          <c:y val="0.0153"/>
           <c:w val="0.7875"/>
-          <c:h val="0.9682"/>
+          <c:h val="0.9694"/>
         </c:manualLayout>
       </c:layout>
       <c:barChart>
@@ -1572,12 +1573,12 @@
           <a:p>
             <a:r>
               <a:rPr lang="ru-RU"/>
-              <a:t>ИИ пока не способен воспроизводить фирменный стиль, а шаблоны не дают понятной инструкции для новых слайдов.</a:t>
+              <a:t>Verstka — цифровой дизайнер презентаций. Команда «Рекрут 2», задача № 4 VK Tech.</a:t>
             </a:r>
           </a:p>
           <a:p>
             <a:r>
-              <a:t>[verstka:sl2]</a:t>
+              <a:t>[verstka:sl1]</a:t>
             </a:r>
           </a:p>
         </p:txBody>
@@ -1636,12 +1637,12 @@
           <a:p>
             <a:r>
               <a:rPr lang="ru-RU"/>
-              <a:t>В реальных шаблонах 95% фигур — свободные, поэтому правила оформления приходится выводить из самих слайдов-образцов, включая палитру, кегли, сетку, поля, логотипы и колонтитулы.</a:t>
+              <a:t>ИИ может помочь с текстом, но не с дизайном.</a:t>
             </a:r>
           </a:p>
           <a:p>
             <a:r>
-              <a:t>[verstka:sl3]</a:t>
+              <a:t>[verstka:sl2]</a:t>
             </a:r>
           </a:p>
         </p:txBody>
@@ -1700,12 +1701,12 @@
           <a:p>
             <a:r>
               <a:rPr lang="ru-RU"/>
-              <a:t>Verstka использует шаблон как набор правил, а не макетов, чтобы автоматически создать три редактируемые презентации на основе текста.</a:t>
+              <a:t>В реальных шаблонах 95% фигур — свободные, и только 5% — плейсхолдеры. Это означает, что правила оформления нельзя просто применить, их нужно выводить из самих слайдов-образцов, включая палитру, кегли, сетку, поля, логотипы и колонтитулы.</a:t>
             </a:r>
           </a:p>
           <a:p>
             <a:r>
-              <a:t>[verstka:sl4]</a:t>
+              <a:t>[verstka:sl3]</a:t>
             </a:r>
           </a:p>
         </p:txBody>
@@ -1764,12 +1765,12 @@
           <a:p>
             <a:r>
               <a:rPr lang="ru-RU"/>
-              <a:t>Агент работает на открытых моделях до 35 миллиардов параметров с лицензией Apache 2.0. Процесс включает анализ текста, проектирование, проверку и вёрстку слайдов.</a:t>
+              <a:t>Verstka автоматически создаёт три редактируемые презентации на основе шаблона и текста, сохраняя фирменный стиль без необходимости ручной вёрстки.</a:t>
             </a:r>
           </a:p>
           <a:p>
             <a:r>
-              <a:t>[verstka:sl5]</a:t>
+              <a:t>[verstka:sl4]</a:t>
             </a:r>
           </a:p>
         </p:txBody>
@@ -1828,12 +1829,12 @@
           <a:p>
             <a:r>
               <a:rPr lang="ru-RU"/>
-              <a:t>Содержание одно, подача разная. | Вариант | Подача | Когда подходит |. |---|---|---|. | Структурный | одна мысль на слайд, строгая сетка | отчёт и защита проекта |. | Визуальный | крупные цифры и наглядные схемы | питч и выступление со сцены |. | Компактный | вывод первой строкой, данные справа | рассылка руководителю |.</a:t>
+              <a:t>Агент работает на открытых моделях до 35 миллиардов параметров с лицензией Apache 2.0. Пять шагов: аналитик находит в тексте слайды, ряды данных и просьбы; дизайнер продумывает каждый слайд отдельно; критик сверяет план с текстом и правилами шаблона; компилятор проверяет каждое число; вёрстка собирает слайды по дизайн-системе шаблона.</a:t>
             </a:r>
           </a:p>
           <a:p>
             <a:r>
-              <a:t>[verstka:sl6]</a:t>
+              <a:t>[verstka:sl5]</a:t>
             </a:r>
           </a:p>
         </p:txBody>
@@ -1892,12 +1893,12 @@
           <a:p>
             <a:r>
               <a:rPr lang="ru-RU"/>
-              <a:t>Каждый слайд проходит 41 проверку: 12 на целостность, 11 на вёрстку, 7 на шаблон, 6 на контент и 5 на плотность. Найденные проблемы помечаются на слайде и исправляются автоматически.</a:t>
+              <a:t>Содержание одно, подача разная. | Вариант | Подача | Когда подходит |. |---|---|---|. | Структурный | одна мысль на слайд, строгая сетка | отчёт и защита проекта |. | Визуальный | крупные цифры и наглядные схемы | питч и выступление со сцены |. | Компактный | вывод первой строкой, данные справа | рассылка руководителю |.</a:t>
             </a:r>
           </a:p>
           <a:p>
             <a:r>
-              <a:t>[verstka:sl7]</a:t>
+              <a:t>[verstka:sl6]</a:t>
             </a:r>
           </a:p>
         </p:txBody>
@@ -1956,12 +1957,12 @@
           <a:p>
             <a:r>
               <a:rPr lang="ru-RU"/>
-              <a:t>Каждое число в презентации сверяется дважды: до вёрстки и после. Всего было подготовлено 9 демонстрационных презентаций без выдуманных чисел.</a:t>
+              <a:t>Каждый слайд проходит 41 проверку: 12 на целостность, 11 на вёрстку, 7 на шаблон, 6 на контент и 5 на плотность. Найденные проблемы исправляются автоматически.</a:t>
             </a:r>
           </a:p>
           <a:p>
             <a:r>
-              <a:t>[verstka:sl8]</a:t>
+              <a:t>[verstka:sl7]</a:t>
             </a:r>
           </a:p>
         </p:txBody>
@@ -2020,12 +2021,12 @@
           <a:p>
             <a:r>
               <a:rPr lang="ru-RU"/>
-              <a:t>Сервис поддерживает 12 форматов файлов, включая pptx, potx, ppt, odp, thmx и другие. Он проверяет качество презентаций по 87 чужим шаблонам, средняя оценка качества — 99 из 100.</a:t>
+              <a:t>В итоге не было выдумано ни одного числа.</a:t>
             </a:r>
           </a:p>
           <a:p>
             <a:r>
-              <a:t>[verstka:sl9]</a:t>
+              <a:t>[verstka:sl8]</a:t>
             </a:r>
           </a:p>
         </p:txBody>
@@ -2084,12 +2085,12 @@
           <a:p>
             <a:r>
               <a:rPr lang="ru-RU"/>
-              <a:t>Время генерации трёх вариантов на шаблонах датасета: VK Tech — 113 секунд, VK Education — 145 секунд, VK WorkSpace — 175 секунд. Все значения значительно ниже установленного лимита в 5 минут.</a:t>
+              <a:t>Сервис поддерживает 12 форматов, включая pptx, potx, ppt, odp, thmx и другие.</a:t>
             </a:r>
           </a:p>
           <a:p>
             <a:r>
-              <a:t>[verstka:sl10]</a:t>
+              <a:t>[verstka:sl9]</a:t>
             </a:r>
           </a:p>
         </p:txBody>
@@ -2148,9 +2149,67 @@
           <a:p>
             <a:r>
               <a:rPr lang="ru-RU"/>
-              <a:t>После финала компания планирует три ключевых шага: переход на более мощные технологии инференса, внедрение генерации изображений в слайдах и запуск пилота на шаблонах и сценариях VK Tech.</a:t>
+              <a:t>Время генерации всех шаблонов меньше 5 минут.</a:t>
             </a:r>
           </a:p>
+          <a:p>
+            <a:r>
+              <a:t>[verstka:sl10]</a:t>
+            </a:r>
+          </a:p>
+        </p:txBody>
+      </p:sp>
+    </p:spTree>
+  </p:cSld>
+  <p:clrMapOvr>
+    <a:masterClrMapping/>
+  </p:clrMapOvr>
+</p:notes>
+</file>
+
+<file path=ppt/notesSlides/notesSlide32.xml><?xml version="1.0" encoding="utf-8"?>
+<p:notes xmlns:a="http://schemas.openxmlformats.org/drawingml/2006/main" xmlns:p="http://schemas.openxmlformats.org/presentationml/2006/main" xmlns:r="http://schemas.openxmlformats.org/officeDocument/2006/relationships">
+  <p:cSld>
+    <p:spTree>
+      <p:nvGrpSpPr>
+        <p:cNvPr id="1" name=""/>
+        <p:cNvGrpSpPr/>
+        <p:nvPr/>
+      </p:nvGrpSpPr>
+      <p:grpSpPr>
+        <a:xfrm>
+          <a:off x="0" y="0"/>
+          <a:ext cx="0" cy="0"/>
+          <a:chOff x="0" y="0"/>
+          <a:chExt cx="0" cy="0"/>
+        </a:xfrm>
+      </p:grpSpPr>
+      <p:sp>
+        <p:nvSpPr>
+          <p:cNvPr id="2" name="Slide Image Placeholder 1"/>
+          <p:cNvSpPr>
+            <a:spLocks noGrp="1"/>
+          </p:cNvSpPr>
+          <p:nvPr>
+            <p:ph type="sldImg" idx="2"/>
+          </p:nvPr>
+        </p:nvSpPr>
+        <p:spPr/>
+      </p:sp>
+      <p:sp>
+        <p:nvSpPr>
+          <p:cNvPr id="3" name="Notes Placeholder 2"/>
+          <p:cNvSpPr>
+            <a:spLocks noGrp="1"/>
+          </p:cNvSpPr>
+          <p:nvPr>
+            <p:ph type="body" idx="1"/>
+          </p:nvPr>
+        </p:nvSpPr>
+        <p:spPr/>
+        <p:txBody>
+          <a:bodyPr/>
+          <a:lstStyle/>
           <a:p>
             <a:r>
               <a:t>[verstka:sl11]</a:t>
@@ -4474,6 +4533,220 @@
         <p:nvPr/>
       </p:nvGrpSpPr>
       <p:grpSpPr/>
+      <p:cxnSp>
+        <p:nvCxnSpPr>
+          <p:cNvPr id="25" name="Google Shape;25;p6"/>
+          <p:cNvCxnSpPr/>
+          <p:nvPr/>
+        </p:nvCxnSpPr>
+        <p:spPr>
+          <a:xfrm>
+            <a:off x="1028700" y="9258300"/>
+            <a:ext cx="16230600" cy="0"/>
+          </a:xfrm>
+          <a:prstGeom prst="straightConnector1">
+            <a:avLst/>
+          </a:prstGeom>
+          <a:noFill/>
+          <a:ln cap="flat" cmpd="sng" w="38100">
+            <a:solidFill>
+              <a:srgbClr val="C2D076"/>
+            </a:solidFill>
+            <a:prstDash val="solid"/>
+            <a:round/>
+            <a:headEnd len="sm" w="sm" type="none"/>
+            <a:tailEnd len="sm" w="sm" type="none"/>
+          </a:ln>
+        </p:spPr>
+      </p:cxnSp>
+      <p:sp>
+        <p:nvSpPr>
+          <p:cNvPr id="26" name="Google Shape;26;p6"/>
+          <p:cNvSpPr txBox="1"/>
+          <p:nvPr/>
+        </p:nvSpPr>
+        <p:spPr>
+          <a:xfrm>
+            <a:off x="1028700" y="4650572"/>
+            <a:ext cx="10740300" cy="3001517"/>
+          </a:xfrm>
+          <a:prstGeom prst="rect">
+            <a:avLst/>
+          </a:prstGeom>
+          <a:noFill/>
+          <a:ln>
+            <a:noFill/>
+          </a:ln>
+        </p:spPr>
+        <p:txBody>
+          <a:bodyPr anchorCtr="0" anchor="t" bIns="0" lIns="0" spcFirstLastPara="1" rIns="0" wrap="square" tIns="0">
+            <a:noAutofit/>
+          </a:bodyPr>
+          <a:lstStyle/>
+          <a:p>
+            <a:pPr indent="0" lvl="0" marL="0" marR="0" rtl="0" algn="l">
+              <a:lnSpc>
+                <a:spcPct val="80000"/>
+              </a:lnSpc>
+              <a:spcBef>
+                <a:spcPts val="0"/>
+              </a:spcBef>
+              <a:spcAft>
+                <a:spcPts val="0"/>
+              </a:spcAft>
+              <a:buNone/>
+            </a:pPr>
+            <a:r>
+              <a:rPr i="0" lang="en-US" sz="7800" u="none" cap="none" strike="noStrike" b="0">
+                <a:solidFill>
+                  <a:srgbClr val="C2D076"/>
+                </a:solidFill>
+                <a:latin typeface="Inter Medium"/>
+                <a:ea typeface="Inter Medium"/>
+                <a:cs typeface="Inter Medium"/>
+                <a:sym typeface="Inter Medium"/>
+              </a:rPr>
+              <a:t>Verstka —</a:t>
+            </a:r>
+            <a:br>
+              <a:rPr i="0" lang="en-US" sz="7800" u="none" cap="none" strike="noStrike" b="0">
+                <a:solidFill>
+                  <a:srgbClr val="C2D076"/>
+                </a:solidFill>
+                <a:latin typeface="Inter Medium"/>
+                <a:ea typeface="Inter Medium"/>
+                <a:cs typeface="Inter Medium"/>
+                <a:sym typeface="Inter Medium"/>
+              </a:rPr>
+            </a:br>
+            <a:r>
+              <a:rPr i="0" lang="ru-RU" sz="7800" u="none" cap="none" strike="noStrike" b="0">
+                <a:solidFill>
+                  <a:srgbClr val="C2D076"/>
+                </a:solidFill>
+                <a:latin typeface="Inter Medium"/>
+                <a:ea typeface="Inter Medium"/>
+                <a:cs typeface="Inter Medium"/>
+                <a:sym typeface="Inter Medium"/>
+              </a:rPr>
+              <a:t>цифровой дизайнер</a:t>
+            </a:r>
+            <a:br>
+              <a:rPr i="0" lang="en-US" sz="7800" u="none" cap="none" strike="noStrike" b="0">
+                <a:solidFill>
+                  <a:srgbClr val="C2D076"/>
+                </a:solidFill>
+                <a:latin typeface="Inter Medium"/>
+                <a:ea typeface="Inter Medium"/>
+                <a:cs typeface="Inter Medium"/>
+                <a:sym typeface="Inter Medium"/>
+              </a:rPr>
+            </a:br>
+            <a:r>
+              <a:rPr i="0" lang="ru-RU" sz="7800" u="none" cap="none" strike="noStrike" b="0">
+                <a:solidFill>
+                  <a:srgbClr val="C2D076"/>
+                </a:solidFill>
+                <a:latin typeface="Inter Medium"/>
+                <a:ea typeface="Inter Medium"/>
+                <a:cs typeface="Inter Medium"/>
+                <a:sym typeface="Inter Medium"/>
+              </a:rPr>
+              <a:t>презентаций</a:t>
+            </a:r>
+            <a:endParaRPr b="0">
+              <a:latin typeface="Inter Medium"/>
+              <a:ea typeface="Inter Medium"/>
+              <a:cs typeface="Inter Medium"/>
+              <a:sym typeface="Inter Medium"/>
+            </a:endParaRPr>
+          </a:p>
+        </p:txBody>
+      </p:sp>
+      <p:sp>
+        <p:nvSpPr>
+          <p:cNvPr id="30" name="Подзаголовок"/>
+          <p:cNvSpPr txBox="1"/>
+          <p:nvPr/>
+        </p:nvSpPr>
+        <p:spPr>
+          <a:xfrm>
+            <a:off x="1028700" y="8097859"/>
+            <a:ext cx="10740300" cy="404945"/>
+          </a:xfrm>
+          <a:prstGeom prst="rect">
+            <a:avLst/>
+          </a:prstGeom>
+          <a:noFill/>
+          <a:ln>
+            <a:noFill/>
+          </a:ln>
+        </p:spPr>
+        <p:txBody>
+          <a:bodyPr anchorCtr="0" anchor="t" bIns="0" lIns="0" spcFirstLastPara="1" rIns="0" wrap="square" tIns="0">
+            <a:noAutofit/>
+          </a:bodyPr>
+          <a:lstStyle/>
+          <a:p>
+            <a:pPr indent="0" lvl="0" marL="0" marR="0" rtl="0" algn="l">
+              <a:lnSpc>
+                <a:spcPct val="100000"/>
+              </a:lnSpc>
+              <a:spcBef>
+                <a:spcPts val="0"/>
+              </a:spcBef>
+              <a:spcAft>
+                <a:spcPts val="0"/>
+              </a:spcAft>
+              <a:buNone/>
+            </a:pPr>
+            <a:r>
+              <a:rPr i="0" lang="ru-RU" sz="2199" u="none" cap="none" strike="noStrike" b="0" spc="0">
+                <a:solidFill>
+                  <a:srgbClr val="C2D076"/>
+                </a:solidFill>
+                <a:latin typeface="Inter Medium"/>
+                <a:ea typeface="Inter Medium"/>
+                <a:sym typeface="Inter Medium"/>
+              </a:rPr>
+              <a:t>Команда «Рекрут 2» · задача № 4 VK Tech · ЛЦТ 2026</a:t>
+            </a:r>
+            <a:endParaRPr b="0" cap="none" spc="0">
+              <a:solidFill>
+                <a:srgbClr val="C2D076"/>
+              </a:solidFill>
+              <a:latin typeface="Inter Medium"/>
+              <a:ea typeface="Inter Medium"/>
+              <a:sym typeface="Inter Medium"/>
+            </a:endParaRPr>
+          </a:p>
+        </p:txBody>
+      </p:sp>
+    </p:spTree>
+  </p:cSld>
+  <p:clrMapOvr>
+    <a:masterClrMapping/>
+  </p:clrMapOvr>
+</p:sld>
+</file>
+
+<file path=ppt/slides/slide10.xml><?xml version="1.0" encoding="utf-8"?>
+<p:sld xmlns:a="http://schemas.openxmlformats.org/drawingml/2006/main" xmlns:p="http://schemas.openxmlformats.org/presentationml/2006/main" xmlns:r="http://schemas.openxmlformats.org/officeDocument/2006/relationships">
+  <p:cSld>
+    <p:bg>
+      <p:bgPr>
+        <a:solidFill>
+          <a:srgbClr val="001514"/>
+        </a:solidFill>
+      </p:bgPr>
+    </p:bg>
+    <p:spTree>
+      <p:nvGrpSpPr>
+        <p:cNvPr id="1" name=""/>
+        <p:cNvGrpSpPr/>
+        <p:nvPr/>
+      </p:nvGrpSpPr>
+      <p:grpSpPr/>
       <p:sp>
         <p:nvSpPr>
           <p:cNvPr id="42" name="Google Shape;42;p8"/>
@@ -4483,7 +4756,7 @@
         <p:spPr>
           <a:xfrm>
             <a:off x="619057" y="2623820"/>
-            <a:ext cx="9651876" cy="1527657"/>
+            <a:ext cx="15727680" cy="809548"/>
           </a:xfrm>
           <a:prstGeom prst="rect">
             <a:avLst/>
@@ -4517,7 +4790,7 @@
               <a:buNone/>
             </a:pPr>
             <a:r>
-              <a:rPr i="0" lang="ru-RU" sz="2799" u="none" cap="none" strike="noStrike">
+              <a:rPr i="0" lang="ru-RU" sz="4712" u="none" cap="none" strike="noStrike">
                 <a:solidFill>
                   <a:srgbClr val="C2D076"/>
                 </a:solidFill>
@@ -4526,7 +4799,7 @@
                 <a:cs typeface="Inter Medium"/>
                 <a:sym typeface="Inter Medium"/>
               </a:rPr>
-              <a:t>Вёрстка забирает больше времени, чем написание текста</a:t>
+              <a:t>VK WorkSpace — самый долгий, но всё в лимите</a:t>
             </a:r>
             <a:endParaRPr>
               <a:latin typeface="Inter Medium"/>
@@ -4539,36 +4812,14 @@
       </p:sp>
       <p:sp>
         <p:nvSpPr>
-          <p:cNvPr id="43" name="Conclusion bar 43"/>
-          <p:cNvSpPr/>
+          <p:cNvPr id="43" name="Chart note 43"/>
+          <p:cNvSpPr txBox="1"/>
           <p:nvPr/>
         </p:nvSpPr>
         <p:spPr>
           <a:xfrm>
-            <a:off x="1024128" y="4708484"/>
-            <a:ext cx="61722" cy="366654"/>
-          </a:xfrm>
-          <a:prstGeom prst="rect">
-            <a:avLst/>
-          </a:prstGeom>
-          <a:solidFill>
-            <a:srgbClr val="C2D076"/>
-          </a:solidFill>
-          <a:ln>
-            <a:noFill/>
-          </a:ln>
-        </p:spPr>
-      </p:sp>
-      <p:sp>
-        <p:nvSpPr>
-          <p:cNvPr id="44" name="Conclusion 44"/>
-          <p:cNvSpPr txBox="1"/>
-          <p:nvPr/>
-        </p:nvSpPr>
-        <p:spPr>
-          <a:xfrm>
-            <a:off x="1370228" y="4665827"/>
-            <a:ext cx="14269669" cy="451968"/>
+            <a:off x="1024128" y="3947718"/>
+            <a:ext cx="5521512" cy="878535"/>
           </a:xfrm>
           <a:prstGeom prst="rect">
             <a:avLst/>
@@ -4595,68 +4846,63 @@
                 <a:latin typeface="Inter Light"/>
                 <a:cs typeface="Inter Light"/>
               </a:rPr>
-              <a:t>Ручная вёрстка, ИИ и шаблоны — три проблемы, которые тормозят</a:t>
+              <a:t>Все шаблоны укладываются в лимит </a:t>
+            </a:r>
+            <a:r>
+              <a:rPr lang="ru-RU" sz="2799" b="1" cap="none" spc="0" baseline="0" dirty="0">
+                <a:solidFill>
+                  <a:srgbClr val="C2D076"/>
+                </a:solidFill>
+                <a:latin typeface="Inter Light"/>
+                <a:cs typeface="Inter Light"/>
+              </a:rPr>
+              <a:t>5 минут</a:t>
+            </a:r>
+            <a:r>
+              <a:rPr lang="ru-RU" sz="2799" b="1" cap="none" spc="0" baseline="0" dirty="0">
+                <a:solidFill>
+                  <a:srgbClr val="C2D076"/>
+                </a:solidFill>
+                <a:latin typeface="Inter Light"/>
+                <a:cs typeface="Inter Light"/>
+              </a:rPr>
+              <a:t> с запасом</a:t>
             </a:r>
             <a:endParaRPr lang="ru-RU" sz="2799"/>
           </a:p>
         </p:txBody>
       </p:sp>
-      <p:sp>
-        <p:nvSpPr>
-          <p:cNvPr id="45" name="Card 45"/>
-          <p:cNvSpPr/>
+      <p:cxnSp>
+        <p:nvCxnSpPr>
+          <p:cNvPr id="44" name="Line 44"/>
+          <p:cNvCxnSpPr/>
           <p:nvPr/>
-        </p:nvSpPr>
+        </p:nvCxnSpPr>
         <p:spPr>
           <a:xfrm>
-            <a:off x="1024128" y="5488127"/>
-            <a:ext cx="5120640" cy="3319302"/>
+            <a:off x="6984552" y="3947718"/>
+            <a:ext cx="0" cy="878535"/>
           </a:xfrm>
-          <a:prstGeom prst="roundRect">
-            <a:avLst>
-              <a:gd name="adj" fmla="val 3305"/>
-            </a:avLst>
+          <a:prstGeom prst="line">
+            <a:avLst/>
           </a:prstGeom>
-          <a:solidFill>
-            <a:srgbClr val="000000"/>
-          </a:solidFill>
-          <a:ln>
-            <a:noFill/>
+          <a:ln w="12700">
+            <a:solidFill>
+              <a:srgbClr val="384848"/>
+            </a:solidFill>
           </a:ln>
         </p:spPr>
-      </p:sp>
-      <p:sp>
-        <p:nvSpPr>
-          <p:cNvPr id="46" name="Rule 46"/>
-          <p:cNvSpPr/>
+      </p:cxnSp>
+      <p:sp>
+        <p:nvSpPr>
+          <p:cNvPr id="45" name="Unit 45"/>
+          <p:cNvSpPr txBox="1"/>
           <p:nvPr/>
         </p:nvSpPr>
         <p:spPr>
           <a:xfrm>
-            <a:off x="1382572" y="5846571"/>
-            <a:ext cx="720090" cy="38100"/>
-          </a:xfrm>
-          <a:prstGeom prst="rect">
-            <a:avLst/>
-          </a:prstGeom>
-          <a:solidFill>
-            <a:srgbClr val="C2D076"/>
-          </a:solidFill>
-          <a:ln>
-            <a:noFill/>
-          </a:ln>
-        </p:spPr>
-      </p:sp>
-      <p:sp>
-        <p:nvSpPr>
-          <p:cNvPr id="47" name="Column title 47"/>
-          <p:cNvSpPr txBox="1"/>
-          <p:nvPr/>
-        </p:nvSpPr>
-        <p:spPr>
-          <a:xfrm>
-            <a:off x="1382572" y="6069837"/>
-            <a:ext cx="4403752" cy="451968"/>
+            <a:off x="7423464" y="3947718"/>
+            <a:ext cx="9840408" cy="299720"/>
           </a:xfrm>
           <a:prstGeom prst="rect">
             <a:avLst/>
@@ -4676,7 +4922,523 @@
               <a:buNone/>
             </a:pPr>
             <a:r>
-              <a:rPr lang="ru-RU" sz="2799" b="0" cap="none" spc="0" baseline="0" dirty="0">
+              <a:rPr lang="ru-RU" sz="1800" b="0" cap="none" spc="0" baseline="0" dirty="0">
+                <a:solidFill>
+                  <a:srgbClr val="FFFFFF"/>
+                </a:solidFill>
+                <a:latin typeface="Inter Light"/>
+                <a:cs typeface="Inter Light"/>
+              </a:rPr>
+              <a:t>Время генерации трёх вариантов на шаблонах датасета, секунд</a:t>
+            </a:r>
+            <a:endParaRPr lang="ru-RU" sz="1800"/>
+          </a:p>
+        </p:txBody>
+      </p:sp>
+      <p:graphicFrame>
+        <p:nvGraphicFramePr>
+          <p:cNvPr id="46" name="Chart 45"/>
+          <p:cNvGraphicFramePr>
+            <a:graphicFrameLocks noGrp="1"/>
+          </p:cNvGraphicFramePr>
+          <p:nvPr/>
+        </p:nvGraphicFramePr>
+        <p:xfrm>
+          <a:off x="7423464" y="4340021"/>
+          <a:ext cx="9840408" cy="4483968"/>
+        </p:xfrm>
+        <a:graphic>
+          <a:graphicData uri="http://schemas.openxmlformats.org/drawingml/2006/chart">
+            <c:chart xmlns:c="http://schemas.openxmlformats.org/drawingml/2006/chart" r:id="rId2"/>
+          </a:graphicData>
+        </a:graphic>
+      </p:graphicFrame>
+    </p:spTree>
+  </p:cSld>
+  <p:clrMapOvr>
+    <a:masterClrMapping/>
+  </p:clrMapOvr>
+</p:sld>
+</file>
+
+<file path=ppt/slides/slide11.xml><?xml version="1.0" encoding="utf-8"?>
+<p:sld xmlns:a="http://schemas.openxmlformats.org/drawingml/2006/main" xmlns:p="http://schemas.openxmlformats.org/presentationml/2006/main" xmlns:r="http://schemas.openxmlformats.org/officeDocument/2006/relationships">
+  <p:cSld>
+    <p:bg>
+      <p:bgPr>
+        <a:solidFill>
+          <a:srgbClr val="001514"/>
+        </a:solidFill>
+      </p:bgPr>
+    </p:bg>
+    <p:spTree>
+      <p:nvGrpSpPr>
+        <p:cNvPr id="1" name=""/>
+        <p:cNvGrpSpPr/>
+        <p:nvPr/>
+      </p:nvGrpSpPr>
+      <p:grpSpPr/>
+      <p:sp>
+        <p:nvSpPr>
+          <p:cNvPr id="42" name="Google Shape;42;p8"/>
+          <p:cNvSpPr txBox="1"/>
+          <p:nvPr/>
+        </p:nvSpPr>
+        <p:spPr>
+          <a:xfrm>
+            <a:off x="619057" y="2623820"/>
+            <a:ext cx="15727680" cy="944880"/>
+          </a:xfrm>
+          <a:prstGeom prst="rect">
+            <a:avLst/>
+          </a:prstGeom>
+          <a:noFill/>
+          <a:ln>
+            <a:noFill/>
+          </a:ln>
+        </p:spPr>
+        <p:txBody>
+          <a:bodyPr anchorCtr="0" anchor="t" bIns="0" lIns="0" spcFirstLastPara="1" rIns="0" wrap="square" tIns="0">
+            <a:spAutoFit/>
+          </a:bodyPr>
+          <a:lstStyle/>
+          <a:p>
+            <a:pPr indent="0" lvl="1" marL="0" marR="0" rtl="0" algn="l">
+              <a:lnSpc>
+                <a:spcPct val="120000"/>
+              </a:lnSpc>
+              <a:spcBef>
+                <a:spcPts val="0"/>
+              </a:spcBef>
+              <a:spcAft>
+                <a:spcPts val="0"/>
+              </a:spcAft>
+              <a:buClr>
+                <a:srgbClr val="C2D076"/>
+              </a:buClr>
+              <a:buSzPts val="5600"/>
+              <a:buFont typeface="Inter Medium"/>
+              <a:buNone/>
+            </a:pPr>
+            <a:r>
+              <a:rPr i="0" lang="ru-RU" sz="4712" u="none" cap="none" strike="noStrike">
+                <a:solidFill>
+                  <a:srgbClr val="C2D076"/>
+                </a:solidFill>
+                <a:latin typeface="Inter Medium"/>
+                <a:ea typeface="Inter Medium"/>
+                <a:cs typeface="Inter Medium"/>
+                <a:sym typeface="Inter Medium"/>
+              </a:rPr>
+              <a:t>Три шага после финала</a:t>
+            </a:r>
+            <a:endParaRPr>
+              <a:latin typeface="Inter Medium"/>
+              <a:ea typeface="Inter Medium"/>
+              <a:cs typeface="Inter Medium"/>
+              <a:sym typeface="Inter Medium"/>
+            </a:endParaRPr>
+          </a:p>
+        </p:txBody>
+      </p:sp>
+      <p:sp>
+        <p:nvSpPr>
+          <p:cNvPr id="43" name="Marker 43"/>
+          <p:cNvSpPr/>
+          <p:nvPr/>
+        </p:nvSpPr>
+        <p:spPr>
+          <a:xfrm>
+            <a:off x="1024128" y="4383014"/>
+            <a:ext cx="227401" cy="227401"/>
+          </a:xfrm>
+          <a:prstGeom prst="ellipse">
+            <a:avLst/>
+          </a:prstGeom>
+          <a:solidFill>
+            <a:srgbClr val="C2D076"/>
+          </a:solidFill>
+          <a:ln>
+            <a:noFill/>
+          </a:ln>
+        </p:spPr>
+      </p:sp>
+      <p:sp>
+        <p:nvSpPr>
+          <p:cNvPr id="44" name="Item 44"/>
+          <p:cNvSpPr txBox="1"/>
+          <p:nvPr/>
+        </p:nvSpPr>
+        <p:spPr>
+          <a:xfrm>
+            <a:off x="1981606" y="4137660"/>
+            <a:ext cx="12034317" cy="1461618"/>
+          </a:xfrm>
+          <a:prstGeom prst="rect">
+            <a:avLst/>
+          </a:prstGeom>
+          <a:noFill/>
+        </p:spPr>
+        <p:txBody>
+          <a:bodyPr wrap="square" lIns="0" tIns="0" rIns="0" bIns="0" anchor="t" rtlCol="0">
+            <a:noAutofit/>
+          </a:bodyPr>
+          <a:lstStyle/>
+          <a:p>
+            <a:pPr algn="l" marL="0" indent="0">
+              <a:lnSpc>
+                <a:spcPct val="100000"/>
+              </a:lnSpc>
+              <a:buNone/>
+            </a:pPr>
+            <a:r>
+              <a:rPr lang="ru-RU" sz="4712" b="0" cap="none" spc="0" baseline="0" dirty="0">
+                <a:solidFill>
+                  <a:srgbClr val="FFFFFF"/>
+                </a:solidFill>
+                <a:latin typeface="Inter Light"/>
+                <a:cs typeface="Inter Light"/>
+              </a:rPr>
+              <a:t>Переход на инференс VK и модель Qwen3.8-⁠27B</a:t>
+            </a:r>
+            <a:endParaRPr lang="ru-RU" sz="4712"/>
+          </a:p>
+        </p:txBody>
+      </p:sp>
+      <p:cxnSp>
+        <p:nvCxnSpPr>
+          <p:cNvPr id="45" name="Line 45"/>
+          <p:cNvCxnSpPr/>
+          <p:nvPr/>
+        </p:nvCxnSpPr>
+        <p:spPr>
+          <a:xfrm>
+            <a:off x="1981606" y="6048095"/>
+            <a:ext cx="12034317" cy="0"/>
+          </a:xfrm>
+          <a:prstGeom prst="line">
+            <a:avLst/>
+          </a:prstGeom>
+          <a:ln w="9525">
+            <a:solidFill>
+              <a:srgbClr val="384848"/>
+            </a:solidFill>
+          </a:ln>
+        </p:spPr>
+      </p:cxnSp>
+      <p:sp>
+        <p:nvSpPr>
+          <p:cNvPr id="46" name="Marker 46"/>
+          <p:cNvSpPr/>
+          <p:nvPr/>
+        </p:nvSpPr>
+        <p:spPr>
+          <a:xfrm>
+            <a:off x="1024128" y="6742266"/>
+            <a:ext cx="227401" cy="227401"/>
+          </a:xfrm>
+          <a:prstGeom prst="ellipse">
+            <a:avLst/>
+          </a:prstGeom>
+          <a:solidFill>
+            <a:srgbClr val="C2D076"/>
+          </a:solidFill>
+          <a:ln>
+            <a:noFill/>
+          </a:ln>
+        </p:spPr>
+      </p:sp>
+      <p:sp>
+        <p:nvSpPr>
+          <p:cNvPr id="47" name="Item 47"/>
+          <p:cNvSpPr txBox="1"/>
+          <p:nvPr/>
+        </p:nvSpPr>
+        <p:spPr>
+          <a:xfrm>
+            <a:off x="1981606" y="6496912"/>
+            <a:ext cx="12034317" cy="743509"/>
+          </a:xfrm>
+          <a:prstGeom prst="rect">
+            <a:avLst/>
+          </a:prstGeom>
+          <a:noFill/>
+        </p:spPr>
+        <p:txBody>
+          <a:bodyPr wrap="square" lIns="0" tIns="0" rIns="0" bIns="0" anchor="t" rtlCol="0">
+            <a:noAutofit/>
+          </a:bodyPr>
+          <a:lstStyle/>
+          <a:p>
+            <a:pPr algn="l" marL="0" indent="0">
+              <a:lnSpc>
+                <a:spcPct val="100000"/>
+              </a:lnSpc>
+              <a:buNone/>
+            </a:pPr>
+            <a:r>
+              <a:rPr lang="ru-RU" sz="4712" b="0" cap="none" spc="0" baseline="0" dirty="0">
+                <a:solidFill>
+                  <a:srgbClr val="FFFFFF"/>
+                </a:solidFill>
+                <a:latin typeface="Inter Light"/>
+                <a:cs typeface="Inter Light"/>
+              </a:rPr>
+              <a:t>Генерация изображений внутри слайдов</a:t>
+            </a:r>
+            <a:endParaRPr lang="ru-RU" sz="4712"/>
+          </a:p>
+        </p:txBody>
+      </p:sp>
+      <p:cxnSp>
+        <p:nvCxnSpPr>
+          <p:cNvPr id="48" name="Line 48"/>
+          <p:cNvCxnSpPr/>
+          <p:nvPr/>
+        </p:nvCxnSpPr>
+        <p:spPr>
+          <a:xfrm>
+            <a:off x="1981606" y="7689238"/>
+            <a:ext cx="12034317" cy="0"/>
+          </a:xfrm>
+          <a:prstGeom prst="line">
+            <a:avLst/>
+          </a:prstGeom>
+          <a:ln w="9525">
+            <a:solidFill>
+              <a:srgbClr val="384848"/>
+            </a:solidFill>
+          </a:ln>
+        </p:spPr>
+      </p:cxnSp>
+      <p:sp>
+        <p:nvSpPr>
+          <p:cNvPr id="49" name="Marker 49"/>
+          <p:cNvSpPr/>
+          <p:nvPr/>
+        </p:nvSpPr>
+        <p:spPr>
+          <a:xfrm>
+            <a:off x="1024128" y="8383409"/>
+            <a:ext cx="227401" cy="227401"/>
+          </a:xfrm>
+          <a:prstGeom prst="ellipse">
+            <a:avLst/>
+          </a:prstGeom>
+          <a:solidFill>
+            <a:srgbClr val="C2D076"/>
+          </a:solidFill>
+          <a:ln>
+            <a:noFill/>
+          </a:ln>
+        </p:spPr>
+      </p:sp>
+      <p:sp>
+        <p:nvSpPr>
+          <p:cNvPr id="50" name="Item 50"/>
+          <p:cNvSpPr txBox="1"/>
+          <p:nvPr/>
+        </p:nvSpPr>
+        <p:spPr>
+          <a:xfrm>
+            <a:off x="1981606" y="8138055"/>
+            <a:ext cx="12034317" cy="743509"/>
+          </a:xfrm>
+          <a:prstGeom prst="rect">
+            <a:avLst/>
+          </a:prstGeom>
+          <a:noFill/>
+        </p:spPr>
+        <p:txBody>
+          <a:bodyPr wrap="square" lIns="0" tIns="0" rIns="0" bIns="0" anchor="t" rtlCol="0">
+            <a:noAutofit/>
+          </a:bodyPr>
+          <a:lstStyle/>
+          <a:p>
+            <a:pPr algn="l" marL="0" indent="0">
+              <a:lnSpc>
+                <a:spcPct val="100000"/>
+              </a:lnSpc>
+              <a:buNone/>
+            </a:pPr>
+            <a:r>
+              <a:rPr lang="ru-RU" sz="4712" b="0" cap="none" spc="0" baseline="0" dirty="0">
+                <a:solidFill>
+                  <a:srgbClr val="FFFFFF"/>
+                </a:solidFill>
+                <a:latin typeface="Inter Light"/>
+                <a:cs typeface="Inter Light"/>
+              </a:rPr>
+              <a:t>Пилот на шаблонах и сценариях VK Tech</a:t>
+            </a:r>
+            <a:endParaRPr lang="ru-RU" sz="4712"/>
+          </a:p>
+        </p:txBody>
+      </p:sp>
+    </p:spTree>
+  </p:cSld>
+  <p:clrMapOvr>
+    <a:masterClrMapping/>
+  </p:clrMapOvr>
+</p:sld>
+</file>
+
+<file path=ppt/slides/slide2.xml><?xml version="1.0" encoding="utf-8"?>
+<p:sld xmlns:a="http://schemas.openxmlformats.org/drawingml/2006/main" xmlns:p="http://schemas.openxmlformats.org/presentationml/2006/main" xmlns:r="http://schemas.openxmlformats.org/officeDocument/2006/relationships">
+  <p:cSld>
+    <p:bg>
+      <p:bgPr>
+        <a:solidFill>
+          <a:srgbClr val="001514"/>
+        </a:solidFill>
+      </p:bgPr>
+    </p:bg>
+    <p:spTree>
+      <p:nvGrpSpPr>
+        <p:cNvPr id="1" name=""/>
+        <p:cNvGrpSpPr/>
+        <p:nvPr/>
+      </p:nvGrpSpPr>
+      <p:grpSpPr/>
+      <p:sp>
+        <p:nvSpPr>
+          <p:cNvPr id="42" name="Google Shape;42;p8"/>
+          <p:cNvSpPr txBox="1"/>
+          <p:nvPr/>
+        </p:nvSpPr>
+        <p:spPr>
+          <a:xfrm>
+            <a:off x="619057" y="2623820"/>
+            <a:ext cx="9215842" cy="1527657"/>
+          </a:xfrm>
+          <a:prstGeom prst="rect">
+            <a:avLst/>
+          </a:prstGeom>
+          <a:noFill/>
+          <a:ln>
+            <a:noFill/>
+          </a:ln>
+        </p:spPr>
+        <p:txBody>
+          <a:bodyPr anchorCtr="0" anchor="t" bIns="0" lIns="0" spcFirstLastPara="1" rIns="0" wrap="square" tIns="0">
+            <a:spAutoFit/>
+          </a:bodyPr>
+          <a:lstStyle/>
+          <a:p>
+            <a:pPr indent="0" lvl="1" marL="0" marR="0" rtl="0" algn="l">
+              <a:lnSpc>
+                <a:spcPct val="120000"/>
+              </a:lnSpc>
+              <a:spcBef>
+                <a:spcPts val="0"/>
+              </a:spcBef>
+              <a:spcAft>
+                <a:spcPts val="0"/>
+              </a:spcAft>
+              <a:buClr>
+                <a:srgbClr val="C2D076"/>
+              </a:buClr>
+              <a:buSzPts val="5600"/>
+              <a:buFont typeface="Inter Medium"/>
+              <a:buNone/>
+            </a:pPr>
+            <a:r>
+              <a:rPr i="0" lang="ru-RU" sz="2799" u="none" cap="none" strike="noStrike">
+                <a:solidFill>
+                  <a:srgbClr val="C2D076"/>
+                </a:solidFill>
+                <a:latin typeface="Inter Medium"/>
+                <a:ea typeface="Inter Medium"/>
+                <a:cs typeface="Inter Medium"/>
+                <a:sym typeface="Inter Medium"/>
+              </a:rPr>
+              <a:t>Вёрстка занимает больше времени, чем создание текста</a:t>
+            </a:r>
+            <a:endParaRPr>
+              <a:latin typeface="Inter Medium"/>
+              <a:ea typeface="Inter Medium"/>
+              <a:cs typeface="Inter Medium"/>
+              <a:sym typeface="Inter Medium"/>
+            </a:endParaRPr>
+          </a:p>
+        </p:txBody>
+      </p:sp>
+      <p:sp>
+        <p:nvSpPr>
+          <p:cNvPr id="43" name="Card 43"/>
+          <p:cNvSpPr/>
+          <p:nvPr/>
+        </p:nvSpPr>
+        <p:spPr>
+          <a:xfrm>
+            <a:off x="1024128" y="4665827"/>
+            <a:ext cx="5120640" cy="4328952"/>
+          </a:xfrm>
+          <a:prstGeom prst="roundRect">
+            <a:avLst>
+              <a:gd name="adj" fmla="val 2534"/>
+            </a:avLst>
+          </a:prstGeom>
+          <a:solidFill>
+            <a:srgbClr val="000000"/>
+          </a:solidFill>
+          <a:ln>
+            <a:noFill/>
+          </a:ln>
+        </p:spPr>
+      </p:sp>
+      <p:sp>
+        <p:nvSpPr>
+          <p:cNvPr id="44" name="Rule 44"/>
+          <p:cNvSpPr/>
+          <p:nvPr/>
+        </p:nvSpPr>
+        <p:spPr>
+          <a:xfrm>
+            <a:off x="1382572" y="5024271"/>
+            <a:ext cx="720090" cy="38100"/>
+          </a:xfrm>
+          <a:prstGeom prst="rect">
+            <a:avLst/>
+          </a:prstGeom>
+          <a:solidFill>
+            <a:srgbClr val="C2D076"/>
+          </a:solidFill>
+          <a:ln>
+            <a:noFill/>
+          </a:ln>
+        </p:spPr>
+      </p:sp>
+      <p:sp>
+        <p:nvSpPr>
+          <p:cNvPr id="45" name="Column title 45"/>
+          <p:cNvSpPr txBox="1"/>
+          <p:nvPr/>
+        </p:nvSpPr>
+        <p:spPr>
+          <a:xfrm>
+            <a:off x="1382572" y="5247537"/>
+            <a:ext cx="4403752" cy="1461618"/>
+          </a:xfrm>
+          <a:prstGeom prst="rect">
+            <a:avLst/>
+          </a:prstGeom>
+          <a:noFill/>
+        </p:spPr>
+        <p:txBody>
+          <a:bodyPr wrap="square" lIns="0" tIns="0" rIns="0" bIns="0" anchor="t" rtlCol="0">
+            <a:noAutofit/>
+          </a:bodyPr>
+          <a:lstStyle/>
+          <a:p>
+            <a:pPr algn="l" marL="0" indent="0">
+              <a:lnSpc>
+                <a:spcPct val="100000"/>
+              </a:lnSpc>
+              <a:buNone/>
+            </a:pPr>
+            <a:r>
+              <a:rPr lang="ru-RU" sz="4712" b="0" cap="none" spc="0" baseline="0" dirty="0">
                 <a:solidFill>
                   <a:srgbClr val="C2D076"/>
                 </a:solidFill>
@@ -4685,19 +5447,19 @@
               </a:rPr>
               <a:t>Ручная вёрстка</a:t>
             </a:r>
-            <a:endParaRPr lang="ru-RU" sz="2799"/>
+            <a:endParaRPr lang="ru-RU" sz="4712"/>
           </a:p>
         </p:txBody>
       </p:sp>
       <p:sp>
         <p:nvSpPr>
-          <p:cNvPr id="48" name="Column 48"/>
+          <p:cNvPr id="46" name="Column 46"/>
           <p:cNvSpPr txBox="1"/>
           <p:nvPr/>
         </p:nvSpPr>
         <p:spPr>
           <a:xfrm>
-            <a:off x="1382572" y="6717315"/>
+            <a:off x="1382572" y="6904665"/>
             <a:ext cx="4403752" cy="1731670"/>
           </a:xfrm>
           <a:prstGeom prst="rect">
@@ -4729,7 +5491,7 @@
                 <a:latin typeface="Inter Light"/>
                 <a:cs typeface="Inter Light"/>
               </a:rPr>
-              <a:t>Подобрать макет, подвинуть блоки, подогнать цвета под фирменный стиль</a:t>
+              <a:t>Подбор макета, подгонка цветов и блоков</a:t>
             </a:r>
             <a:endParaRPr lang="ru-RU" sz="2799"/>
           </a:p>
@@ -4737,18 +5499,18 @@
       </p:sp>
       <p:sp>
         <p:nvSpPr>
-          <p:cNvPr id="49" name="Card 49"/>
+          <p:cNvPr id="47" name="Card 47"/>
           <p:cNvSpPr/>
           <p:nvPr/>
         </p:nvSpPr>
         <p:spPr>
           <a:xfrm>
-            <a:off x="6583680" y="5488127"/>
-            <a:ext cx="5120640" cy="3319302"/>
+            <a:off x="6583680" y="4665827"/>
+            <a:ext cx="5120640" cy="4328952"/>
           </a:xfrm>
           <a:prstGeom prst="roundRect">
             <a:avLst>
-              <a:gd name="adj" fmla="val 3305"/>
+              <a:gd name="adj" fmla="val 2534"/>
             </a:avLst>
           </a:prstGeom>
           <a:solidFill>
@@ -4761,13 +5523,13 @@
       </p:sp>
       <p:sp>
         <p:nvSpPr>
-          <p:cNvPr id="50" name="Rule 50"/>
+          <p:cNvPr id="48" name="Rule 48"/>
           <p:cNvSpPr/>
           <p:nvPr/>
         </p:nvSpPr>
         <p:spPr>
           <a:xfrm>
-            <a:off x="6942124" y="5846571"/>
+            <a:off x="6942124" y="5024271"/>
             <a:ext cx="720090" cy="38100"/>
           </a:xfrm>
           <a:prstGeom prst="rect">
@@ -4783,14 +5545,14 @@
       </p:sp>
       <p:sp>
         <p:nvSpPr>
-          <p:cNvPr id="51" name="Column title 51"/>
+          <p:cNvPr id="49" name="Column title 49"/>
           <p:cNvSpPr txBox="1"/>
           <p:nvPr/>
         </p:nvSpPr>
         <p:spPr>
           <a:xfrm>
-            <a:off x="6942124" y="6069837"/>
-            <a:ext cx="4403752" cy="451968"/>
+            <a:off x="6942124" y="5247537"/>
+            <a:ext cx="4403752" cy="1461618"/>
           </a:xfrm>
           <a:prstGeom prst="rect">
             <a:avLst/>
@@ -4810,7 +5572,7 @@
               <a:buNone/>
             </a:pPr>
             <a:r>
-              <a:rPr lang="ru-RU" sz="2799" b="0" cap="none" spc="0" baseline="0" dirty="0">
+              <a:rPr lang="ru-RU" sz="4712" b="0" cap="none" spc="0" baseline="0" dirty="0">
                 <a:solidFill>
                   <a:srgbClr val="C2D076"/>
                 </a:solidFill>
@@ -4819,19 +5581,19 @@
               </a:rPr>
               <a:t>ИИ ломает стиль</a:t>
             </a:r>
-            <a:endParaRPr lang="ru-RU" sz="2799"/>
+            <a:endParaRPr lang="ru-RU" sz="4712"/>
           </a:p>
         </p:txBody>
       </p:sp>
       <p:sp>
         <p:nvSpPr>
-          <p:cNvPr id="52" name="Column 52"/>
+          <p:cNvPr id="50" name="Column 50"/>
           <p:cNvSpPr txBox="1"/>
           <p:nvPr/>
         </p:nvSpPr>
         <p:spPr>
           <a:xfrm>
-            <a:off x="6942124" y="6717315"/>
+            <a:off x="6942124" y="6904665"/>
             <a:ext cx="4403752" cy="1731670"/>
           </a:xfrm>
           <a:prstGeom prst="rect">
@@ -4863,7 +5625,7 @@
                 <a:latin typeface="Inter Light"/>
                 <a:cs typeface="Inter Light"/>
               </a:rPr>
-              <a:t>Нейросети пишут текст, но не воспроизводят дизайн-⁠систему</a:t>
+              <a:t>Нейросети пишут текст, но не воспроизводят дизайн</a:t>
             </a:r>
             <a:endParaRPr lang="ru-RU" sz="2799"/>
           </a:p>
@@ -4871,18 +5633,18 @@
       </p:sp>
       <p:sp>
         <p:nvSpPr>
-          <p:cNvPr id="53" name="Card 53"/>
+          <p:cNvPr id="51" name="Card 51"/>
           <p:cNvSpPr/>
           <p:nvPr/>
         </p:nvSpPr>
         <p:spPr>
           <a:xfrm>
-            <a:off x="12143232" y="5488127"/>
-            <a:ext cx="5120640" cy="3319302"/>
+            <a:off x="12143232" y="4665827"/>
+            <a:ext cx="5120640" cy="4328952"/>
           </a:xfrm>
           <a:prstGeom prst="roundRect">
             <a:avLst>
-              <a:gd name="adj" fmla="val 3305"/>
+              <a:gd name="adj" fmla="val 2534"/>
             </a:avLst>
           </a:prstGeom>
           <a:solidFill>
@@ -4895,13 +5657,13 @@
       </p:sp>
       <p:sp>
         <p:nvSpPr>
-          <p:cNvPr id="54" name="Rule 54"/>
+          <p:cNvPr id="52" name="Rule 52"/>
           <p:cNvSpPr/>
           <p:nvPr/>
         </p:nvSpPr>
         <p:spPr>
           <a:xfrm>
-            <a:off x="12501676" y="5846571"/>
+            <a:off x="12501676" y="5024271"/>
             <a:ext cx="720090" cy="38100"/>
           </a:xfrm>
           <a:prstGeom prst="rect">
@@ -4917,14 +5679,14 @@
       </p:sp>
       <p:sp>
         <p:nvSpPr>
-          <p:cNvPr id="55" name="Column title 55"/>
+          <p:cNvPr id="53" name="Column title 53"/>
           <p:cNvSpPr txBox="1"/>
           <p:nvPr/>
         </p:nvSpPr>
         <p:spPr>
           <a:xfrm>
-            <a:off x="12501676" y="6069837"/>
-            <a:ext cx="4403752" cy="451968"/>
+            <a:off x="12501676" y="5247537"/>
+            <a:ext cx="4403752" cy="1461618"/>
           </a:xfrm>
           <a:prstGeom prst="rect">
             <a:avLst/>
@@ -4944,7 +5706,7 @@
               <a:buNone/>
             </a:pPr>
             <a:r>
-              <a:rPr lang="ru-RU" sz="2799" b="0" cap="none" spc="0" baseline="0" dirty="0">
+              <a:rPr lang="ru-RU" sz="4712" b="0" cap="none" spc="0" baseline="0" dirty="0">
                 <a:solidFill>
                   <a:srgbClr val="C2D076"/>
                 </a:solidFill>
@@ -4953,19 +5715,19 @@
               </a:rPr>
               <a:t>Шаблон — не инструкция</a:t>
             </a:r>
-            <a:endParaRPr lang="ru-RU" sz="2799"/>
+            <a:endParaRPr lang="ru-RU" sz="4712"/>
           </a:p>
         </p:txBody>
       </p:sp>
       <p:sp>
         <p:nvSpPr>
-          <p:cNvPr id="56" name="Column 56"/>
+          <p:cNvPr id="54" name="Column 54"/>
           <p:cNvSpPr txBox="1"/>
           <p:nvPr/>
         </p:nvSpPr>
         <p:spPr>
           <a:xfrm>
-            <a:off x="12501676" y="6717315"/>
+            <a:off x="12501676" y="6904665"/>
             <a:ext cx="4403752" cy="1731670"/>
           </a:xfrm>
           <a:prstGeom prst="rect">
@@ -4997,7 +5759,7 @@
                 <a:latin typeface="Inter Light"/>
                 <a:cs typeface="Inter Light"/>
               </a:rPr>
-              <a:t>по слайдам-⁠образцам не понять, как собрать новый слайд</a:t>
+              <a:t>Слайды-⁠образцы не показывают, как собрать новый слайд</a:t>
             </a:r>
             <a:endParaRPr lang="ru-RU" sz="2799"/>
           </a:p>
@@ -5011,329 +5773,7 @@
 </p:sld>
 </file>
 
-<file path=ppt/slides/slide10.xml><?xml version="1.0" encoding="utf-8"?>
-<p:sld xmlns:a="http://schemas.openxmlformats.org/drawingml/2006/main" xmlns:p="http://schemas.openxmlformats.org/presentationml/2006/main" xmlns:r="http://schemas.openxmlformats.org/officeDocument/2006/relationships">
-  <p:cSld>
-    <p:bg>
-      <p:bgPr>
-        <a:solidFill>
-          <a:srgbClr val="001514"/>
-        </a:solidFill>
-      </p:bgPr>
-    </p:bg>
-    <p:spTree>
-      <p:nvGrpSpPr>
-        <p:cNvPr id="1" name=""/>
-        <p:cNvGrpSpPr/>
-        <p:nvPr/>
-      </p:nvGrpSpPr>
-      <p:grpSpPr/>
-      <p:sp>
-        <p:nvSpPr>
-          <p:cNvPr id="42" name="Google Shape;42;p8"/>
-          <p:cNvSpPr txBox="1"/>
-          <p:nvPr/>
-        </p:nvSpPr>
-        <p:spPr>
-          <a:xfrm>
-            <a:off x="619057" y="2623820"/>
-            <a:ext cx="15727680" cy="944880"/>
-          </a:xfrm>
-          <a:prstGeom prst="rect">
-            <a:avLst/>
-          </a:prstGeom>
-          <a:noFill/>
-          <a:ln>
-            <a:noFill/>
-          </a:ln>
-        </p:spPr>
-        <p:txBody>
-          <a:bodyPr anchorCtr="0" anchor="t" bIns="0" lIns="0" spcFirstLastPara="1" rIns="0" wrap="square" tIns="0">
-            <a:spAutoFit/>
-          </a:bodyPr>
-          <a:lstStyle/>
-          <a:p>
-            <a:pPr indent="0" lvl="1" marL="0" marR="0" rtl="0" algn="l">
-              <a:lnSpc>
-                <a:spcPct val="120000"/>
-              </a:lnSpc>
-              <a:spcBef>
-                <a:spcPts val="0"/>
-              </a:spcBef>
-              <a:spcAft>
-                <a:spcPts val="0"/>
-              </a:spcAft>
-              <a:buClr>
-                <a:srgbClr val="C2D076"/>
-              </a:buClr>
-              <a:buSzPts val="5600"/>
-              <a:buFont typeface="Inter Medium"/>
-              <a:buNone/>
-            </a:pPr>
-            <a:r>
-              <a:rPr i="0" lang="ru-RU" sz="4712" u="none" cap="none" strike="noStrike">
-                <a:solidFill>
-                  <a:srgbClr val="C2D076"/>
-                </a:solidFill>
-                <a:latin typeface="Inter Medium"/>
-                <a:ea typeface="Inter Medium"/>
-                <a:cs typeface="Inter Medium"/>
-                <a:sym typeface="Inter Medium"/>
-              </a:rPr>
-              <a:t>Три шага развития после финала</a:t>
-            </a:r>
-            <a:endParaRPr>
-              <a:latin typeface="Inter Medium"/>
-              <a:ea typeface="Inter Medium"/>
-              <a:cs typeface="Inter Medium"/>
-              <a:sym typeface="Inter Medium"/>
-            </a:endParaRPr>
-          </a:p>
-        </p:txBody>
-      </p:sp>
-      <p:sp>
-        <p:nvSpPr>
-          <p:cNvPr id="43" name="Marker 43"/>
-          <p:cNvSpPr/>
-          <p:nvPr/>
-        </p:nvSpPr>
-        <p:spPr>
-          <a:xfrm>
-            <a:off x="1024128" y="4383014"/>
-            <a:ext cx="227401" cy="227401"/>
-          </a:xfrm>
-          <a:prstGeom prst="ellipse">
-            <a:avLst/>
-          </a:prstGeom>
-          <a:solidFill>
-            <a:srgbClr val="C2D076"/>
-          </a:solidFill>
-          <a:ln>
-            <a:noFill/>
-          </a:ln>
-        </p:spPr>
-      </p:sp>
-      <p:sp>
-        <p:nvSpPr>
-          <p:cNvPr id="44" name="Item 44"/>
-          <p:cNvSpPr txBox="1"/>
-          <p:nvPr/>
-        </p:nvSpPr>
-        <p:spPr>
-          <a:xfrm>
-            <a:off x="1981606" y="4137660"/>
-            <a:ext cx="12034317" cy="1461618"/>
-          </a:xfrm>
-          <a:prstGeom prst="rect">
-            <a:avLst/>
-          </a:prstGeom>
-          <a:noFill/>
-        </p:spPr>
-        <p:txBody>
-          <a:bodyPr wrap="square" lIns="0" tIns="0" rIns="0" bIns="0" anchor="t" rtlCol="0">
-            <a:noAutofit/>
-          </a:bodyPr>
-          <a:lstStyle/>
-          <a:p>
-            <a:pPr algn="l" marL="0" indent="0">
-              <a:lnSpc>
-                <a:spcPct val="100000"/>
-              </a:lnSpc>
-              <a:buNone/>
-            </a:pPr>
-            <a:r>
-              <a:rPr lang="ru-RU" sz="4712" b="0" cap="none" spc="0" baseline="0" dirty="0">
-                <a:solidFill>
-                  <a:srgbClr val="FFFFFF"/>
-                </a:solidFill>
-                <a:latin typeface="Inter Light"/>
-                <a:cs typeface="Inter Light"/>
-              </a:rPr>
-              <a:t>Переход на инференс VK и модель Qwen3.8-⁠27B</a:t>
-            </a:r>
-            <a:endParaRPr lang="ru-RU" sz="4712"/>
-          </a:p>
-        </p:txBody>
-      </p:sp>
-      <p:cxnSp>
-        <p:nvCxnSpPr>
-          <p:cNvPr id="45" name="Line 45"/>
-          <p:cNvCxnSpPr/>
-          <p:nvPr/>
-        </p:nvCxnSpPr>
-        <p:spPr>
-          <a:xfrm>
-            <a:off x="1981606" y="6048095"/>
-            <a:ext cx="12034317" cy="0"/>
-          </a:xfrm>
-          <a:prstGeom prst="line">
-            <a:avLst/>
-          </a:prstGeom>
-          <a:ln w="9525">
-            <a:solidFill>
-              <a:srgbClr val="384848"/>
-            </a:solidFill>
-          </a:ln>
-        </p:spPr>
-      </p:cxnSp>
-      <p:sp>
-        <p:nvSpPr>
-          <p:cNvPr id="46" name="Marker 46"/>
-          <p:cNvSpPr/>
-          <p:nvPr/>
-        </p:nvSpPr>
-        <p:spPr>
-          <a:xfrm>
-            <a:off x="1024128" y="6742266"/>
-            <a:ext cx="227401" cy="227401"/>
-          </a:xfrm>
-          <a:prstGeom prst="ellipse">
-            <a:avLst/>
-          </a:prstGeom>
-          <a:solidFill>
-            <a:srgbClr val="C2D076"/>
-          </a:solidFill>
-          <a:ln>
-            <a:noFill/>
-          </a:ln>
-        </p:spPr>
-      </p:sp>
-      <p:sp>
-        <p:nvSpPr>
-          <p:cNvPr id="47" name="Item 47"/>
-          <p:cNvSpPr txBox="1"/>
-          <p:nvPr/>
-        </p:nvSpPr>
-        <p:spPr>
-          <a:xfrm>
-            <a:off x="1981606" y="6496912"/>
-            <a:ext cx="12034317" cy="743509"/>
-          </a:xfrm>
-          <a:prstGeom prst="rect">
-            <a:avLst/>
-          </a:prstGeom>
-          <a:noFill/>
-        </p:spPr>
-        <p:txBody>
-          <a:bodyPr wrap="square" lIns="0" tIns="0" rIns="0" bIns="0" anchor="t" rtlCol="0">
-            <a:noAutofit/>
-          </a:bodyPr>
-          <a:lstStyle/>
-          <a:p>
-            <a:pPr algn="l" marL="0" indent="0">
-              <a:lnSpc>
-                <a:spcPct val="100000"/>
-              </a:lnSpc>
-              <a:buNone/>
-            </a:pPr>
-            <a:r>
-              <a:rPr lang="ru-RU" sz="4712" b="0" cap="none" spc="0" baseline="0" dirty="0">
-                <a:solidFill>
-                  <a:srgbClr val="FFFFFF"/>
-                </a:solidFill>
-                <a:latin typeface="Inter Light"/>
-                <a:cs typeface="Inter Light"/>
-              </a:rPr>
-              <a:t>Генерация изображений внутри слайдов</a:t>
-            </a:r>
-            <a:endParaRPr lang="ru-RU" sz="4712"/>
-          </a:p>
-        </p:txBody>
-      </p:sp>
-      <p:cxnSp>
-        <p:nvCxnSpPr>
-          <p:cNvPr id="48" name="Line 48"/>
-          <p:cNvCxnSpPr/>
-          <p:nvPr/>
-        </p:nvCxnSpPr>
-        <p:spPr>
-          <a:xfrm>
-            <a:off x="1981606" y="7689238"/>
-            <a:ext cx="12034317" cy="0"/>
-          </a:xfrm>
-          <a:prstGeom prst="line">
-            <a:avLst/>
-          </a:prstGeom>
-          <a:ln w="9525">
-            <a:solidFill>
-              <a:srgbClr val="384848"/>
-            </a:solidFill>
-          </a:ln>
-        </p:spPr>
-      </p:cxnSp>
-      <p:sp>
-        <p:nvSpPr>
-          <p:cNvPr id="49" name="Marker 49"/>
-          <p:cNvSpPr/>
-          <p:nvPr/>
-        </p:nvSpPr>
-        <p:spPr>
-          <a:xfrm>
-            <a:off x="1024128" y="8383409"/>
-            <a:ext cx="227401" cy="227401"/>
-          </a:xfrm>
-          <a:prstGeom prst="ellipse">
-            <a:avLst/>
-          </a:prstGeom>
-          <a:solidFill>
-            <a:srgbClr val="C2D076"/>
-          </a:solidFill>
-          <a:ln>
-            <a:noFill/>
-          </a:ln>
-        </p:spPr>
-      </p:sp>
-      <p:sp>
-        <p:nvSpPr>
-          <p:cNvPr id="50" name="Item 50"/>
-          <p:cNvSpPr txBox="1"/>
-          <p:nvPr/>
-        </p:nvSpPr>
-        <p:spPr>
-          <a:xfrm>
-            <a:off x="1981606" y="8138055"/>
-            <a:ext cx="12034317" cy="743509"/>
-          </a:xfrm>
-          <a:prstGeom prst="rect">
-            <a:avLst/>
-          </a:prstGeom>
-          <a:noFill/>
-        </p:spPr>
-        <p:txBody>
-          <a:bodyPr wrap="square" lIns="0" tIns="0" rIns="0" bIns="0" anchor="t" rtlCol="0">
-            <a:noAutofit/>
-          </a:bodyPr>
-          <a:lstStyle/>
-          <a:p>
-            <a:pPr algn="l" marL="0" indent="0">
-              <a:lnSpc>
-                <a:spcPct val="100000"/>
-              </a:lnSpc>
-              <a:buNone/>
-            </a:pPr>
-            <a:r>
-              <a:rPr lang="ru-RU" sz="4712" b="0" cap="none" spc="0" baseline="0" dirty="0">
-                <a:solidFill>
-                  <a:srgbClr val="FFFFFF"/>
-                </a:solidFill>
-                <a:latin typeface="Inter Light"/>
-                <a:cs typeface="Inter Light"/>
-              </a:rPr>
-              <a:t>Пилот на шаблонах и сценариях VK Tech</a:t>
-            </a:r>
-            <a:endParaRPr lang="ru-RU" sz="4712"/>
-          </a:p>
-        </p:txBody>
-      </p:sp>
-    </p:spTree>
-  </p:cSld>
-  <p:clrMapOvr>
-    <a:masterClrMapping/>
-  </p:clrMapOvr>
-</p:sld>
-</file>
-
-<file path=ppt/slides/slide2.xml><?xml version="1.0" encoding="utf-8"?>
+<file path=ppt/slides/slide3.xml><?xml version="1.0" encoding="utf-8"?>
 <p:sld xmlns:a="http://schemas.openxmlformats.org/drawingml/2006/main" xmlns:p="http://schemas.openxmlformats.org/presentationml/2006/main" xmlns:r="http://schemas.openxmlformats.org/officeDocument/2006/relationships">
   <p:cSld>
     <p:bg>
@@ -5422,7 +5862,7 @@
         <p:spPr>
           <a:xfrm>
             <a:off x="1024128" y="3947718"/>
-            <a:ext cx="5521512" cy="2726995"/>
+            <a:ext cx="5521512" cy="878535"/>
           </a:xfrm>
           <a:prstGeom prst="rect">
             <a:avLst/>
@@ -5435,18 +5875,11 @@
           </a:bodyPr>
           <a:lstStyle/>
           <a:p>
-            <a:pPr algn="l" marL="391020" indent="-391020">
+            <a:pPr algn="l" marL="0" indent="0">
               <a:lnSpc>
                 <a:spcPct val="100000"/>
               </a:lnSpc>
-              <a:spcAft>
-                <a:spcPts val="1120"/>
-              </a:spcAft>
-              <a:buClr>
-                <a:srgbClr val="C2D076"/>
-              </a:buClr>
-              <a:buFont typeface="Arial"/>
-              <a:buChar char="•"/>
+              <a:buNone/>
             </a:pPr>
             <a:r>
               <a:rPr lang="ru-RU" sz="2799" b="0" cap="none" spc="0" baseline="0" dirty="0">
@@ -5456,30 +5889,7 @@
                 <a:latin typeface="Inter Light"/>
                 <a:cs typeface="Inter Light"/>
               </a:rPr>
-              <a:t>Правила оформления приходится выводить из образцов</a:t>
-            </a:r>
-            <a:endParaRPr lang="ru-RU" sz="2799"/>
-          </a:p>
-          <a:p>
-            <a:pPr algn="l" marL="391020" indent="-391020">
-              <a:lnSpc>
-                <a:spcPct val="100000"/>
-              </a:lnSpc>
-              <a:buClr>
-                <a:srgbClr val="C2D076"/>
-              </a:buClr>
-              <a:buFont typeface="Arial"/>
-              <a:buChar char="•"/>
-            </a:pPr>
-            <a:r>
-              <a:rPr lang="ru-RU" sz="2799" b="0" cap="none" spc="0" baseline="0" dirty="0">
-                <a:solidFill>
-                  <a:srgbClr val="FFFFFF"/>
-                </a:solidFill>
-                <a:latin typeface="Inter Light"/>
-                <a:cs typeface="Inter Light"/>
-              </a:rPr>
-              <a:t>Палитра, кегли, сетка, поля, логотипы и колонтитулы не автоматизированы</a:t>
+              <a:t>Правила оформления нужно выводить из образцов</a:t>
             </a:r>
             <a:endParaRPr lang="ru-RU" sz="2799"/>
           </a:p>
@@ -5494,7 +5904,7 @@
         <p:spPr>
           <a:xfrm>
             <a:off x="6984552" y="3947718"/>
-            <a:ext cx="0" cy="2726995"/>
+            <a:ext cx="0" cy="878535"/>
           </a:xfrm>
           <a:prstGeom prst="line">
             <a:avLst/>
@@ -5560,7 +5970,7 @@
                 <a:latin typeface="Inter Light"/>
                 <a:cs typeface="Inter Light"/>
               </a:rPr>
-              <a:t>Состав фигур в шаблоне</a:t>
+              <a:t>Состав фигур в шаблонах</a:t>
             </a:r>
             <a:endParaRPr lang="ru-RU" sz="2799"/>
           </a:p>
@@ -5790,7 +6200,7 @@
 </p:sld>
 </file>
 
-<file path=ppt/slides/slide3.xml><?xml version="1.0" encoding="utf-8"?>
+<file path=ppt/slides/slide4.xml><?xml version="1.0" encoding="utf-8"?>
 <p:sld xmlns:a="http://schemas.openxmlformats.org/drawingml/2006/main" xmlns:p="http://schemas.openxmlformats.org/presentationml/2006/main" xmlns:r="http://schemas.openxmlformats.org/officeDocument/2006/relationships">
   <p:cSld>
     <p:bg>
@@ -5859,7 +6269,7 @@
                 <a:cs typeface="Inter Medium"/>
                 <a:sym typeface="Inter Medium"/>
               </a:rPr>
-              <a:t>Шаблон читается как набор правил</a:t>
+              <a:t>Решение</a:t>
             </a:r>
             <a:endParaRPr>
               <a:latin typeface="Inter Medium"/>
@@ -6062,7 +6472,7 @@
                 <a:latin typeface="Inter Light"/>
                 <a:cs typeface="Inter Light"/>
               </a:rPr>
-              <a:t>Verstka берёт шаблон и текст</a:t>
+              <a:t>Verstka использует любой шаблон PowerPoint и текст для создания презентации.</a:t>
             </a:r>
             <a:endParaRPr lang="ru-RU" sz="2499"/>
           </a:p>
@@ -6196,7 +6606,7 @@
                 <a:latin typeface="Inter Light"/>
                 <a:cs typeface="Inter Light"/>
               </a:rPr>
-              <a:t>Шаблон читается как набор правил, а не как набор макетов</a:t>
+              <a:t>Шаблон интерпретируется как набор правил, а не макетов.</a:t>
             </a:r>
             <a:endParaRPr lang="ru-RU" sz="2499"/>
           </a:p>
@@ -6330,501 +6740,9 @@
                 <a:latin typeface="Inter Light"/>
                 <a:cs typeface="Inter Light"/>
               </a:rPr>
-              <a:t>Создаются три редактируемые презентации в стиле шаблона</a:t>
+              <a:t>Результат — три презентации в стиле шаблона, готовые к редактированию.</a:t>
             </a:r>
             <a:endParaRPr lang="ru-RU" sz="2499"/>
-          </a:p>
-        </p:txBody>
-      </p:sp>
-    </p:spTree>
-  </p:cSld>
-  <p:clrMapOvr>
-    <a:masterClrMapping/>
-  </p:clrMapOvr>
-</p:sld>
-</file>
-
-<file path=ppt/slides/slide4.xml><?xml version="1.0" encoding="utf-8"?>
-<p:sld xmlns:a="http://schemas.openxmlformats.org/drawingml/2006/main" xmlns:p="http://schemas.openxmlformats.org/presentationml/2006/main" xmlns:r="http://schemas.openxmlformats.org/officeDocument/2006/relationships">
-  <p:cSld>
-    <p:bg>
-      <p:bgPr>
-        <a:solidFill>
-          <a:srgbClr val="001514"/>
-        </a:solidFill>
-      </p:bgPr>
-    </p:bg>
-    <p:spTree>
-      <p:nvGrpSpPr>
-        <p:cNvPr id="1" name=""/>
-        <p:cNvGrpSpPr/>
-        <p:nvPr/>
-      </p:nvGrpSpPr>
-      <p:grpSpPr/>
-      <p:sp>
-        <p:nvSpPr>
-          <p:cNvPr id="42" name="Google Shape;42;p8"/>
-          <p:cNvSpPr txBox="1"/>
-          <p:nvPr/>
-        </p:nvSpPr>
-        <p:spPr>
-          <a:xfrm>
-            <a:off x="619057" y="2623820"/>
-            <a:ext cx="10417162" cy="1527657"/>
-          </a:xfrm>
-          <a:prstGeom prst="rect">
-            <a:avLst/>
-          </a:prstGeom>
-          <a:noFill/>
-          <a:ln>
-            <a:noFill/>
-          </a:ln>
-        </p:spPr>
-        <p:txBody>
-          <a:bodyPr anchorCtr="0" anchor="t" bIns="0" lIns="0" spcFirstLastPara="1" rIns="0" wrap="square" tIns="0">
-            <a:spAutoFit/>
-          </a:bodyPr>
-          <a:lstStyle/>
-          <a:p>
-            <a:pPr indent="0" lvl="1" marL="0" marR="0" rtl="0" algn="l">
-              <a:lnSpc>
-                <a:spcPct val="120000"/>
-              </a:lnSpc>
-              <a:spcBef>
-                <a:spcPts val="0"/>
-              </a:spcBef>
-              <a:spcAft>
-                <a:spcPts val="0"/>
-              </a:spcAft>
-              <a:buClr>
-                <a:srgbClr val="C2D076"/>
-              </a:buClr>
-              <a:buSzPts val="5600"/>
-              <a:buFont typeface="Inter Medium"/>
-              <a:buNone/>
-            </a:pPr>
-            <a:r>
-              <a:rPr i="0" lang="ru-RU" sz="2799" u="none" cap="none" strike="noStrike">
-                <a:solidFill>
-                  <a:srgbClr val="C2D076"/>
-                </a:solidFill>
-                <a:latin typeface="Inter Medium"/>
-                <a:ea typeface="Inter Medium"/>
-                <a:cs typeface="Inter Medium"/>
-                <a:sym typeface="Inter Medium"/>
-              </a:rPr>
-              <a:t>Открытые модели до 35 млрд параметров создают презентации</a:t>
-            </a:r>
-            <a:endParaRPr>
-              <a:latin typeface="Inter Medium"/>
-              <a:ea typeface="Inter Medium"/>
-              <a:cs typeface="Inter Medium"/>
-              <a:sym typeface="Inter Medium"/>
-            </a:endParaRPr>
-          </a:p>
-        </p:txBody>
-      </p:sp>
-      <p:sp>
-        <p:nvSpPr>
-          <p:cNvPr id="43" name="Marker 43"/>
-          <p:cNvSpPr/>
-          <p:nvPr/>
-        </p:nvSpPr>
-        <p:spPr>
-          <a:xfrm>
-            <a:off x="1024128" y="4811571"/>
-            <a:ext cx="135080" cy="135080"/>
-          </a:xfrm>
-          <a:prstGeom prst="ellipse">
-            <a:avLst/>
-          </a:prstGeom>
-          <a:solidFill>
-            <a:srgbClr val="C2D076"/>
-          </a:solidFill>
-          <a:ln>
-            <a:noFill/>
-          </a:ln>
-        </p:spPr>
-      </p:sp>
-      <p:sp>
-        <p:nvSpPr>
-          <p:cNvPr id="44" name="Item 44"/>
-          <p:cNvSpPr txBox="1"/>
-          <p:nvPr/>
-        </p:nvSpPr>
-        <p:spPr>
-          <a:xfrm>
-            <a:off x="1592885" y="4665827"/>
-            <a:ext cx="12423038" cy="451968"/>
-          </a:xfrm>
-          <a:prstGeom prst="rect">
-            <a:avLst/>
-          </a:prstGeom>
-          <a:noFill/>
-        </p:spPr>
-        <p:txBody>
-          <a:bodyPr wrap="square" lIns="0" tIns="0" rIns="0" bIns="0" anchor="t" rtlCol="0">
-            <a:noAutofit/>
-          </a:bodyPr>
-          <a:lstStyle/>
-          <a:p>
-            <a:pPr algn="l" marL="0" indent="0">
-              <a:lnSpc>
-                <a:spcPct val="100000"/>
-              </a:lnSpc>
-              <a:buNone/>
-            </a:pPr>
-            <a:r>
-              <a:rPr lang="ru-RU" sz="2799" b="0" cap="none" spc="0" baseline="0" dirty="0">
-                <a:solidFill>
-                  <a:srgbClr val="FFFFFF"/>
-                </a:solidFill>
-                <a:latin typeface="Inter Light"/>
-                <a:cs typeface="Inter Light"/>
-              </a:rPr>
-              <a:t>Аналитик — находит слайды, ряды данных и просьбы</a:t>
-            </a:r>
-            <a:endParaRPr lang="ru-RU" sz="2799"/>
-          </a:p>
-        </p:txBody>
-      </p:sp>
-      <p:cxnSp>
-        <p:nvCxnSpPr>
-          <p:cNvPr id="45" name="Line 45"/>
-          <p:cNvCxnSpPr/>
-          <p:nvPr/>
-        </p:nvCxnSpPr>
-        <p:spPr>
-          <a:xfrm>
-            <a:off x="1592885" y="5384399"/>
-            <a:ext cx="12423038" cy="0"/>
-          </a:xfrm>
-          <a:prstGeom prst="line">
-            <a:avLst/>
-          </a:prstGeom>
-          <a:ln w="9525">
-            <a:solidFill>
-              <a:srgbClr val="384848"/>
-            </a:solidFill>
-          </a:ln>
-        </p:spPr>
-      </p:cxnSp>
-      <p:sp>
-        <p:nvSpPr>
-          <p:cNvPr id="46" name="Marker 46"/>
-          <p:cNvSpPr/>
-          <p:nvPr/>
-        </p:nvSpPr>
-        <p:spPr>
-          <a:xfrm>
-            <a:off x="1024128" y="5796747"/>
-            <a:ext cx="135080" cy="135080"/>
-          </a:xfrm>
-          <a:prstGeom prst="ellipse">
-            <a:avLst/>
-          </a:prstGeom>
-          <a:solidFill>
-            <a:srgbClr val="C2D076"/>
-          </a:solidFill>
-          <a:ln>
-            <a:noFill/>
-          </a:ln>
-        </p:spPr>
-      </p:sp>
-      <p:sp>
-        <p:nvSpPr>
-          <p:cNvPr id="47" name="Item 47"/>
-          <p:cNvSpPr txBox="1"/>
-          <p:nvPr/>
-        </p:nvSpPr>
-        <p:spPr>
-          <a:xfrm>
-            <a:off x="1592885" y="5651003"/>
-            <a:ext cx="12423038" cy="451968"/>
-          </a:xfrm>
-          <a:prstGeom prst="rect">
-            <a:avLst/>
-          </a:prstGeom>
-          <a:noFill/>
-        </p:spPr>
-        <p:txBody>
-          <a:bodyPr wrap="square" lIns="0" tIns="0" rIns="0" bIns="0" anchor="t" rtlCol="0">
-            <a:noAutofit/>
-          </a:bodyPr>
-          <a:lstStyle/>
-          <a:p>
-            <a:pPr algn="l" marL="0" indent="0">
-              <a:lnSpc>
-                <a:spcPct val="100000"/>
-              </a:lnSpc>
-              <a:buNone/>
-            </a:pPr>
-            <a:r>
-              <a:rPr lang="ru-RU" sz="2799" b="0" cap="none" spc="0" baseline="0" dirty="0">
-                <a:solidFill>
-                  <a:srgbClr val="FFFFFF"/>
-                </a:solidFill>
-                <a:latin typeface="Inter Light"/>
-                <a:cs typeface="Inter Light"/>
-              </a:rPr>
-              <a:t>Дизайнер — продумывает каждый слайд отдельно</a:t>
-            </a:r>
-            <a:endParaRPr lang="ru-RU" sz="2799"/>
-          </a:p>
-        </p:txBody>
-      </p:sp>
-      <p:cxnSp>
-        <p:nvCxnSpPr>
-          <p:cNvPr id="48" name="Line 48"/>
-          <p:cNvCxnSpPr/>
-          <p:nvPr/>
-        </p:nvCxnSpPr>
-        <p:spPr>
-          <a:xfrm>
-            <a:off x="1592885" y="6369575"/>
-            <a:ext cx="12423038" cy="0"/>
-          </a:xfrm>
-          <a:prstGeom prst="line">
-            <a:avLst/>
-          </a:prstGeom>
-          <a:ln w="9525">
-            <a:solidFill>
-              <a:srgbClr val="384848"/>
-            </a:solidFill>
-          </a:ln>
-        </p:spPr>
-      </p:cxnSp>
-      <p:sp>
-        <p:nvSpPr>
-          <p:cNvPr id="49" name="Marker 49"/>
-          <p:cNvSpPr/>
-          <p:nvPr/>
-        </p:nvSpPr>
-        <p:spPr>
-          <a:xfrm>
-            <a:off x="1024128" y="6781923"/>
-            <a:ext cx="135080" cy="135080"/>
-          </a:xfrm>
-          <a:prstGeom prst="ellipse">
-            <a:avLst/>
-          </a:prstGeom>
-          <a:solidFill>
-            <a:srgbClr val="C2D076"/>
-          </a:solidFill>
-          <a:ln>
-            <a:noFill/>
-          </a:ln>
-        </p:spPr>
-      </p:sp>
-      <p:sp>
-        <p:nvSpPr>
-          <p:cNvPr id="50" name="Item 50"/>
-          <p:cNvSpPr txBox="1"/>
-          <p:nvPr/>
-        </p:nvSpPr>
-        <p:spPr>
-          <a:xfrm>
-            <a:off x="1592885" y="6636179"/>
-            <a:ext cx="12423038" cy="451968"/>
-          </a:xfrm>
-          <a:prstGeom prst="rect">
-            <a:avLst/>
-          </a:prstGeom>
-          <a:noFill/>
-        </p:spPr>
-        <p:txBody>
-          <a:bodyPr wrap="square" lIns="0" tIns="0" rIns="0" bIns="0" anchor="t" rtlCol="0">
-            <a:noAutofit/>
-          </a:bodyPr>
-          <a:lstStyle/>
-          <a:p>
-            <a:pPr algn="l" marL="0" indent="0">
-              <a:lnSpc>
-                <a:spcPct val="100000"/>
-              </a:lnSpc>
-              <a:buNone/>
-            </a:pPr>
-            <a:r>
-              <a:rPr lang="ru-RU" sz="2799" b="0" cap="none" spc="0" baseline="0" dirty="0">
-                <a:solidFill>
-                  <a:srgbClr val="FFFFFF"/>
-                </a:solidFill>
-                <a:latin typeface="Inter Light"/>
-                <a:cs typeface="Inter Light"/>
-              </a:rPr>
-              <a:t>Критик — сверяет план с текстом и правилами шаблона</a:t>
-            </a:r>
-            <a:endParaRPr lang="ru-RU" sz="2799"/>
-          </a:p>
-        </p:txBody>
-      </p:sp>
-      <p:cxnSp>
-        <p:nvCxnSpPr>
-          <p:cNvPr id="51" name="Line 51"/>
-          <p:cNvCxnSpPr/>
-          <p:nvPr/>
-        </p:nvCxnSpPr>
-        <p:spPr>
-          <a:xfrm>
-            <a:off x="1592885" y="7354751"/>
-            <a:ext cx="12423038" cy="0"/>
-          </a:xfrm>
-          <a:prstGeom prst="line">
-            <a:avLst/>
-          </a:prstGeom>
-          <a:ln w="9525">
-            <a:solidFill>
-              <a:srgbClr val="384848"/>
-            </a:solidFill>
-          </a:ln>
-        </p:spPr>
-      </p:cxnSp>
-      <p:sp>
-        <p:nvSpPr>
-          <p:cNvPr id="52" name="Marker 52"/>
-          <p:cNvSpPr/>
-          <p:nvPr/>
-        </p:nvSpPr>
-        <p:spPr>
-          <a:xfrm>
-            <a:off x="1024128" y="7767099"/>
-            <a:ext cx="135080" cy="135080"/>
-          </a:xfrm>
-          <a:prstGeom prst="ellipse">
-            <a:avLst/>
-          </a:prstGeom>
-          <a:solidFill>
-            <a:srgbClr val="C2D076"/>
-          </a:solidFill>
-          <a:ln>
-            <a:noFill/>
-          </a:ln>
-        </p:spPr>
-      </p:sp>
-      <p:sp>
-        <p:nvSpPr>
-          <p:cNvPr id="53" name="Item 53"/>
-          <p:cNvSpPr txBox="1"/>
-          <p:nvPr/>
-        </p:nvSpPr>
-        <p:spPr>
-          <a:xfrm>
-            <a:off x="1592885" y="7621355"/>
-            <a:ext cx="12423038" cy="451968"/>
-          </a:xfrm>
-          <a:prstGeom prst="rect">
-            <a:avLst/>
-          </a:prstGeom>
-          <a:noFill/>
-        </p:spPr>
-        <p:txBody>
-          <a:bodyPr wrap="square" lIns="0" tIns="0" rIns="0" bIns="0" anchor="t" rtlCol="0">
-            <a:noAutofit/>
-          </a:bodyPr>
-          <a:lstStyle/>
-          <a:p>
-            <a:pPr algn="l" marL="0" indent="0">
-              <a:lnSpc>
-                <a:spcPct val="100000"/>
-              </a:lnSpc>
-              <a:buNone/>
-            </a:pPr>
-            <a:r>
-              <a:rPr lang="ru-RU" sz="2799" b="0" cap="none" spc="0" baseline="0" dirty="0">
-                <a:solidFill>
-                  <a:srgbClr val="FFFFFF"/>
-                </a:solidFill>
-                <a:latin typeface="Inter Light"/>
-                <a:cs typeface="Inter Light"/>
-              </a:rPr>
-              <a:t>Компилятор — проверяет каждое число</a:t>
-            </a:r>
-            <a:endParaRPr lang="ru-RU" sz="2799"/>
-          </a:p>
-        </p:txBody>
-      </p:sp>
-      <p:cxnSp>
-        <p:nvCxnSpPr>
-          <p:cNvPr id="54" name="Line 54"/>
-          <p:cNvCxnSpPr/>
-          <p:nvPr/>
-        </p:nvCxnSpPr>
-        <p:spPr>
-          <a:xfrm>
-            <a:off x="1592885" y="8339927"/>
-            <a:ext cx="12423038" cy="0"/>
-          </a:xfrm>
-          <a:prstGeom prst="line">
-            <a:avLst/>
-          </a:prstGeom>
-          <a:ln w="9525">
-            <a:solidFill>
-              <a:srgbClr val="384848"/>
-            </a:solidFill>
-          </a:ln>
-        </p:spPr>
-      </p:cxnSp>
-      <p:sp>
-        <p:nvSpPr>
-          <p:cNvPr id="55" name="Marker 55"/>
-          <p:cNvSpPr/>
-          <p:nvPr/>
-        </p:nvSpPr>
-        <p:spPr>
-          <a:xfrm>
-            <a:off x="1024128" y="8752275"/>
-            <a:ext cx="135080" cy="135080"/>
-          </a:xfrm>
-          <a:prstGeom prst="ellipse">
-            <a:avLst/>
-          </a:prstGeom>
-          <a:solidFill>
-            <a:srgbClr val="C2D076"/>
-          </a:solidFill>
-          <a:ln>
-            <a:noFill/>
-          </a:ln>
-        </p:spPr>
-      </p:sp>
-      <p:sp>
-        <p:nvSpPr>
-          <p:cNvPr id="56" name="Item 56"/>
-          <p:cNvSpPr txBox="1"/>
-          <p:nvPr/>
-        </p:nvSpPr>
-        <p:spPr>
-          <a:xfrm>
-            <a:off x="1592885" y="8606531"/>
-            <a:ext cx="12423038" cy="451968"/>
-          </a:xfrm>
-          <a:prstGeom prst="rect">
-            <a:avLst/>
-          </a:prstGeom>
-          <a:noFill/>
-        </p:spPr>
-        <p:txBody>
-          <a:bodyPr wrap="square" lIns="0" tIns="0" rIns="0" bIns="0" anchor="t" rtlCol="0">
-            <a:noAutofit/>
-          </a:bodyPr>
-          <a:lstStyle/>
-          <a:p>
-            <a:pPr algn="l" marL="0" indent="0">
-              <a:lnSpc>
-                <a:spcPct val="100000"/>
-              </a:lnSpc>
-              <a:buNone/>
-            </a:pPr>
-            <a:r>
-              <a:rPr lang="ru-RU" sz="2799" b="0" cap="none" spc="0" baseline="0" dirty="0">
-                <a:solidFill>
-                  <a:srgbClr val="FFFFFF"/>
-                </a:solidFill>
-                <a:latin typeface="Inter Light"/>
-                <a:cs typeface="Inter Light"/>
-              </a:rPr>
-              <a:t>Вёрстка — собирает слайды по дизайн-⁠системе шаблона</a:t>
-            </a:r>
-            <a:endParaRPr lang="ru-RU" sz="2799"/>
           </a:p>
         </p:txBody>
       </p:sp>
@@ -6862,6 +6780,562 @@
         <p:spPr>
           <a:xfrm>
             <a:off x="619057" y="2623820"/>
+            <a:ext cx="12707676" cy="1527657"/>
+          </a:xfrm>
+          <a:prstGeom prst="rect">
+            <a:avLst/>
+          </a:prstGeom>
+          <a:noFill/>
+          <a:ln>
+            <a:noFill/>
+          </a:ln>
+        </p:spPr>
+        <p:txBody>
+          <a:bodyPr anchorCtr="0" anchor="t" bIns="0" lIns="0" spcFirstLastPara="1" rIns="0" wrap="square" tIns="0">
+            <a:spAutoFit/>
+          </a:bodyPr>
+          <a:lstStyle/>
+          <a:p>
+            <a:pPr indent="0" lvl="1" marL="0" marR="0" rtl="0" algn="l">
+              <a:lnSpc>
+                <a:spcPct val="120000"/>
+              </a:lnSpc>
+              <a:spcBef>
+                <a:spcPts val="0"/>
+              </a:spcBef>
+              <a:spcAft>
+                <a:spcPts val="0"/>
+              </a:spcAft>
+              <a:buClr>
+                <a:srgbClr val="C2D076"/>
+              </a:buClr>
+              <a:buSzPts val="5600"/>
+              <a:buFont typeface="Inter Medium"/>
+              <a:buNone/>
+            </a:pPr>
+            <a:r>
+              <a:rPr i="0" lang="ru-RU" sz="2799" u="none" cap="none" strike="noStrike">
+                <a:solidFill>
+                  <a:srgbClr val="C2D076"/>
+                </a:solidFill>
+                <a:latin typeface="Inter Medium"/>
+                <a:ea typeface="Inter Medium"/>
+                <a:cs typeface="Inter Medium"/>
+                <a:sym typeface="Inter Medium"/>
+              </a:rPr>
+              <a:t>Открытые модели до 35 млрд параметров создают презентации по правилам</a:t>
+            </a:r>
+            <a:endParaRPr>
+              <a:latin typeface="Inter Medium"/>
+              <a:ea typeface="Inter Medium"/>
+              <a:cs typeface="Inter Medium"/>
+              <a:sym typeface="Inter Medium"/>
+            </a:endParaRPr>
+          </a:p>
+        </p:txBody>
+      </p:sp>
+      <p:sp>
+        <p:nvSpPr>
+          <p:cNvPr id="43" name="Conclusion bar 43"/>
+          <p:cNvSpPr/>
+          <p:nvPr/>
+        </p:nvSpPr>
+        <p:spPr>
+          <a:xfrm>
+            <a:off x="1024128" y="4708484"/>
+            <a:ext cx="61722" cy="366654"/>
+          </a:xfrm>
+          <a:prstGeom prst="rect">
+            <a:avLst/>
+          </a:prstGeom>
+          <a:solidFill>
+            <a:srgbClr val="C2D076"/>
+          </a:solidFill>
+          <a:ln>
+            <a:noFill/>
+          </a:ln>
+        </p:spPr>
+      </p:sp>
+      <p:sp>
+        <p:nvSpPr>
+          <p:cNvPr id="44" name="Conclusion 44"/>
+          <p:cNvSpPr txBox="1"/>
+          <p:nvPr/>
+        </p:nvSpPr>
+        <p:spPr>
+          <a:xfrm>
+            <a:off x="1370228" y="4665827"/>
+            <a:ext cx="14269669" cy="451968"/>
+          </a:xfrm>
+          <a:prstGeom prst="rect">
+            <a:avLst/>
+          </a:prstGeom>
+          <a:noFill/>
+        </p:spPr>
+        <p:txBody>
+          <a:bodyPr wrap="square" lIns="0" tIns="0" rIns="0" bIns="0" anchor="t" rtlCol="0">
+            <a:noAutofit/>
+          </a:bodyPr>
+          <a:lstStyle/>
+          <a:p>
+            <a:pPr algn="l" marL="0" indent="0">
+              <a:lnSpc>
+                <a:spcPct val="100000"/>
+              </a:lnSpc>
+              <a:buNone/>
+            </a:pPr>
+            <a:r>
+              <a:rPr lang="ru-RU" sz="2799" b="1" cap="none" spc="0" baseline="0" dirty="0">
+                <a:solidFill>
+                  <a:srgbClr val="C2D076"/>
+                </a:solidFill>
+                <a:latin typeface="Inter Light"/>
+                <a:cs typeface="Inter Light"/>
+              </a:rPr>
+              <a:t>Работа агента включает анализ, проектирование, проверку и сборку слайдов</a:t>
+            </a:r>
+            <a:endParaRPr lang="ru-RU" sz="2799"/>
+          </a:p>
+        </p:txBody>
+      </p:sp>
+      <p:sp>
+        <p:nvSpPr>
+          <p:cNvPr id="45" name="Marker 45"/>
+          <p:cNvSpPr/>
+          <p:nvPr/>
+        </p:nvSpPr>
+        <p:spPr>
+          <a:xfrm>
+            <a:off x="1024128" y="5633871"/>
+            <a:ext cx="135080" cy="135080"/>
+          </a:xfrm>
+          <a:prstGeom prst="ellipse">
+            <a:avLst/>
+          </a:prstGeom>
+          <a:solidFill>
+            <a:srgbClr val="C2D076"/>
+          </a:solidFill>
+          <a:ln>
+            <a:noFill/>
+          </a:ln>
+        </p:spPr>
+      </p:sp>
+      <p:sp>
+        <p:nvSpPr>
+          <p:cNvPr id="46" name="Item 46"/>
+          <p:cNvSpPr txBox="1"/>
+          <p:nvPr/>
+        </p:nvSpPr>
+        <p:spPr>
+          <a:xfrm>
+            <a:off x="1592885" y="5488127"/>
+            <a:ext cx="12423038" cy="451968"/>
+          </a:xfrm>
+          <a:prstGeom prst="rect">
+            <a:avLst/>
+          </a:prstGeom>
+          <a:noFill/>
+        </p:spPr>
+        <p:txBody>
+          <a:bodyPr wrap="square" lIns="0" tIns="0" rIns="0" bIns="0" anchor="t" rtlCol="0">
+            <a:noAutofit/>
+          </a:bodyPr>
+          <a:lstStyle/>
+          <a:p>
+            <a:pPr algn="l" marL="0" indent="0">
+              <a:lnSpc>
+                <a:spcPct val="100000"/>
+              </a:lnSpc>
+              <a:buNone/>
+            </a:pPr>
+            <a:r>
+              <a:rPr lang="ru-RU" sz="2799" b="0" cap="none" spc="0" baseline="0" dirty="0">
+                <a:solidFill>
+                  <a:srgbClr val="FFFFFF"/>
+                </a:solidFill>
+                <a:latin typeface="Inter Light"/>
+                <a:cs typeface="Inter Light"/>
+              </a:rPr>
+              <a:t>Аналитик — находит в тексте слайды, ряды данных и просьбы</a:t>
+            </a:r>
+            <a:endParaRPr lang="ru-RU" sz="2799"/>
+          </a:p>
+        </p:txBody>
+      </p:sp>
+      <p:cxnSp>
+        <p:nvCxnSpPr>
+          <p:cNvPr id="47" name="Line 47"/>
+          <p:cNvCxnSpPr/>
+          <p:nvPr/>
+        </p:nvCxnSpPr>
+        <p:spPr>
+          <a:xfrm>
+            <a:off x="1592885" y="6100057"/>
+            <a:ext cx="12423038" cy="0"/>
+          </a:xfrm>
+          <a:prstGeom prst="line">
+            <a:avLst/>
+          </a:prstGeom>
+          <a:ln w="9525">
+            <a:solidFill>
+              <a:srgbClr val="384848"/>
+            </a:solidFill>
+          </a:ln>
+        </p:spPr>
+      </p:cxnSp>
+      <p:sp>
+        <p:nvSpPr>
+          <p:cNvPr id="48" name="Marker 48"/>
+          <p:cNvSpPr/>
+          <p:nvPr/>
+        </p:nvSpPr>
+        <p:spPr>
+          <a:xfrm>
+            <a:off x="1024128" y="6405763"/>
+            <a:ext cx="135080" cy="135080"/>
+          </a:xfrm>
+          <a:prstGeom prst="ellipse">
+            <a:avLst/>
+          </a:prstGeom>
+          <a:solidFill>
+            <a:srgbClr val="C2D076"/>
+          </a:solidFill>
+          <a:ln>
+            <a:noFill/>
+          </a:ln>
+        </p:spPr>
+      </p:sp>
+      <p:sp>
+        <p:nvSpPr>
+          <p:cNvPr id="49" name="Item 49"/>
+          <p:cNvSpPr txBox="1"/>
+          <p:nvPr/>
+        </p:nvSpPr>
+        <p:spPr>
+          <a:xfrm>
+            <a:off x="1592885" y="6260019"/>
+            <a:ext cx="12423038" cy="451968"/>
+          </a:xfrm>
+          <a:prstGeom prst="rect">
+            <a:avLst/>
+          </a:prstGeom>
+          <a:noFill/>
+        </p:spPr>
+        <p:txBody>
+          <a:bodyPr wrap="square" lIns="0" tIns="0" rIns="0" bIns="0" anchor="t" rtlCol="0">
+            <a:noAutofit/>
+          </a:bodyPr>
+          <a:lstStyle/>
+          <a:p>
+            <a:pPr algn="l" marL="0" indent="0">
+              <a:lnSpc>
+                <a:spcPct val="100000"/>
+              </a:lnSpc>
+              <a:buNone/>
+            </a:pPr>
+            <a:r>
+              <a:rPr lang="ru-RU" sz="2799" b="0" cap="none" spc="0" baseline="0" dirty="0">
+                <a:solidFill>
+                  <a:srgbClr val="FFFFFF"/>
+                </a:solidFill>
+                <a:latin typeface="Inter Light"/>
+                <a:cs typeface="Inter Light"/>
+              </a:rPr>
+              <a:t>Дизайнер — продумывает каждый слайд отдельно</a:t>
+            </a:r>
+            <a:endParaRPr lang="ru-RU" sz="2799"/>
+          </a:p>
+        </p:txBody>
+      </p:sp>
+      <p:cxnSp>
+        <p:nvCxnSpPr>
+          <p:cNvPr id="50" name="Line 50"/>
+          <p:cNvCxnSpPr/>
+          <p:nvPr/>
+        </p:nvCxnSpPr>
+        <p:spPr>
+          <a:xfrm>
+            <a:off x="1592885" y="6871949"/>
+            <a:ext cx="12423038" cy="0"/>
+          </a:xfrm>
+          <a:prstGeom prst="line">
+            <a:avLst/>
+          </a:prstGeom>
+          <a:ln w="9525">
+            <a:solidFill>
+              <a:srgbClr val="384848"/>
+            </a:solidFill>
+          </a:ln>
+        </p:spPr>
+      </p:cxnSp>
+      <p:sp>
+        <p:nvSpPr>
+          <p:cNvPr id="51" name="Marker 51"/>
+          <p:cNvSpPr/>
+          <p:nvPr/>
+        </p:nvSpPr>
+        <p:spPr>
+          <a:xfrm>
+            <a:off x="1024128" y="7177655"/>
+            <a:ext cx="135080" cy="135080"/>
+          </a:xfrm>
+          <a:prstGeom prst="ellipse">
+            <a:avLst/>
+          </a:prstGeom>
+          <a:solidFill>
+            <a:srgbClr val="C2D076"/>
+          </a:solidFill>
+          <a:ln>
+            <a:noFill/>
+          </a:ln>
+        </p:spPr>
+      </p:sp>
+      <p:sp>
+        <p:nvSpPr>
+          <p:cNvPr id="52" name="Item 52"/>
+          <p:cNvSpPr txBox="1"/>
+          <p:nvPr/>
+        </p:nvSpPr>
+        <p:spPr>
+          <a:xfrm>
+            <a:off x="1592885" y="7031911"/>
+            <a:ext cx="12423038" cy="451968"/>
+          </a:xfrm>
+          <a:prstGeom prst="rect">
+            <a:avLst/>
+          </a:prstGeom>
+          <a:noFill/>
+        </p:spPr>
+        <p:txBody>
+          <a:bodyPr wrap="square" lIns="0" tIns="0" rIns="0" bIns="0" anchor="t" rtlCol="0">
+            <a:noAutofit/>
+          </a:bodyPr>
+          <a:lstStyle/>
+          <a:p>
+            <a:pPr algn="l" marL="0" indent="0">
+              <a:lnSpc>
+                <a:spcPct val="100000"/>
+              </a:lnSpc>
+              <a:buNone/>
+            </a:pPr>
+            <a:r>
+              <a:rPr lang="ru-RU" sz="2799" b="0" cap="none" spc="0" baseline="0" dirty="0">
+                <a:solidFill>
+                  <a:srgbClr val="FFFFFF"/>
+                </a:solidFill>
+                <a:latin typeface="Inter Light"/>
+                <a:cs typeface="Inter Light"/>
+              </a:rPr>
+              <a:t>Критик — сверяет план с текстом и правилами шаблона</a:t>
+            </a:r>
+            <a:endParaRPr lang="ru-RU" sz="2799"/>
+          </a:p>
+        </p:txBody>
+      </p:sp>
+      <p:cxnSp>
+        <p:nvCxnSpPr>
+          <p:cNvPr id="53" name="Line 53"/>
+          <p:cNvCxnSpPr/>
+          <p:nvPr/>
+        </p:nvCxnSpPr>
+        <p:spPr>
+          <a:xfrm>
+            <a:off x="1592885" y="7643841"/>
+            <a:ext cx="12423038" cy="0"/>
+          </a:xfrm>
+          <a:prstGeom prst="line">
+            <a:avLst/>
+          </a:prstGeom>
+          <a:ln w="9525">
+            <a:solidFill>
+              <a:srgbClr val="384848"/>
+            </a:solidFill>
+          </a:ln>
+        </p:spPr>
+      </p:cxnSp>
+      <p:sp>
+        <p:nvSpPr>
+          <p:cNvPr id="54" name="Marker 54"/>
+          <p:cNvSpPr/>
+          <p:nvPr/>
+        </p:nvSpPr>
+        <p:spPr>
+          <a:xfrm>
+            <a:off x="1024128" y="7949547"/>
+            <a:ext cx="135080" cy="135080"/>
+          </a:xfrm>
+          <a:prstGeom prst="ellipse">
+            <a:avLst/>
+          </a:prstGeom>
+          <a:solidFill>
+            <a:srgbClr val="C2D076"/>
+          </a:solidFill>
+          <a:ln>
+            <a:noFill/>
+          </a:ln>
+        </p:spPr>
+      </p:sp>
+      <p:sp>
+        <p:nvSpPr>
+          <p:cNvPr id="55" name="Item 55"/>
+          <p:cNvSpPr txBox="1"/>
+          <p:nvPr/>
+        </p:nvSpPr>
+        <p:spPr>
+          <a:xfrm>
+            <a:off x="1592885" y="7803803"/>
+            <a:ext cx="12423038" cy="451968"/>
+          </a:xfrm>
+          <a:prstGeom prst="rect">
+            <a:avLst/>
+          </a:prstGeom>
+          <a:noFill/>
+        </p:spPr>
+        <p:txBody>
+          <a:bodyPr wrap="square" lIns="0" tIns="0" rIns="0" bIns="0" anchor="t" rtlCol="0">
+            <a:noAutofit/>
+          </a:bodyPr>
+          <a:lstStyle/>
+          <a:p>
+            <a:pPr algn="l" marL="0" indent="0">
+              <a:lnSpc>
+                <a:spcPct val="100000"/>
+              </a:lnSpc>
+              <a:buNone/>
+            </a:pPr>
+            <a:r>
+              <a:rPr lang="ru-RU" sz="2799" b="0" cap="none" spc="0" baseline="0" dirty="0">
+                <a:solidFill>
+                  <a:srgbClr val="FFFFFF"/>
+                </a:solidFill>
+                <a:latin typeface="Inter Light"/>
+                <a:cs typeface="Inter Light"/>
+              </a:rPr>
+              <a:t>Компилятор — проверяет каждое число</a:t>
+            </a:r>
+            <a:endParaRPr lang="ru-RU" sz="2799"/>
+          </a:p>
+        </p:txBody>
+      </p:sp>
+      <p:cxnSp>
+        <p:nvCxnSpPr>
+          <p:cNvPr id="56" name="Line 56"/>
+          <p:cNvCxnSpPr/>
+          <p:nvPr/>
+        </p:nvCxnSpPr>
+        <p:spPr>
+          <a:xfrm>
+            <a:off x="1592885" y="8415733"/>
+            <a:ext cx="12423038" cy="0"/>
+          </a:xfrm>
+          <a:prstGeom prst="line">
+            <a:avLst/>
+          </a:prstGeom>
+          <a:ln w="9525">
+            <a:solidFill>
+              <a:srgbClr val="384848"/>
+            </a:solidFill>
+          </a:ln>
+        </p:spPr>
+      </p:cxnSp>
+      <p:sp>
+        <p:nvSpPr>
+          <p:cNvPr id="57" name="Marker 57"/>
+          <p:cNvSpPr/>
+          <p:nvPr/>
+        </p:nvSpPr>
+        <p:spPr>
+          <a:xfrm>
+            <a:off x="1024128" y="8721439"/>
+            <a:ext cx="135080" cy="135080"/>
+          </a:xfrm>
+          <a:prstGeom prst="ellipse">
+            <a:avLst/>
+          </a:prstGeom>
+          <a:solidFill>
+            <a:srgbClr val="C2D076"/>
+          </a:solidFill>
+          <a:ln>
+            <a:noFill/>
+          </a:ln>
+        </p:spPr>
+      </p:sp>
+      <p:sp>
+        <p:nvSpPr>
+          <p:cNvPr id="58" name="Item 58"/>
+          <p:cNvSpPr txBox="1"/>
+          <p:nvPr/>
+        </p:nvSpPr>
+        <p:spPr>
+          <a:xfrm>
+            <a:off x="1592885" y="8575695"/>
+            <a:ext cx="12423038" cy="451968"/>
+          </a:xfrm>
+          <a:prstGeom prst="rect">
+            <a:avLst/>
+          </a:prstGeom>
+          <a:noFill/>
+        </p:spPr>
+        <p:txBody>
+          <a:bodyPr wrap="square" lIns="0" tIns="0" rIns="0" bIns="0" anchor="t" rtlCol="0">
+            <a:noAutofit/>
+          </a:bodyPr>
+          <a:lstStyle/>
+          <a:p>
+            <a:pPr algn="l" marL="0" indent="0">
+              <a:lnSpc>
+                <a:spcPct val="100000"/>
+              </a:lnSpc>
+              <a:buNone/>
+            </a:pPr>
+            <a:r>
+              <a:rPr lang="ru-RU" sz="2799" b="0" cap="none" spc="0" baseline="0" dirty="0">
+                <a:solidFill>
+                  <a:srgbClr val="FFFFFF"/>
+                </a:solidFill>
+                <a:latin typeface="Inter Light"/>
+                <a:cs typeface="Inter Light"/>
+              </a:rPr>
+              <a:t>Вёрстка — собирает слайды по дизайн-⁠системе шаблона</a:t>
+            </a:r>
+            <a:endParaRPr lang="ru-RU" sz="2799"/>
+          </a:p>
+        </p:txBody>
+      </p:sp>
+    </p:spTree>
+  </p:cSld>
+  <p:clrMapOvr>
+    <a:masterClrMapping/>
+  </p:clrMapOvr>
+</p:sld>
+</file>
+
+<file path=ppt/slides/slide6.xml><?xml version="1.0" encoding="utf-8"?>
+<p:sld xmlns:a="http://schemas.openxmlformats.org/drawingml/2006/main" xmlns:p="http://schemas.openxmlformats.org/presentationml/2006/main" xmlns:r="http://schemas.openxmlformats.org/officeDocument/2006/relationships">
+  <p:cSld>
+    <p:bg>
+      <p:bgPr>
+        <a:solidFill>
+          <a:srgbClr val="001514"/>
+        </a:solidFill>
+      </p:bgPr>
+    </p:bg>
+    <p:spTree>
+      <p:nvGrpSpPr>
+        <p:cNvPr id="1" name=""/>
+        <p:cNvGrpSpPr/>
+        <p:nvPr/>
+      </p:nvGrpSpPr>
+      <p:grpSpPr/>
+      <p:sp>
+        <p:nvSpPr>
+          <p:cNvPr id="42" name="Google Shape;42;p8"/>
+          <p:cNvSpPr txBox="1"/>
+          <p:nvPr/>
+        </p:nvSpPr>
+        <p:spPr>
+          <a:xfrm>
+            <a:off x="619057" y="2623820"/>
             <a:ext cx="15727680" cy="944880"/>
           </a:xfrm>
           <a:prstGeom prst="rect">
@@ -6905,7 +7379,7 @@
                 <a:cs typeface="Inter Medium"/>
                 <a:sym typeface="Inter Medium"/>
               </a:rPr>
-              <a:t>Одно содержание, три подхода к подаче</a:t>
+              <a:t>Содержание одно, подача разная</a:t>
             </a:r>
             <a:endParaRPr>
               <a:latin typeface="Inter Medium"/>
@@ -7496,7 +7970,7 @@
 </p:sld>
 </file>
 
-<file path=ppt/slides/slide6.xml><?xml version="1.0" encoding="utf-8"?>
+<file path=ppt/slides/slide7.xml><?xml version="1.0" encoding="utf-8"?>
 <p:sld xmlns:a="http://schemas.openxmlformats.org/drawingml/2006/main" xmlns:p="http://schemas.openxmlformats.org/presentationml/2006/main" xmlns:r="http://schemas.openxmlformats.org/officeDocument/2006/relationships">
   <p:cSld>
     <p:bg>
@@ -7522,7 +7996,7 @@
         <p:spPr>
           <a:xfrm>
             <a:off x="619057" y="2623820"/>
-            <a:ext cx="15727680" cy="944880"/>
+            <a:ext cx="15727680" cy="809548"/>
           </a:xfrm>
           <a:prstGeom prst="rect">
             <a:avLst/>
@@ -7565,7 +8039,7 @@
                 <a:cs typeface="Inter Medium"/>
                 <a:sym typeface="Inter Medium"/>
               </a:rPr>
-              <a:t>41 проверка качества на слайд</a:t>
+              <a:t>41 автоматическая проверка на качество слайда</a:t>
             </a:r>
             <a:endParaRPr>
               <a:latin typeface="Inter Medium"/>
@@ -7584,8 +8058,8 @@
         </p:nvSpPr>
         <p:spPr>
           <a:xfrm>
-            <a:off x="1024128" y="4137660"/>
-            <a:ext cx="5521512" cy="2051596"/>
+            <a:off x="1024128" y="3947718"/>
+            <a:ext cx="5521512" cy="3473488"/>
           </a:xfrm>
           <a:prstGeom prst="rect">
             <a:avLst/>
@@ -7615,7 +8089,7 @@
                 <a:latin typeface="Inter Light"/>
                 <a:cs typeface="Inter Light"/>
               </a:rPr>
-              <a:t>12 </a:t>
+              <a:t>Наибольшее число проверок — на целостность (</a:t>
             </a:r>
             <a:r>
               <a:rPr lang="ru-RU" sz="2799" b="1" cap="none" spc="0" baseline="0" dirty="0">
@@ -7625,16 +8099,33 @@
                 <a:latin typeface="Inter Light"/>
                 <a:cs typeface="Inter Light"/>
               </a:rPr>
-              <a:t>проверок на целостность — самая большая группа</a:t>
+              <a:t>12</a:t>
+            </a:r>
+            <a:r>
+              <a:rPr lang="ru-RU" sz="2799" b="1" cap="none" spc="0" baseline="0" dirty="0">
+                <a:solidFill>
+                  <a:srgbClr val="C2D076"/>
+                </a:solidFill>
+                <a:latin typeface="Inter Light"/>
+                <a:cs typeface="Inter Light"/>
+              </a:rPr>
+              <a:t>)</a:t>
             </a:r>
             <a:endParaRPr lang="ru-RU" sz="2799"/>
           </a:p>
           <a:p>
-            <a:pPr algn="l" marL="0" indent="0">
+            <a:pPr algn="l" marL="391020" indent="-391020">
               <a:lnSpc>
                 <a:spcPct val="100000"/>
               </a:lnSpc>
-              <a:buNone/>
+              <a:spcAft>
+                <a:spcPts val="1120"/>
+              </a:spcAft>
+              <a:buClr>
+                <a:srgbClr val="C2D076"/>
+              </a:buClr>
+              <a:buFont typeface="Arial"/>
+              <a:buChar char="•"/>
             </a:pPr>
             <a:r>
               <a:rPr lang="ru-RU" sz="2799" b="0" cap="none" spc="0" baseline="0" dirty="0">
@@ -7644,7 +8135,30 @@
                 <a:latin typeface="Inter Light"/>
                 <a:cs typeface="Inter Light"/>
               </a:rPr>
-              <a:t>Найденные проблемы помечаются на слайде</a:t>
+              <a:t>Проблемы исправляются автоматически</a:t>
+            </a:r>
+            <a:endParaRPr lang="ru-RU" sz="2799"/>
+          </a:p>
+          <a:p>
+            <a:pPr algn="l" marL="391020" indent="-391020">
+              <a:lnSpc>
+                <a:spcPct val="100000"/>
+              </a:lnSpc>
+              <a:buClr>
+                <a:srgbClr val="C2D076"/>
+              </a:buClr>
+              <a:buFont typeface="Arial"/>
+              <a:buChar char="•"/>
+            </a:pPr>
+            <a:r>
+              <a:rPr lang="ru-RU" sz="2799" b="0" cap="none" spc="0" baseline="0" dirty="0">
+                <a:solidFill>
+                  <a:srgbClr val="FFFFFF"/>
+                </a:solidFill>
+                <a:latin typeface="Inter Light"/>
+                <a:cs typeface="Inter Light"/>
+              </a:rPr>
+              <a:t>Проверки распределены по категориям</a:t>
             </a:r>
             <a:endParaRPr lang="ru-RU" sz="2799"/>
           </a:p>
@@ -7658,8 +8172,8 @@
         </p:nvCxnSpPr>
         <p:spPr>
           <a:xfrm>
-            <a:off x="6984552" y="4137660"/>
-            <a:ext cx="0" cy="2051596"/>
+            <a:off x="6984552" y="3947718"/>
+            <a:ext cx="0" cy="3473488"/>
           </a:xfrm>
           <a:prstGeom prst="line">
             <a:avLst/>
@@ -7679,7 +8193,7 @@
         </p:nvSpPr>
         <p:spPr>
           <a:xfrm>
-            <a:off x="7423464" y="4137660"/>
+            <a:off x="7423464" y="3947718"/>
             <a:ext cx="9840408" cy="299720"/>
           </a:xfrm>
           <a:prstGeom prst="rect">
@@ -7722,8 +8236,8 @@
           <p:nvPr/>
         </p:nvGraphicFramePr>
         <p:xfrm>
-          <a:off x="7423464" y="4529963"/>
-          <a:ext cx="9840408" cy="4309221"/>
+          <a:off x="7423464" y="4340021"/>
+          <a:ext cx="9840408" cy="4483968"/>
         </p:xfrm>
         <a:graphic>
           <a:graphicData uri="http://schemas.openxmlformats.org/drawingml/2006/chart">
@@ -7739,7 +8253,7 @@
 </p:sld>
 </file>
 
-<file path=ppt/slides/slide7.xml><?xml version="1.0" encoding="utf-8"?>
+<file path=ppt/slides/slide8.xml><?xml version="1.0" encoding="utf-8"?>
 <p:sld xmlns:a="http://schemas.openxmlformats.org/drawingml/2006/main" xmlns:p="http://schemas.openxmlformats.org/presentationml/2006/main" xmlns:r="http://schemas.openxmlformats.org/officeDocument/2006/relationships">
   <p:cSld>
     <p:bg>
@@ -7765,7 +8279,7 @@
         <p:spPr>
           <a:xfrm>
             <a:off x="619057" y="2623820"/>
-            <a:ext cx="10495470" cy="1527657"/>
+            <a:ext cx="15727680" cy="809548"/>
           </a:xfrm>
           <a:prstGeom prst="rect">
             <a:avLst/>
@@ -7799,7 +8313,7 @@
               <a:buNone/>
             </a:pPr>
             <a:r>
-              <a:rPr i="0" lang="ru-RU" sz="2799" u="none" cap="none" strike="noStrike">
+              <a:rPr i="0" lang="ru-RU" sz="4712" u="none" cap="none" strike="noStrike">
                 <a:solidFill>
                   <a:srgbClr val="C2D076"/>
                 </a:solidFill>
@@ -7808,7 +8322,7 @@
                 <a:cs typeface="Inter Medium"/>
                 <a:sym typeface="Inter Medium"/>
               </a:rPr>
-              <a:t>9 демонстрационных презентаций без выдуманных чисел</a:t>
+              <a:t>9 готовых презентаций без выдуманных чисел</a:t>
             </a:r>
             <a:endParaRPr>
               <a:latin typeface="Inter Medium"/>
@@ -7819,17 +8333,81 @@
           </a:p>
         </p:txBody>
       </p:sp>
+      <p:sp>
+        <p:nvSpPr>
+          <p:cNvPr id="47" name="Conclusion bar 47"/>
+          <p:cNvSpPr/>
+          <p:nvPr/>
+        </p:nvSpPr>
+        <p:spPr>
+          <a:xfrm>
+            <a:off x="1024128" y="3990375"/>
+            <a:ext cx="61722" cy="366654"/>
+          </a:xfrm>
+          <a:prstGeom prst="rect">
+            <a:avLst/>
+          </a:prstGeom>
+          <a:solidFill>
+            <a:srgbClr val="C2D076"/>
+          </a:solidFill>
+          <a:ln>
+            <a:noFill/>
+          </a:ln>
+        </p:spPr>
+      </p:sp>
+      <p:sp>
+        <p:nvSpPr>
+          <p:cNvPr id="48" name="Conclusion 48"/>
+          <p:cNvSpPr txBox="1"/>
+          <p:nvPr/>
+        </p:nvSpPr>
+        <p:spPr>
+          <a:xfrm>
+            <a:off x="1370228" y="3947718"/>
+            <a:ext cx="14269669" cy="451968"/>
+          </a:xfrm>
+          <a:prstGeom prst="rect">
+            <a:avLst/>
+          </a:prstGeom>
+          <a:noFill/>
+        </p:spPr>
+        <p:txBody>
+          <a:bodyPr wrap="square" lIns="0" tIns="0" rIns="0" bIns="0" anchor="t" rtlCol="0">
+            <a:noAutofit/>
+          </a:bodyPr>
+          <a:lstStyle/>
+          <a:p>
+            <a:pPr algn="l" marL="0" indent="0">
+              <a:lnSpc>
+                <a:spcPct val="100000"/>
+              </a:lnSpc>
+              <a:buNone/>
+            </a:pPr>
+            <a:r>
+              <a:rPr lang="ru-RU" sz="2799" b="1" cap="none" spc="0" baseline="0" dirty="0">
+                <a:solidFill>
+                  <a:srgbClr val="C2D076"/>
+                </a:solidFill>
+                <a:latin typeface="Inter Light"/>
+                <a:cs typeface="Inter Light"/>
+              </a:rPr>
+              <a:t>Все числа проверены дважды — до и после вёрстки</a:t>
+            </a:r>
+            <a:endParaRPr lang="ru-RU" sz="2799"/>
+          </a:p>
+        </p:txBody>
+      </p:sp>
       <p:graphicFrame>
         <p:nvGraphicFramePr>
-          <p:cNvPr id="43" name="Table"/>
+          <p:cNvPr id="49" name="Table"/>
           <p:cNvGraphicFramePr>
             <a:graphicFrameLocks noGrp="1"/>
           </p:cNvGraphicFramePr>
           <p:nvPr/>
         </p:nvGraphicFramePr>
         <p:xfrm>
-          <a:off x="1024128" y="4665827"/>
-          <a:ext cx="11692615" cy="4123968"/>
+          <a:off x="1024128" y="4770018"/>
+          <a:ext cx="11692615" cy="4030196"/>
         </p:xfrm>
         <a:graphic>
           <a:graphicData uri="http://schemas.openxmlformats.org/drawingml/2006/table">
@@ -7838,10 +8416,10 @@
                 <a:tableStyleId>{2D5ABB26-0587-4C30-8999-92F81FD0307C}</a:tableStyleId>
               </a:tblPr>
               <a:tblGrid>
-                <a:gridCol w="8490075"/>
-                <a:gridCol w="3202540"/>
+                <a:gridCol w="5846308"/>
+                <a:gridCol w="5846307"/>
               </a:tblGrid>
-              <a:tr h="824793">
+              <a:tr h="806039">
                 <a:tc>
                   <a:txBody>
                     <a:bodyPr wrap="square"/>
@@ -7891,7 +8469,7 @@
                     <a:bodyPr wrap="square"/>
                     <a:lstStyle/>
                     <a:p>
-                      <a:pPr algn="r">
+                      <a:pPr algn="l">
                         <a:spcBef>
                           <a:spcPts val="0"/>
                         </a:spcBef>
@@ -7931,7 +8509,7 @@
                   </a:tcPr>
                 </a:tc>
               </a:tr>
-              <a:tr h="1099725">
+              <a:tr h="1074719">
                 <a:tc>
                   <a:txBody>
                     <a:bodyPr wrap="square"/>
@@ -7982,7 +8560,7 @@
                     <a:bodyPr wrap="square"/>
                     <a:lstStyle/>
                     <a:p>
-                      <a:pPr algn="r">
+                      <a:pPr algn="l">
                         <a:spcBef>
                           <a:spcPts val="0"/>
                         </a:spcBef>
@@ -8023,7 +8601,7 @@
                   </a:tcPr>
                 </a:tc>
               </a:tr>
-              <a:tr h="1099725">
+              <a:tr h="1074719">
                 <a:tc>
                   <a:txBody>
                     <a:bodyPr wrap="square"/>
@@ -8074,7 +8652,7 @@
                     <a:bodyPr wrap="square"/>
                     <a:lstStyle/>
                     <a:p>
-                      <a:pPr algn="r">
+                      <a:pPr algn="l">
                         <a:spcBef>
                           <a:spcPts val="0"/>
                         </a:spcBef>
@@ -8083,7 +8661,7 @@
                         </a:spcAft>
                       </a:pPr>
                       <a:r>
-                        <a:rPr sz="2799" b="0" i="0" cap="none" spc="0" baseline="0">
+                        <a:rPr sz="2799" b="0" i="0" cap="none" spc="0" baseline="0" lang="ru-RU">
                           <a:solidFill>
                             <a:srgbClr val="FFFFFF"/>
                           </a:solidFill>
@@ -8091,7 +8669,7 @@
                           <a:ea typeface="Inter Light"/>
                           <a:cs typeface="Inter Light"/>
                         </a:rPr>
-                        <a:t>116–123</a:t>
+                        <a:t>от 116 до 123</a:t>
                       </a:r>
                     </a:p>
                   </a:txBody>
@@ -8115,7 +8693,7 @@
                   </a:tcPr>
                 </a:tc>
               </a:tr>
-              <a:tr h="1099725">
+              <a:tr h="1074719">
                 <a:tc>
                   <a:txBody>
                     <a:bodyPr wrap="square"/>
@@ -8166,7 +8744,7 @@
                     <a:bodyPr wrap="square"/>
                     <a:lstStyle/>
                     <a:p>
-                      <a:pPr algn="r">
+                      <a:pPr algn="l">
                         <a:spcBef>
                           <a:spcPts val="0"/>
                         </a:spcBef>
@@ -8219,7 +8797,7 @@
 </p:sld>
 </file>
 
-<file path=ppt/slides/slide8.xml><?xml version="1.0" encoding="utf-8"?>
+<file path=ppt/slides/slide9.xml><?xml version="1.0" encoding="utf-8"?>
 <p:sld xmlns:a="http://schemas.openxmlformats.org/drawingml/2006/main" xmlns:p="http://schemas.openxmlformats.org/presentationml/2006/main" xmlns:r="http://schemas.openxmlformats.org/officeDocument/2006/relationships">
   <p:cSld>
     <p:bg>
@@ -8245,7 +8823,7 @@
         <p:spPr>
           <a:xfrm>
             <a:off x="619057" y="2623820"/>
-            <a:ext cx="15727680" cy="944880"/>
+            <a:ext cx="12440716" cy="1527657"/>
           </a:xfrm>
           <a:prstGeom prst="rect">
             <a:avLst/>
@@ -8279,7 +8857,7 @@
               <a:buNone/>
             </a:pPr>
             <a:r>
-              <a:rPr i="0" lang="ru-RU" sz="4712" u="none" cap="none" strike="noStrike">
+              <a:rPr i="0" lang="ru-RU" sz="2799" u="none" cap="none" strike="noStrike">
                 <a:solidFill>
                   <a:srgbClr val="C2D076"/>
                 </a:solidFill>
@@ -8288,7 +8866,7 @@
                 <a:cs typeface="Inter Medium"/>
                 <a:sym typeface="Inter Medium"/>
               </a:rPr>
-              <a:t>87 шаблонов, 99 из 100 и 12 форматов</a:t>
+              <a:t>87 шаблонов, 99 из 100 и 12 форматов — универсальный инструмент</a:t>
             </a:r>
             <a:endParaRPr>
               <a:latin typeface="Inter Medium"/>
@@ -8301,13 +8879,13 @@
       </p:sp>
       <p:sp>
         <p:nvSpPr>
-          <p:cNvPr id="47" name="Conclusion bar 47"/>
+          <p:cNvPr id="43" name="Conclusion bar 43"/>
           <p:cNvSpPr/>
           <p:nvPr/>
         </p:nvSpPr>
         <p:spPr>
           <a:xfrm>
-            <a:off x="1024128" y="4180317"/>
+            <a:off x="1024128" y="4708484"/>
             <a:ext cx="61722" cy="366654"/>
           </a:xfrm>
           <a:prstGeom prst="rect">
@@ -8323,13 +8901,13 @@
       </p:sp>
       <p:sp>
         <p:nvSpPr>
-          <p:cNvPr id="48" name="Conclusion 48"/>
+          <p:cNvPr id="44" name="Conclusion 44"/>
           <p:cNvSpPr txBox="1"/>
           <p:nvPr/>
         </p:nvSpPr>
         <p:spPr>
           <a:xfrm>
-            <a:off x="1370228" y="4137660"/>
+            <a:off x="1370228" y="4665827"/>
             <a:ext cx="14269669" cy="451968"/>
           </a:xfrm>
           <a:prstGeom prst="rect">
@@ -8365,15 +8943,15 @@
       </p:sp>
       <p:graphicFrame>
         <p:nvGraphicFramePr>
-          <p:cNvPr id="49" name="Table"/>
+          <p:cNvPr id="45" name="Table"/>
           <p:cNvGraphicFramePr>
             <a:graphicFrameLocks noGrp="1"/>
           </p:cNvGraphicFramePr>
           <p:nvPr/>
         </p:nvGraphicFramePr>
         <p:xfrm>
-          <a:off x="1024128" y="4959960"/>
-          <a:ext cx="11692615" cy="3859248"/>
+          <a:off x="1024128" y="5488127"/>
+          <a:ext cx="11692615" cy="2674620"/>
         </p:xfrm>
         <a:graphic>
           <a:graphicData uri="http://schemas.openxmlformats.org/drawingml/2006/table">
@@ -8382,10 +8960,10 @@
                 <a:tableStyleId>{2D5ABB26-0587-4C30-8999-92F81FD0307C}</a:tableStyleId>
               </a:tblPr>
               <a:tblGrid>
-                <a:gridCol w="8490075"/>
-                <a:gridCol w="3202540"/>
+                <a:gridCol w="9062238"/>
+                <a:gridCol w="2630377"/>
               </a:tblGrid>
-              <a:tr h="771849">
+              <a:tr h="668655">
                 <a:tc>
                   <a:txBody>
                     <a:bodyPr wrap="square"/>
@@ -8400,7 +8978,7 @@
                         </a:spcAft>
                       </a:pPr>
                       <a:r>
-                        <a:rPr sz="2799" b="0" i="0" cap="none" spc="0" baseline="0" lang="ru-RU">
+                        <a:rPr sz="2199" b="0" i="0" cap="none" spc="0" baseline="0" lang="ru-RU">
                           <a:solidFill>
                             <a:srgbClr val="000000"/>
                           </a:solidFill>
@@ -8444,7 +9022,7 @@
                         </a:spcAft>
                       </a:pPr>
                       <a:r>
-                        <a:rPr sz="2799" b="0" i="0" cap="none" spc="0" baseline="0" lang="ru-RU">
+                        <a:rPr sz="2199" b="0" i="0" cap="none" spc="0" baseline="0" lang="ru-RU">
                           <a:solidFill>
                             <a:srgbClr val="000000"/>
                           </a:solidFill>
@@ -8475,7 +9053,7 @@
                   </a:tcPr>
                 </a:tc>
               </a:tr>
-              <a:tr h="1029133">
+              <a:tr h="668655">
                 <a:tc>
                   <a:txBody>
                     <a:bodyPr wrap="square"/>
@@ -8490,7 +9068,7 @@
                         </a:spcAft>
                       </a:pPr>
                       <a:r>
-                        <a:rPr sz="2799" b="0" i="0" cap="none" spc="0" baseline="0" lang="ru-RU">
+                        <a:rPr sz="2199" b="0" i="0" cap="none" spc="0" baseline="0" lang="ru-RU">
                           <a:solidFill>
                             <a:srgbClr val="FFFFFF"/>
                           </a:solidFill>
@@ -8535,7 +9113,7 @@
                         </a:spcAft>
                       </a:pPr>
                       <a:r>
-                        <a:rPr sz="2799" b="0" i="0" cap="none" spc="0" baseline="0">
+                        <a:rPr sz="2199" b="0" i="0" cap="none" spc="0" baseline="0">
                           <a:solidFill>
                             <a:srgbClr val="FFFFFF"/>
                           </a:solidFill>
@@ -8567,7 +9145,7 @@
                   </a:tcPr>
                 </a:tc>
               </a:tr>
-              <a:tr h="1029133">
+              <a:tr h="668655">
                 <a:tc>
                   <a:txBody>
                     <a:bodyPr wrap="square"/>
@@ -8582,7 +9160,7 @@
                         </a:spcAft>
                       </a:pPr>
                       <a:r>
-                        <a:rPr sz="2799" b="0" i="0" cap="none" spc="0" baseline="0" lang="ru-RU">
+                        <a:rPr sz="2199" b="0" i="0" cap="none" spc="0" baseline="0" lang="ru-RU">
                           <a:solidFill>
                             <a:srgbClr val="FFFFFF"/>
                           </a:solidFill>
@@ -8627,7 +9205,7 @@
                         </a:spcAft>
                       </a:pPr>
                       <a:r>
-                        <a:rPr sz="2799" b="0" i="0" cap="none" spc="0" baseline="0" lang="ru-RU">
+                        <a:rPr sz="2199" b="0" i="0" cap="none" spc="0" baseline="0" lang="ru-RU">
                           <a:solidFill>
                             <a:srgbClr val="FFFFFF"/>
                           </a:solidFill>
@@ -8659,7 +9237,7 @@
                   </a:tcPr>
                 </a:tc>
               </a:tr>
-              <a:tr h="1029133">
+              <a:tr h="668655">
                 <a:tc>
                   <a:txBody>
                     <a:bodyPr wrap="square"/>
@@ -8674,7 +9252,7 @@
                         </a:spcAft>
                       </a:pPr>
                       <a:r>
-                        <a:rPr sz="2799" b="0" i="0" cap="none" spc="0" baseline="0" lang="ru-RU">
+                        <a:rPr sz="2199" b="0" i="0" cap="none" spc="0" baseline="0" lang="ru-RU">
                           <a:solidFill>
                             <a:srgbClr val="FFFFFF"/>
                           </a:solidFill>
@@ -8682,7 +9260,7 @@
                           <a:ea typeface="Inter Light"/>
                           <a:cs typeface="Inter Light"/>
                         </a:rPr>
-                        <a:t>Форматов</a:t>
+                        <a:t>Форматов поддержки</a:t>
                       </a:r>
                     </a:p>
                   </a:txBody>
@@ -8719,7 +9297,7 @@
                         </a:spcAft>
                       </a:pPr>
                       <a:r>
-                        <a:rPr sz="2799" b="0" i="0" cap="none" spc="0" baseline="0">
+                        <a:rPr sz="2199" b="0" i="0" cap="none" spc="0" baseline="0">
                           <a:solidFill>
                             <a:srgbClr val="FFFFFF"/>
                           </a:solidFill>
@@ -8752,237 +9330,6 @@
                 </a:tc>
               </a:tr>
             </a:tbl>
-          </a:graphicData>
-        </a:graphic>
-      </p:graphicFrame>
-    </p:spTree>
-  </p:cSld>
-  <p:clrMapOvr>
-    <a:masterClrMapping/>
-  </p:clrMapOvr>
-</p:sld>
-</file>
-
-<file path=ppt/slides/slide9.xml><?xml version="1.0" encoding="utf-8"?>
-<p:sld xmlns:a="http://schemas.openxmlformats.org/drawingml/2006/main" xmlns:p="http://schemas.openxmlformats.org/presentationml/2006/main" xmlns:r="http://schemas.openxmlformats.org/officeDocument/2006/relationships">
-  <p:cSld>
-    <p:bg>
-      <p:bgPr>
-        <a:solidFill>
-          <a:srgbClr val="001514"/>
-        </a:solidFill>
-      </p:bgPr>
-    </p:bg>
-    <p:spTree>
-      <p:nvGrpSpPr>
-        <p:cNvPr id="1" name=""/>
-        <p:cNvGrpSpPr/>
-        <p:nvPr/>
-      </p:nvGrpSpPr>
-      <p:grpSpPr/>
-      <p:sp>
-        <p:nvSpPr>
-          <p:cNvPr id="42" name="Google Shape;42;p8"/>
-          <p:cNvSpPr txBox="1"/>
-          <p:nvPr/>
-        </p:nvSpPr>
-        <p:spPr>
-          <a:xfrm>
-            <a:off x="619057" y="2623820"/>
-            <a:ext cx="15727680" cy="809548"/>
-          </a:xfrm>
-          <a:prstGeom prst="rect">
-            <a:avLst/>
-          </a:prstGeom>
-          <a:noFill/>
-          <a:ln>
-            <a:noFill/>
-          </a:ln>
-        </p:spPr>
-        <p:txBody>
-          <a:bodyPr anchorCtr="0" anchor="t" bIns="0" lIns="0" spcFirstLastPara="1" rIns="0" wrap="square" tIns="0">
-            <a:spAutoFit/>
-          </a:bodyPr>
-          <a:lstStyle/>
-          <a:p>
-            <a:pPr indent="0" lvl="1" marL="0" marR="0" rtl="0" algn="l">
-              <a:lnSpc>
-                <a:spcPct val="120000"/>
-              </a:lnSpc>
-              <a:spcBef>
-                <a:spcPts val="0"/>
-              </a:spcBef>
-              <a:spcAft>
-                <a:spcPts val="0"/>
-              </a:spcAft>
-              <a:buClr>
-                <a:srgbClr val="C2D076"/>
-              </a:buClr>
-              <a:buSzPts val="5600"/>
-              <a:buFont typeface="Inter Medium"/>
-              <a:buNone/>
-            </a:pPr>
-            <a:r>
-              <a:rPr i="0" lang="ru-RU" sz="4712" u="none" cap="none" strike="noStrike">
-                <a:solidFill>
-                  <a:srgbClr val="C2D076"/>
-                </a:solidFill>
-                <a:latin typeface="Inter Medium"/>
-                <a:ea typeface="Inter Medium"/>
-                <a:cs typeface="Inter Medium"/>
-                <a:sym typeface="Inter Medium"/>
-              </a:rPr>
-              <a:t>VK WorkSpace — самый долгий, но всё в лимите</a:t>
-            </a:r>
-            <a:endParaRPr>
-              <a:latin typeface="Inter Medium"/>
-              <a:ea typeface="Inter Medium"/>
-              <a:cs typeface="Inter Medium"/>
-              <a:sym typeface="Inter Medium"/>
-            </a:endParaRPr>
-          </a:p>
-        </p:txBody>
-      </p:sp>
-      <p:sp>
-        <p:nvSpPr>
-          <p:cNvPr id="43" name="Chart note 43"/>
-          <p:cNvSpPr txBox="1"/>
-          <p:nvPr/>
-        </p:nvSpPr>
-        <p:spPr>
-          <a:xfrm>
-            <a:off x="1024128" y="3947718"/>
-            <a:ext cx="5521512" cy="878535"/>
-          </a:xfrm>
-          <a:prstGeom prst="rect">
-            <a:avLst/>
-          </a:prstGeom>
-          <a:noFill/>
-        </p:spPr>
-        <p:txBody>
-          <a:bodyPr wrap="square" lIns="0" tIns="0" rIns="0" bIns="0" anchor="t" rtlCol="0">
-            <a:noAutofit/>
-          </a:bodyPr>
-          <a:lstStyle/>
-          <a:p>
-            <a:pPr algn="l" marL="0" indent="0">
-              <a:lnSpc>
-                <a:spcPct val="100000"/>
-              </a:lnSpc>
-              <a:buNone/>
-            </a:pPr>
-            <a:r>
-              <a:rPr lang="ru-RU" sz="2799" b="1" cap="none" spc="0" baseline="0" dirty="0">
-                <a:solidFill>
-                  <a:srgbClr val="C2D076"/>
-                </a:solidFill>
-                <a:latin typeface="Inter Light"/>
-                <a:cs typeface="Inter Light"/>
-              </a:rPr>
-              <a:t>Все шаблоны укладываются в лимит </a:t>
-            </a:r>
-            <a:r>
-              <a:rPr lang="ru-RU" sz="2799" b="1" cap="none" spc="0" baseline="0" dirty="0">
-                <a:solidFill>
-                  <a:srgbClr val="C2D076"/>
-                </a:solidFill>
-                <a:latin typeface="Inter Light"/>
-                <a:cs typeface="Inter Light"/>
-              </a:rPr>
-              <a:t>5 минут</a:t>
-            </a:r>
-            <a:r>
-              <a:rPr lang="ru-RU" sz="2799" b="1" cap="none" spc="0" baseline="0" dirty="0">
-                <a:solidFill>
-                  <a:srgbClr val="C2D076"/>
-                </a:solidFill>
-                <a:latin typeface="Inter Light"/>
-                <a:cs typeface="Inter Light"/>
-              </a:rPr>
-              <a:t> с запасом</a:t>
-            </a:r>
-            <a:endParaRPr lang="ru-RU" sz="2799"/>
-          </a:p>
-        </p:txBody>
-      </p:sp>
-      <p:cxnSp>
-        <p:nvCxnSpPr>
-          <p:cNvPr id="44" name="Line 44"/>
-          <p:cNvCxnSpPr/>
-          <p:nvPr/>
-        </p:nvCxnSpPr>
-        <p:spPr>
-          <a:xfrm>
-            <a:off x="6984552" y="3947718"/>
-            <a:ext cx="0" cy="878535"/>
-          </a:xfrm>
-          <a:prstGeom prst="line">
-            <a:avLst/>
-          </a:prstGeom>
-          <a:ln w="12700">
-            <a:solidFill>
-              <a:srgbClr val="384848"/>
-            </a:solidFill>
-          </a:ln>
-        </p:spPr>
-      </p:cxnSp>
-      <p:sp>
-        <p:nvSpPr>
-          <p:cNvPr id="45" name="Unit 45"/>
-          <p:cNvSpPr txBox="1"/>
-          <p:nvPr/>
-        </p:nvSpPr>
-        <p:spPr>
-          <a:xfrm>
-            <a:off x="7423464" y="3947718"/>
-            <a:ext cx="9840408" cy="299720"/>
-          </a:xfrm>
-          <a:prstGeom prst="rect">
-            <a:avLst/>
-          </a:prstGeom>
-          <a:noFill/>
-        </p:spPr>
-        <p:txBody>
-          <a:bodyPr wrap="square" lIns="0" tIns="0" rIns="0" bIns="0" anchor="t" rtlCol="0">
-            <a:noAutofit/>
-          </a:bodyPr>
-          <a:lstStyle/>
-          <a:p>
-            <a:pPr algn="l" marL="0" indent="0">
-              <a:lnSpc>
-                <a:spcPct val="100000"/>
-              </a:lnSpc>
-              <a:buNone/>
-            </a:pPr>
-            <a:r>
-              <a:rPr lang="ru-RU" sz="1800" b="0" cap="none" spc="0" baseline="0" dirty="0">
-                <a:solidFill>
-                  <a:srgbClr val="FFFFFF"/>
-                </a:solidFill>
-                <a:latin typeface="Inter Light"/>
-                <a:cs typeface="Inter Light"/>
-              </a:rPr>
-              <a:t>Время генерации трёх вариантов на шаблонах датасета, секунд</a:t>
-            </a:r>
-            <a:endParaRPr lang="ru-RU" sz="1800"/>
-          </a:p>
-        </p:txBody>
-      </p:sp>
-      <p:graphicFrame>
-        <p:nvGraphicFramePr>
-          <p:cNvPr id="46" name="Chart 45"/>
-          <p:cNvGraphicFramePr>
-            <a:graphicFrameLocks noGrp="1"/>
-          </p:cNvGraphicFramePr>
-          <p:nvPr/>
-        </p:nvGraphicFramePr>
-        <p:xfrm>
-          <a:off x="7423464" y="4340021"/>
-          <a:ext cx="9840408" cy="4483968"/>
-        </p:xfrm>
-        <a:graphic>
-          <a:graphicData uri="http://schemas.openxmlformats.org/drawingml/2006/chart">
-            <c:chart xmlns:c="http://schemas.openxmlformats.org/drawingml/2006/chart" r:id="rId2"/>
           </a:graphicData>
         </a:graphic>
       </p:graphicFrame>
